--- a/outputs/AvePoint_Executive_Summary.pptx
+++ b/outputs/AvePoint_Executive_Summary.pptx
@@ -4,15 +4,18 @@
   <p:sldMasterIdLst>
     <p:sldMasterId id="2147483648" r:id="rId1"/>
   </p:sldMasterIdLst>
+  <p:notesMasterIdLst>
+    <p:notesMasterId r:id="rId8"/>
+  </p:notesMasterIdLst>
   <p:sldIdLst>
-    <p:sldId id="256" r:id="rId7"/>
-    <p:sldId id="257" r:id="rId9"/>
-    <p:sldId id="258" r:id="rId10"/>
-    <p:sldId id="259" r:id="rId11"/>
-    <p:sldId id="260" r:id="rId12"/>
-    <p:sldId id="261" r:id="rId13"/>
+    <p:sldId id="256" r:id="rId2"/>
+    <p:sldId id="257" r:id="rId3"/>
+    <p:sldId id="258" r:id="rId4"/>
+    <p:sldId id="259" r:id="rId5"/>
+    <p:sldId id="260" r:id="rId6"/>
+    <p:sldId id="261" r:id="rId7"/>
   </p:sldIdLst>
-  <p:sldSz cx="12191695" cy="6858000" type="screen4x3"/>
+  <p:sldSz cx="12192000" cy="6858000"/>
   <p:notesSz cx="6858000" cy="9144000"/>
   <p:defaultTextStyle>
     <a:defPPr>
@@ -109,11 +112,64 @@
       </a:defRPr>
     </a:lvl9pPr>
   </p:defaultTextStyle>
+  <p:extLst>
+    <p:ext uri="{EFAFB233-063F-42B5-8137-9DF3F51BA10A}">
+      <p15:sldGuideLst xmlns:p15="http://schemas.microsoft.com/office/powerpoint/2012/main">
+        <p15:guide id="1" orient="horz" pos="2160">
+          <p15:clr>
+            <a:srgbClr val="A4A3A4"/>
+          </p15:clr>
+        </p15:guide>
+        <p15:guide id="2" pos="2880">
+          <p15:clr>
+            <a:srgbClr val="A4A3A4"/>
+          </p15:clr>
+        </p15:guide>
+      </p15:sldGuideLst>
+    </p:ext>
+  </p:extLst>
 </p:presentation>
 </file>
 
+<file path=ppt/changesInfos/changesInfo1.xml><?xml version="1.0" encoding="utf-8"?>
+<pc:chgInfo xmlns:a="http://schemas.openxmlformats.org/drawingml/2006/main" xmlns:r="http://schemas.openxmlformats.org/officeDocument/2006/relationships" xmlns:ac="http://schemas.microsoft.com/office/drawing/2013/main/command" xmlns:pc="http://schemas.microsoft.com/office/powerpoint/2013/main/command">
+  <pc:docChgLst>
+    <pc:chgData name="Dmitriy Ratushny" userId="08050032e8047aee" providerId="LiveId" clId="{78EB1A6D-D3A9-4525-A4D5-A50D4E20D487}"/>
+    <pc:docChg chg="modSld">
+      <pc:chgData name="Dmitriy Ratushny" userId="08050032e8047aee" providerId="LiveId" clId="{78EB1A6D-D3A9-4525-A4D5-A50D4E20D487}" dt="2026-07-28T17:18:55.324" v="31" actId="20577"/>
+      <pc:docMkLst>
+        <pc:docMk/>
+      </pc:docMkLst>
+      <pc:sldChg chg="modSp mod">
+        <pc:chgData name="Dmitriy Ratushny" userId="08050032e8047aee" providerId="LiveId" clId="{78EB1A6D-D3A9-4525-A4D5-A50D4E20D487}" dt="2026-07-28T17:18:55.324" v="31" actId="20577"/>
+        <pc:sldMkLst>
+          <pc:docMk/>
+          <pc:sldMk cId="0" sldId="256"/>
+        </pc:sldMkLst>
+        <pc:spChg chg="mod">
+          <ac:chgData name="Dmitriy Ratushny" userId="08050032e8047aee" providerId="LiveId" clId="{78EB1A6D-D3A9-4525-A4D5-A50D4E20D487}" dt="2026-07-28T17:18:15.705" v="3" actId="20577"/>
+          <ac:spMkLst>
+            <pc:docMk/>
+            <pc:sldMk cId="0" sldId="256"/>
+            <ac:spMk id="2" creationId="{00000000-0000-0000-0000-000000000000}"/>
+          </ac:spMkLst>
+        </pc:spChg>
+        <pc:spChg chg="mod">
+          <ac:chgData name="Dmitriy Ratushny" userId="08050032e8047aee" providerId="LiveId" clId="{78EB1A6D-D3A9-4525-A4D5-A50D4E20D487}" dt="2026-07-28T17:18:55.324" v="31" actId="20577"/>
+          <ac:spMkLst>
+            <pc:docMk/>
+            <pc:sldMk cId="0" sldId="256"/>
+            <ac:spMk id="3" creationId="{00000000-0000-0000-0000-000000000000}"/>
+          </ac:spMkLst>
+        </pc:spChg>
+      </pc:sldChg>
+    </pc:docChg>
+  </pc:docChgLst>
+</pc:chgInfo>
+</file>
+
 <file path=ppt/notesMasters/notesMaster1.xml><?xml version="1.0" encoding="utf-8"?>
-<p:notesMaster xmlns:a="http://schemas.openxmlformats.org/drawingml/2006/main" xmlns:p="http://schemas.openxmlformats.org/presentationml/2006/main" xmlns:r="http://schemas.openxmlformats.org/officeDocument/2006/relationships">
+<p:notesMaster xmlns:a="http://schemas.openxmlformats.org/drawingml/2006/main" xmlns:r="http://schemas.openxmlformats.org/officeDocument/2006/relationships" xmlns:p="http://schemas.openxmlformats.org/presentationml/2006/main">
   <p:cSld>
     <p:bg>
       <p:bgRef idx="1001">
@@ -134,241 +190,16 @@
           <a:chExt cx="0" cy="0"/>
         </a:xfrm>
       </p:grpSpPr>
-      <p:sp>
-        <p:nvSpPr>
-          <p:cNvPr id="2" name="Header Placeholder 1"/>
-          <p:cNvSpPr>
-            <a:spLocks noGrp="1"/>
-          </p:cNvSpPr>
-          <p:nvPr>
-            <p:ph type="hdr" sz="quarter"/>
-          </p:nvPr>
-        </p:nvSpPr>
-        <p:spPr>
-          <a:xfrm>
-            <a:off x="0" y="0"/>
-            <a:ext cx="2971800" cy="457200"/>
-          </a:xfrm>
-          <a:prstGeom prst="rect">
-            <a:avLst/>
-          </a:prstGeom>
-        </p:spPr>
-        <p:txBody>
-          <a:bodyPr vert="horz" lIns="91440" tIns="45720" rIns="91440" bIns="45720" rtlCol="0"/>
-          <a:lstStyle>
-            <a:lvl1pPr algn="l">
-              <a:defRPr sz="1200"/>
-            </a:lvl1pPr>
-          </a:lstStyle>
-          <a:p>
-            <a:endParaRPr lang="en-US"/>
-          </a:p>
-        </p:txBody>
-      </p:sp>
-      <p:sp>
-        <p:nvSpPr>
-          <p:cNvPr id="3" name="Date Placeholder 2"/>
-          <p:cNvSpPr>
-            <a:spLocks noGrp="1"/>
-          </p:cNvSpPr>
-          <p:nvPr>
-            <p:ph type="dt" idx="1"/>
-          </p:nvPr>
-        </p:nvSpPr>
-        <p:spPr>
-          <a:xfrm>
-            <a:off x="3884613" y="0"/>
-            <a:ext cx="2971800" cy="457200"/>
-          </a:xfrm>
-          <a:prstGeom prst="rect">
-            <a:avLst/>
-          </a:prstGeom>
-        </p:spPr>
-        <p:txBody>
-          <a:bodyPr vert="horz" lIns="91440" tIns="45720" rIns="91440" bIns="45720" rtlCol="0"/>
-          <a:lstStyle>
-            <a:lvl1pPr algn="r">
-              <a:defRPr sz="1200"/>
-            </a:lvl1pPr>
-          </a:lstStyle>
-          <a:p>
-            <a:fld id="{0F89C1C7-3DCD-1040-A9CF-14679D8B5DDD}" type="datetimeFigureOut">
-              <a:rPr lang="en-US" smtClean="0"/>
-              <a:t>10/17/16</a:t>
-            </a:fld>
-            <a:endParaRPr lang="en-US"/>
-          </a:p>
-        </p:txBody>
-      </p:sp>
-      <p:sp>
-        <p:nvSpPr>
-          <p:cNvPr id="4" name="Slide Image Placeholder 3"/>
-          <p:cNvSpPr>
-            <a:spLocks noGrp="1" noRot="1" noChangeAspect="1"/>
-          </p:cNvSpPr>
-          <p:nvPr>
-            <p:ph type="sldImg" idx="2"/>
-          </p:nvPr>
-        </p:nvSpPr>
-        <p:spPr>
-          <a:xfrm>
-            <a:off x="1143000" y="685800"/>
-            <a:ext cx="4572000" cy="3429000"/>
-          </a:xfrm>
-          <a:prstGeom prst="rect">
-            <a:avLst/>
-          </a:prstGeom>
-          <a:noFill/>
-          <a:ln w="12700">
-            <a:solidFill>
-              <a:prstClr val="black"/>
-            </a:solidFill>
-          </a:ln>
-        </p:spPr>
-        <p:txBody>
-          <a:bodyPr vert="horz" lIns="91440" tIns="45720" rIns="91440" bIns="45720" rtlCol="0" anchor="ctr"/>
-          <a:lstStyle/>
-          <a:p>
-            <a:endParaRPr lang="en-US"/>
-          </a:p>
-        </p:txBody>
-      </p:sp>
-      <p:sp>
-        <p:nvSpPr>
-          <p:cNvPr id="5" name="Notes Placeholder 4"/>
-          <p:cNvSpPr>
-            <a:spLocks noGrp="1"/>
-          </p:cNvSpPr>
-          <p:nvPr>
-            <p:ph type="body" sz="quarter" idx="3"/>
-          </p:nvPr>
-        </p:nvSpPr>
-        <p:spPr>
-          <a:xfrm>
-            <a:off x="685800" y="4343400"/>
-            <a:ext cx="5486400" cy="4114800"/>
-          </a:xfrm>
-          <a:prstGeom prst="rect">
-            <a:avLst/>
-          </a:prstGeom>
-        </p:spPr>
-        <p:txBody>
-          <a:bodyPr vert="horz" lIns="91440" tIns="45720" rIns="91440" bIns="45720" rtlCol="0"/>
-          <a:lstStyle/>
-          <a:p>
-            <a:pPr lvl="0"/>
-            <a:r>
-              <a:rPr lang="en-US" smtClean="0"/>
-              <a:t>Click to edit Master text styles</a:t>
-            </a:r>
-          </a:p>
-          <a:p>
-            <a:pPr lvl="1"/>
-            <a:r>
-              <a:rPr lang="en-US" smtClean="0"/>
-              <a:t>Second level</a:t>
-            </a:r>
-          </a:p>
-          <a:p>
-            <a:pPr lvl="2"/>
-            <a:r>
-              <a:rPr lang="en-US" smtClean="0"/>
-              <a:t>Third level</a:t>
-            </a:r>
-          </a:p>
-          <a:p>
-            <a:pPr lvl="3"/>
-            <a:r>
-              <a:rPr lang="en-US" smtClean="0"/>
-              <a:t>Fourth level</a:t>
-            </a:r>
-          </a:p>
-          <a:p>
-            <a:pPr lvl="4"/>
-            <a:r>
-              <a:rPr lang="en-US" smtClean="0"/>
-              <a:t>Fifth level</a:t>
-            </a:r>
-            <a:endParaRPr lang="en-US"/>
-          </a:p>
-        </p:txBody>
-      </p:sp>
-      <p:sp>
-        <p:nvSpPr>
-          <p:cNvPr id="6" name="Footer Placeholder 5"/>
-          <p:cNvSpPr>
-            <a:spLocks noGrp="1"/>
-          </p:cNvSpPr>
-          <p:nvPr>
-            <p:ph type="ftr" sz="quarter" idx="4"/>
-          </p:nvPr>
-        </p:nvSpPr>
-        <p:spPr>
-          <a:xfrm>
-            <a:off x="0" y="8685213"/>
-            <a:ext cx="2971800" cy="457200"/>
-          </a:xfrm>
-          <a:prstGeom prst="rect">
-            <a:avLst/>
-          </a:prstGeom>
-        </p:spPr>
-        <p:txBody>
-          <a:bodyPr vert="horz" lIns="91440" tIns="45720" rIns="91440" bIns="45720" rtlCol="0" anchor="b"/>
-          <a:lstStyle>
-            <a:lvl1pPr algn="l">
-              <a:defRPr sz="1200"/>
-            </a:lvl1pPr>
-          </a:lstStyle>
-          <a:p>
-            <a:endParaRPr lang="en-US"/>
-          </a:p>
-        </p:txBody>
-      </p:sp>
-      <p:sp>
-        <p:nvSpPr>
-          <p:cNvPr id="7" name="Slide Number Placeholder 6"/>
-          <p:cNvSpPr>
-            <a:spLocks noGrp="1"/>
-          </p:cNvSpPr>
-          <p:nvPr>
-            <p:ph type="sldNum" sz="quarter" idx="5"/>
-          </p:nvPr>
-        </p:nvSpPr>
-        <p:spPr>
-          <a:xfrm>
-            <a:off x="3884613" y="8685213"/>
-            <a:ext cx="2971800" cy="457200"/>
-          </a:xfrm>
-          <a:prstGeom prst="rect">
-            <a:avLst/>
-          </a:prstGeom>
-        </p:spPr>
-        <p:txBody>
-          <a:bodyPr vert="horz" lIns="91440" tIns="45720" rIns="91440" bIns="45720" rtlCol="0" anchor="b"/>
-          <a:lstStyle>
-            <a:lvl1pPr algn="r">
-              <a:defRPr sz="1200"/>
-            </a:lvl1pPr>
-          </a:lstStyle>
-          <a:p>
-            <a:fld id="{BB5E49A5-4136-284D-997B-48E1D791AD67}" type="slidenum">
-              <a:rPr lang="en-US" smtClean="0"/>
-              <a:t>‹#›</a:t>
-            </a:fld>
-            <a:endParaRPr lang="en-US"/>
-          </a:p>
-        </p:txBody>
-      </p:sp>
     </p:spTree>
     <p:extLst>
       <p:ext uri="{BB962C8B-B14F-4D97-AF65-F5344CB8AC3E}">
-        <p14:creationId xmlns:p14="http://schemas.microsoft.com/office/powerpoint/2010/main" val="2623252185"/>
+        <p14:creationId xmlns:p14="http://schemas.microsoft.com/office/powerpoint/2010/main" val="1303840188"/>
       </p:ext>
     </p:extLst>
   </p:cSld>
   <p:clrMap bg1="lt1" tx1="dk1" bg2="lt2" tx2="dk2" accent1="accent1" accent2="accent2" accent3="accent3" accent4="accent4" accent5="accent5" accent6="accent6" hlink="hlink" folHlink="folHlink"/>
   <p:notesStyle>
-    <a:lvl1pPr marL="0" algn="l" defTabSz="457200" rtl="0" eaLnBrk="1" latinLnBrk="0" hangingPunct="1">
+    <a:lvl1pPr marL="0" algn="l" defTabSz="914400" rtl="0" eaLnBrk="1" latinLnBrk="0" hangingPunct="1">
       <a:defRPr sz="1200" kern="1200">
         <a:solidFill>
           <a:schemeClr val="tx1"/>
@@ -378,7 +209,7 @@
         <a:cs typeface="+mn-cs"/>
       </a:defRPr>
     </a:lvl1pPr>
-    <a:lvl2pPr marL="457200" algn="l" defTabSz="457200" rtl="0" eaLnBrk="1" latinLnBrk="0" hangingPunct="1">
+    <a:lvl2pPr marL="457200" algn="l" defTabSz="914400" rtl="0" eaLnBrk="1" latinLnBrk="0" hangingPunct="1">
       <a:defRPr sz="1200" kern="1200">
         <a:solidFill>
           <a:schemeClr val="tx1"/>
@@ -388,7 +219,7 @@
         <a:cs typeface="+mn-cs"/>
       </a:defRPr>
     </a:lvl2pPr>
-    <a:lvl3pPr marL="914400" algn="l" defTabSz="457200" rtl="0" eaLnBrk="1" latinLnBrk="0" hangingPunct="1">
+    <a:lvl3pPr marL="914400" algn="l" defTabSz="914400" rtl="0" eaLnBrk="1" latinLnBrk="0" hangingPunct="1">
       <a:defRPr sz="1200" kern="1200">
         <a:solidFill>
           <a:schemeClr val="tx1"/>
@@ -398,7 +229,7 @@
         <a:cs typeface="+mn-cs"/>
       </a:defRPr>
     </a:lvl3pPr>
-    <a:lvl4pPr marL="1371600" algn="l" defTabSz="457200" rtl="0" eaLnBrk="1" latinLnBrk="0" hangingPunct="1">
+    <a:lvl4pPr marL="1371600" algn="l" defTabSz="914400" rtl="0" eaLnBrk="1" latinLnBrk="0" hangingPunct="1">
       <a:defRPr sz="1200" kern="1200">
         <a:solidFill>
           <a:schemeClr val="tx1"/>
@@ -408,7 +239,7 @@
         <a:cs typeface="+mn-cs"/>
       </a:defRPr>
     </a:lvl4pPr>
-    <a:lvl5pPr marL="1828800" algn="l" defTabSz="457200" rtl="0" eaLnBrk="1" latinLnBrk="0" hangingPunct="1">
+    <a:lvl5pPr marL="1828800" algn="l" defTabSz="914400" rtl="0" eaLnBrk="1" latinLnBrk="0" hangingPunct="1">
       <a:defRPr sz="1200" kern="1200">
         <a:solidFill>
           <a:schemeClr val="tx1"/>
@@ -418,7 +249,7 @@
         <a:cs typeface="+mn-cs"/>
       </a:defRPr>
     </a:lvl5pPr>
-    <a:lvl6pPr marL="2286000" algn="l" defTabSz="457200" rtl="0" eaLnBrk="1" latinLnBrk="0" hangingPunct="1">
+    <a:lvl6pPr marL="2286000" algn="l" defTabSz="914400" rtl="0" eaLnBrk="1" latinLnBrk="0" hangingPunct="1">
       <a:defRPr sz="1200" kern="1200">
         <a:solidFill>
           <a:schemeClr val="tx1"/>
@@ -428,7 +259,7 @@
         <a:cs typeface="+mn-cs"/>
       </a:defRPr>
     </a:lvl6pPr>
-    <a:lvl7pPr marL="2743200" algn="l" defTabSz="457200" rtl="0" eaLnBrk="1" latinLnBrk="0" hangingPunct="1">
+    <a:lvl7pPr marL="2743200" algn="l" defTabSz="914400" rtl="0" eaLnBrk="1" latinLnBrk="0" hangingPunct="1">
       <a:defRPr sz="1200" kern="1200">
         <a:solidFill>
           <a:schemeClr val="tx1"/>
@@ -438,7 +269,7 @@
         <a:cs typeface="+mn-cs"/>
       </a:defRPr>
     </a:lvl7pPr>
-    <a:lvl8pPr marL="3200400" algn="l" defTabSz="457200" rtl="0" eaLnBrk="1" latinLnBrk="0" hangingPunct="1">
+    <a:lvl8pPr marL="3200400" algn="l" defTabSz="914400" rtl="0" eaLnBrk="1" latinLnBrk="0" hangingPunct="1">
       <a:defRPr sz="1200" kern="1200">
         <a:solidFill>
           <a:schemeClr val="tx1"/>
@@ -448,7 +279,7 @@
         <a:cs typeface="+mn-cs"/>
       </a:defRPr>
     </a:lvl8pPr>
-    <a:lvl9pPr marL="3657600" algn="l" defTabSz="457200" rtl="0" eaLnBrk="1" latinLnBrk="0" hangingPunct="1">
+    <a:lvl9pPr marL="3657600" algn="l" defTabSz="914400" rtl="0" eaLnBrk="1" latinLnBrk="0" hangingPunct="1">
       <a:defRPr sz="1200" kern="1200">
         <a:solidFill>
           <a:schemeClr val="tx1"/>
@@ -463,7 +294,7 @@
 </file>
 
 <file path=ppt/notesSlides/notesSlide1.xml><?xml version="1.0" encoding="utf-8"?>
-<p:notes xmlns:a="http://schemas.openxmlformats.org/drawingml/2006/main" xmlns:p="http://schemas.openxmlformats.org/presentationml/2006/main" xmlns:r="http://schemas.openxmlformats.org/officeDocument/2006/relationships">
+<p:notes xmlns:a="http://schemas.openxmlformats.org/drawingml/2006/main" xmlns:r="http://schemas.openxmlformats.org/officeDocument/2006/relationships" xmlns:p="http://schemas.openxmlformats.org/presentationml/2006/main">
   <p:cSld>
     <p:spTree>
       <p:nvGrpSpPr>
@@ -483,7 +314,7 @@
         <p:nvSpPr>
           <p:cNvPr id="2" name="Slide Image Placeholder 1"/>
           <p:cNvSpPr>
-            <a:spLocks noGrp="1"/>
+            <a:spLocks noGrp="1" noRot="1" noChangeAspect="1"/>
           </p:cNvSpPr>
           <p:nvPr>
             <p:ph type="sldImg" idx="2"/>
@@ -498,7 +329,7 @@
             <a:spLocks noGrp="1"/>
           </p:cNvSpPr>
           <p:nvPr>
-            <p:ph type="body" idx="3" sz="quarter"/>
+            <p:ph type="body" sz="quarter" idx="3"/>
           </p:nvPr>
         </p:nvSpPr>
         <p:spPr/>
@@ -519,7 +350,7 @@
             <a:spLocks noGrp="1"/>
           </p:cNvSpPr>
           <p:nvPr>
-            <p:ph type="sldNum" idx="5" sz="quarter"/>
+            <p:ph type="sldNum" sz="quarter" idx="5"/>
           </p:nvPr>
         </p:nvSpPr>
         <p:spPr/>
@@ -570,10 +401,9 @@
           <a:lstStyle/>
           <a:p>
             <a:r>
-              <a:rPr lang="en-US" smtClean="0"/>
+              <a:rPr lang="en-US"/>
               <a:t>Click to edit Master title style</a:t>
             </a:r>
-            <a:endParaRPr lang="en-US"/>
           </a:p>
         </p:txBody>
       </p:sp>
@@ -689,10 +519,9 @@
           </a:lstStyle>
           <a:p>
             <a:r>
-              <a:rPr lang="en-US" smtClean="0"/>
+              <a:rPr lang="en-US"/>
               <a:t>Click to edit Master subtitle style</a:t>
             </a:r>
-            <a:endParaRPr lang="en-US"/>
           </a:p>
         </p:txBody>
       </p:sp>
@@ -713,7 +542,7 @@
           <a:p>
             <a:fld id="{5BCAD085-E8A6-8845-BD4E-CB4CCA059FC4}" type="datetimeFigureOut">
               <a:rPr lang="en-US" smtClean="0"/>
-              <a:t>1/27/13</a:t>
+              <a:t>7/28/2026</a:t>
             </a:fld>
             <a:endParaRPr lang="en-US"/>
           </a:p>
@@ -807,10 +636,9 @@
           <a:lstStyle/>
           <a:p>
             <a:r>
-              <a:rPr lang="en-US" smtClean="0"/>
+              <a:rPr lang="en-US"/>
               <a:t>Click to edit Master title style</a:t>
             </a:r>
-            <a:endParaRPr lang="en-US"/>
           </a:p>
         </p:txBody>
       </p:sp>
@@ -831,38 +659,37 @@
           <a:p>
             <a:pPr lvl="0"/>
             <a:r>
-              <a:rPr lang="en-US" smtClean="0"/>
+              <a:rPr lang="en-US"/>
               <a:t>Click to edit Master text styles</a:t>
             </a:r>
           </a:p>
           <a:p>
             <a:pPr lvl="1"/>
             <a:r>
-              <a:rPr lang="en-US" smtClean="0"/>
+              <a:rPr lang="en-US"/>
               <a:t>Second level</a:t>
             </a:r>
           </a:p>
           <a:p>
             <a:pPr lvl="2"/>
             <a:r>
-              <a:rPr lang="en-US" smtClean="0"/>
+              <a:rPr lang="en-US"/>
               <a:t>Third level</a:t>
             </a:r>
           </a:p>
           <a:p>
             <a:pPr lvl="3"/>
             <a:r>
-              <a:rPr lang="en-US" smtClean="0"/>
+              <a:rPr lang="en-US"/>
               <a:t>Fourth level</a:t>
             </a:r>
           </a:p>
           <a:p>
             <a:pPr lvl="4"/>
             <a:r>
-              <a:rPr lang="en-US" smtClean="0"/>
+              <a:rPr lang="en-US"/>
               <a:t>Fifth level</a:t>
             </a:r>
-            <a:endParaRPr lang="en-US"/>
           </a:p>
         </p:txBody>
       </p:sp>
@@ -883,7 +710,7 @@
           <a:p>
             <a:fld id="{5BCAD085-E8A6-8845-BD4E-CB4CCA059FC4}" type="datetimeFigureOut">
               <a:rPr lang="en-US" smtClean="0"/>
-              <a:t>1/27/13</a:t>
+              <a:t>7/28/2026</a:t>
             </a:fld>
             <a:endParaRPr lang="en-US"/>
           </a:p>
@@ -982,10 +809,9 @@
           <a:lstStyle/>
           <a:p>
             <a:r>
-              <a:rPr lang="en-US" smtClean="0"/>
+              <a:rPr lang="en-US"/>
               <a:t>Click to edit Master title style</a:t>
             </a:r>
-            <a:endParaRPr lang="en-US"/>
           </a:p>
         </p:txBody>
       </p:sp>
@@ -1011,38 +837,37 @@
           <a:p>
             <a:pPr lvl="0"/>
             <a:r>
-              <a:rPr lang="en-US" smtClean="0"/>
+              <a:rPr lang="en-US"/>
               <a:t>Click to edit Master text styles</a:t>
             </a:r>
           </a:p>
           <a:p>
             <a:pPr lvl="1"/>
             <a:r>
-              <a:rPr lang="en-US" smtClean="0"/>
+              <a:rPr lang="en-US"/>
               <a:t>Second level</a:t>
             </a:r>
           </a:p>
           <a:p>
             <a:pPr lvl="2"/>
             <a:r>
-              <a:rPr lang="en-US" smtClean="0"/>
+              <a:rPr lang="en-US"/>
               <a:t>Third level</a:t>
             </a:r>
           </a:p>
           <a:p>
             <a:pPr lvl="3"/>
             <a:r>
-              <a:rPr lang="en-US" smtClean="0"/>
+              <a:rPr lang="en-US"/>
               <a:t>Fourth level</a:t>
             </a:r>
           </a:p>
           <a:p>
             <a:pPr lvl="4"/>
             <a:r>
-              <a:rPr lang="en-US" smtClean="0"/>
+              <a:rPr lang="en-US"/>
               <a:t>Fifth level</a:t>
             </a:r>
-            <a:endParaRPr lang="en-US"/>
           </a:p>
         </p:txBody>
       </p:sp>
@@ -1063,7 +888,7 @@
           <a:p>
             <a:fld id="{5BCAD085-E8A6-8845-BD4E-CB4CCA059FC4}" type="datetimeFigureOut">
               <a:rPr lang="en-US" smtClean="0"/>
-              <a:t>1/27/13</a:t>
+              <a:t>7/28/2026</a:t>
             </a:fld>
             <a:endParaRPr lang="en-US"/>
           </a:p>
@@ -1157,10 +982,9 @@
           <a:lstStyle/>
           <a:p>
             <a:r>
-              <a:rPr lang="en-US" smtClean="0"/>
+              <a:rPr lang="en-US"/>
               <a:t>Click to edit Master title style</a:t>
             </a:r>
-            <a:endParaRPr lang="en-US"/>
           </a:p>
         </p:txBody>
       </p:sp>
@@ -1181,38 +1005,37 @@
           <a:p>
             <a:pPr lvl="0"/>
             <a:r>
-              <a:rPr lang="en-US" smtClean="0"/>
+              <a:rPr lang="en-US"/>
               <a:t>Click to edit Master text styles</a:t>
             </a:r>
           </a:p>
           <a:p>
             <a:pPr lvl="1"/>
             <a:r>
-              <a:rPr lang="en-US" smtClean="0"/>
+              <a:rPr lang="en-US"/>
               <a:t>Second level</a:t>
             </a:r>
           </a:p>
           <a:p>
             <a:pPr lvl="2"/>
             <a:r>
-              <a:rPr lang="en-US" smtClean="0"/>
+              <a:rPr lang="en-US"/>
               <a:t>Third level</a:t>
             </a:r>
           </a:p>
           <a:p>
             <a:pPr lvl="3"/>
             <a:r>
-              <a:rPr lang="en-US" smtClean="0"/>
+              <a:rPr lang="en-US"/>
               <a:t>Fourth level</a:t>
             </a:r>
           </a:p>
           <a:p>
             <a:pPr lvl="4"/>
             <a:r>
-              <a:rPr lang="en-US" smtClean="0"/>
+              <a:rPr lang="en-US"/>
               <a:t>Fifth level</a:t>
             </a:r>
-            <a:endParaRPr lang="en-US"/>
           </a:p>
         </p:txBody>
       </p:sp>
@@ -1233,7 +1056,7 @@
           <a:p>
             <a:fld id="{5BCAD085-E8A6-8845-BD4E-CB4CCA059FC4}" type="datetimeFigureOut">
               <a:rPr lang="en-US" smtClean="0"/>
-              <a:t>1/27/13</a:t>
+              <a:t>7/28/2026</a:t>
             </a:fld>
             <a:endParaRPr lang="en-US"/>
           </a:p>
@@ -1336,10 +1159,9 @@
           </a:lstStyle>
           <a:p>
             <a:r>
-              <a:rPr lang="en-US" smtClean="0"/>
+              <a:rPr lang="en-US"/>
               <a:t>Click to edit Master title style</a:t>
             </a:r>
-            <a:endParaRPr lang="en-US"/>
           </a:p>
         </p:txBody>
       </p:sp>
@@ -1456,7 +1278,7 @@
           <a:p>
             <a:pPr lvl="0"/>
             <a:r>
-              <a:rPr lang="en-US" smtClean="0"/>
+              <a:rPr lang="en-US"/>
               <a:t>Click to edit Master text styles</a:t>
             </a:r>
           </a:p>
@@ -1479,7 +1301,7 @@
           <a:p>
             <a:fld id="{5BCAD085-E8A6-8845-BD4E-CB4CCA059FC4}" type="datetimeFigureOut">
               <a:rPr lang="en-US" smtClean="0"/>
-              <a:t>1/27/13</a:t>
+              <a:t>7/28/2026</a:t>
             </a:fld>
             <a:endParaRPr lang="en-US"/>
           </a:p>
@@ -1573,10 +1395,9 @@
           <a:lstStyle/>
           <a:p>
             <a:r>
-              <a:rPr lang="en-US" smtClean="0"/>
+              <a:rPr lang="en-US"/>
               <a:t>Click to edit Master title style</a:t>
             </a:r>
-            <a:endParaRPr lang="en-US"/>
           </a:p>
         </p:txBody>
       </p:sp>
@@ -1630,38 +1451,37 @@
           <a:p>
             <a:pPr lvl="0"/>
             <a:r>
-              <a:rPr lang="en-US" smtClean="0"/>
+              <a:rPr lang="en-US"/>
               <a:t>Click to edit Master text styles</a:t>
             </a:r>
           </a:p>
           <a:p>
             <a:pPr lvl="1"/>
             <a:r>
-              <a:rPr lang="en-US" smtClean="0"/>
+              <a:rPr lang="en-US"/>
               <a:t>Second level</a:t>
             </a:r>
           </a:p>
           <a:p>
             <a:pPr lvl="2"/>
             <a:r>
-              <a:rPr lang="en-US" smtClean="0"/>
+              <a:rPr lang="en-US"/>
               <a:t>Third level</a:t>
             </a:r>
           </a:p>
           <a:p>
             <a:pPr lvl="3"/>
             <a:r>
-              <a:rPr lang="en-US" smtClean="0"/>
+              <a:rPr lang="en-US"/>
               <a:t>Fourth level</a:t>
             </a:r>
           </a:p>
           <a:p>
             <a:pPr lvl="4"/>
             <a:r>
-              <a:rPr lang="en-US" smtClean="0"/>
+              <a:rPr lang="en-US"/>
               <a:t>Fifth level</a:t>
             </a:r>
-            <a:endParaRPr lang="en-US"/>
           </a:p>
         </p:txBody>
       </p:sp>
@@ -1715,38 +1535,37 @@
           <a:p>
             <a:pPr lvl="0"/>
             <a:r>
-              <a:rPr lang="en-US" smtClean="0"/>
+              <a:rPr lang="en-US"/>
               <a:t>Click to edit Master text styles</a:t>
             </a:r>
           </a:p>
           <a:p>
             <a:pPr lvl="1"/>
             <a:r>
-              <a:rPr lang="en-US" smtClean="0"/>
+              <a:rPr lang="en-US"/>
               <a:t>Second level</a:t>
             </a:r>
           </a:p>
           <a:p>
             <a:pPr lvl="2"/>
             <a:r>
-              <a:rPr lang="en-US" smtClean="0"/>
+              <a:rPr lang="en-US"/>
               <a:t>Third level</a:t>
             </a:r>
           </a:p>
           <a:p>
             <a:pPr lvl="3"/>
             <a:r>
-              <a:rPr lang="en-US" smtClean="0"/>
+              <a:rPr lang="en-US"/>
               <a:t>Fourth level</a:t>
             </a:r>
           </a:p>
           <a:p>
             <a:pPr lvl="4"/>
             <a:r>
-              <a:rPr lang="en-US" smtClean="0"/>
+              <a:rPr lang="en-US"/>
               <a:t>Fifth level</a:t>
             </a:r>
-            <a:endParaRPr lang="en-US"/>
           </a:p>
         </p:txBody>
       </p:sp>
@@ -1767,7 +1586,7 @@
           <a:p>
             <a:fld id="{5BCAD085-E8A6-8845-BD4E-CB4CCA059FC4}" type="datetimeFigureOut">
               <a:rPr lang="en-US" smtClean="0"/>
-              <a:t>1/27/13</a:t>
+              <a:t>7/28/2026</a:t>
             </a:fld>
             <a:endParaRPr lang="en-US"/>
           </a:p>
@@ -1865,10 +1684,9 @@
           </a:lstStyle>
           <a:p>
             <a:r>
-              <a:rPr lang="en-US" smtClean="0"/>
+              <a:rPr lang="en-US"/>
               <a:t>Click to edit Master title style</a:t>
             </a:r>
-            <a:endParaRPr lang="en-US"/>
           </a:p>
         </p:txBody>
       </p:sp>
@@ -1931,7 +1749,7 @@
           <a:p>
             <a:pPr lvl="0"/>
             <a:r>
-              <a:rPr lang="en-US" smtClean="0"/>
+              <a:rPr lang="en-US"/>
               <a:t>Click to edit Master text styles</a:t>
             </a:r>
           </a:p>
@@ -1987,38 +1805,37 @@
           <a:p>
             <a:pPr lvl="0"/>
             <a:r>
-              <a:rPr lang="en-US" smtClean="0"/>
+              <a:rPr lang="en-US"/>
               <a:t>Click to edit Master text styles</a:t>
             </a:r>
           </a:p>
           <a:p>
             <a:pPr lvl="1"/>
             <a:r>
-              <a:rPr lang="en-US" smtClean="0"/>
+              <a:rPr lang="en-US"/>
               <a:t>Second level</a:t>
             </a:r>
           </a:p>
           <a:p>
             <a:pPr lvl="2"/>
             <a:r>
-              <a:rPr lang="en-US" smtClean="0"/>
+              <a:rPr lang="en-US"/>
               <a:t>Third level</a:t>
             </a:r>
           </a:p>
           <a:p>
             <a:pPr lvl="3"/>
             <a:r>
-              <a:rPr lang="en-US" smtClean="0"/>
+              <a:rPr lang="en-US"/>
               <a:t>Fourth level</a:t>
             </a:r>
           </a:p>
           <a:p>
             <a:pPr lvl="4"/>
             <a:r>
-              <a:rPr lang="en-US" smtClean="0"/>
+              <a:rPr lang="en-US"/>
               <a:t>Fifth level</a:t>
             </a:r>
-            <a:endParaRPr lang="en-US"/>
           </a:p>
         </p:txBody>
       </p:sp>
@@ -2081,7 +1898,7 @@
           <a:p>
             <a:pPr lvl="0"/>
             <a:r>
-              <a:rPr lang="en-US" smtClean="0"/>
+              <a:rPr lang="en-US"/>
               <a:t>Click to edit Master text styles</a:t>
             </a:r>
           </a:p>
@@ -2137,38 +1954,37 @@
           <a:p>
             <a:pPr lvl="0"/>
             <a:r>
-              <a:rPr lang="en-US" smtClean="0"/>
+              <a:rPr lang="en-US"/>
               <a:t>Click to edit Master text styles</a:t>
             </a:r>
           </a:p>
           <a:p>
             <a:pPr lvl="1"/>
             <a:r>
-              <a:rPr lang="en-US" smtClean="0"/>
+              <a:rPr lang="en-US"/>
               <a:t>Second level</a:t>
             </a:r>
           </a:p>
           <a:p>
             <a:pPr lvl="2"/>
             <a:r>
-              <a:rPr lang="en-US" smtClean="0"/>
+              <a:rPr lang="en-US"/>
               <a:t>Third level</a:t>
             </a:r>
           </a:p>
           <a:p>
             <a:pPr lvl="3"/>
             <a:r>
-              <a:rPr lang="en-US" smtClean="0"/>
+              <a:rPr lang="en-US"/>
               <a:t>Fourth level</a:t>
             </a:r>
           </a:p>
           <a:p>
             <a:pPr lvl="4"/>
             <a:r>
-              <a:rPr lang="en-US" smtClean="0"/>
+              <a:rPr lang="en-US"/>
               <a:t>Fifth level</a:t>
             </a:r>
-            <a:endParaRPr lang="en-US"/>
           </a:p>
         </p:txBody>
       </p:sp>
@@ -2189,7 +2005,7 @@
           <a:p>
             <a:fld id="{5BCAD085-E8A6-8845-BD4E-CB4CCA059FC4}" type="datetimeFigureOut">
               <a:rPr lang="en-US" smtClean="0"/>
-              <a:t>1/27/13</a:t>
+              <a:t>7/28/2026</a:t>
             </a:fld>
             <a:endParaRPr lang="en-US"/>
           </a:p>
@@ -2283,10 +2099,9 @@
           <a:lstStyle/>
           <a:p>
             <a:r>
-              <a:rPr lang="en-US" smtClean="0"/>
+              <a:rPr lang="en-US"/>
               <a:t>Click to edit Master title style</a:t>
             </a:r>
-            <a:endParaRPr lang="en-US"/>
           </a:p>
         </p:txBody>
       </p:sp>
@@ -2307,7 +2122,7 @@
           <a:p>
             <a:fld id="{5BCAD085-E8A6-8845-BD4E-CB4CCA059FC4}" type="datetimeFigureOut">
               <a:rPr lang="en-US" smtClean="0"/>
-              <a:t>1/27/13</a:t>
+              <a:t>7/28/2026</a:t>
             </a:fld>
             <a:endParaRPr lang="en-US"/>
           </a:p>
@@ -2402,7 +2217,7 @@
           <a:p>
             <a:fld id="{5BCAD085-E8A6-8845-BD4E-CB4CCA059FC4}" type="datetimeFigureOut">
               <a:rPr lang="en-US" smtClean="0"/>
-              <a:t>1/27/13</a:t>
+              <a:t>7/28/2026</a:t>
             </a:fld>
             <a:endParaRPr lang="en-US"/>
           </a:p>
@@ -2505,10 +2320,9 @@
           </a:lstStyle>
           <a:p>
             <a:r>
-              <a:rPr lang="en-US" smtClean="0"/>
+              <a:rPr lang="en-US"/>
               <a:t>Click to edit Master title style</a:t>
             </a:r>
-            <a:endParaRPr lang="en-US"/>
           </a:p>
         </p:txBody>
       </p:sp>
@@ -2562,38 +2376,37 @@
           <a:p>
             <a:pPr lvl="0"/>
             <a:r>
-              <a:rPr lang="en-US" smtClean="0"/>
+              <a:rPr lang="en-US"/>
               <a:t>Click to edit Master text styles</a:t>
             </a:r>
           </a:p>
           <a:p>
             <a:pPr lvl="1"/>
             <a:r>
-              <a:rPr lang="en-US" smtClean="0"/>
+              <a:rPr lang="en-US"/>
               <a:t>Second level</a:t>
             </a:r>
           </a:p>
           <a:p>
             <a:pPr lvl="2"/>
             <a:r>
-              <a:rPr lang="en-US" smtClean="0"/>
+              <a:rPr lang="en-US"/>
               <a:t>Third level</a:t>
             </a:r>
           </a:p>
           <a:p>
             <a:pPr lvl="3"/>
             <a:r>
-              <a:rPr lang="en-US" smtClean="0"/>
+              <a:rPr lang="en-US"/>
               <a:t>Fourth level</a:t>
             </a:r>
           </a:p>
           <a:p>
             <a:pPr lvl="4"/>
             <a:r>
-              <a:rPr lang="en-US" smtClean="0"/>
+              <a:rPr lang="en-US"/>
               <a:t>Fifth level</a:t>
             </a:r>
-            <a:endParaRPr lang="en-US"/>
           </a:p>
         </p:txBody>
       </p:sp>
@@ -2656,7 +2469,7 @@
           <a:p>
             <a:pPr lvl="0"/>
             <a:r>
-              <a:rPr lang="en-US" smtClean="0"/>
+              <a:rPr lang="en-US"/>
               <a:t>Click to edit Master text styles</a:t>
             </a:r>
           </a:p>
@@ -2679,7 +2492,7 @@
           <a:p>
             <a:fld id="{5BCAD085-E8A6-8845-BD4E-CB4CCA059FC4}" type="datetimeFigureOut">
               <a:rPr lang="en-US" smtClean="0"/>
-              <a:t>1/27/13</a:t>
+              <a:t>7/28/2026</a:t>
             </a:fld>
             <a:endParaRPr lang="en-US"/>
           </a:p>
@@ -2782,10 +2595,9 @@
           </a:lstStyle>
           <a:p>
             <a:r>
-              <a:rPr lang="en-US" smtClean="0"/>
+              <a:rPr lang="en-US"/>
               <a:t>Click to edit Master title style</a:t>
             </a:r>
-            <a:endParaRPr lang="en-US"/>
           </a:p>
         </p:txBody>
       </p:sp>
@@ -2909,7 +2721,7 @@
           <a:p>
             <a:pPr lvl="0"/>
             <a:r>
-              <a:rPr lang="en-US" smtClean="0"/>
+              <a:rPr lang="en-US"/>
               <a:t>Click to edit Master text styles</a:t>
             </a:r>
           </a:p>
@@ -2932,7 +2744,7 @@
           <a:p>
             <a:fld id="{5BCAD085-E8A6-8845-BD4E-CB4CCA059FC4}" type="datetimeFigureOut">
               <a:rPr lang="en-US" smtClean="0"/>
-              <a:t>1/27/13</a:t>
+              <a:t>7/28/2026</a:t>
             </a:fld>
             <a:endParaRPr lang="en-US"/>
           </a:p>
@@ -3041,10 +2853,9 @@
           <a:lstStyle/>
           <a:p>
             <a:r>
-              <a:rPr lang="en-US" smtClean="0"/>
+              <a:rPr lang="en-US"/>
               <a:t>Click to edit Master title style</a:t>
             </a:r>
-            <a:endParaRPr lang="en-US"/>
           </a:p>
         </p:txBody>
       </p:sp>
@@ -3075,38 +2886,37 @@
           <a:p>
             <a:pPr lvl="0"/>
             <a:r>
-              <a:rPr lang="en-US" smtClean="0"/>
+              <a:rPr lang="en-US"/>
               <a:t>Click to edit Master text styles</a:t>
             </a:r>
           </a:p>
           <a:p>
             <a:pPr lvl="1"/>
             <a:r>
-              <a:rPr lang="en-US" smtClean="0"/>
+              <a:rPr lang="en-US"/>
               <a:t>Second level</a:t>
             </a:r>
           </a:p>
           <a:p>
             <a:pPr lvl="2"/>
             <a:r>
-              <a:rPr lang="en-US" smtClean="0"/>
+              <a:rPr lang="en-US"/>
               <a:t>Third level</a:t>
             </a:r>
           </a:p>
           <a:p>
             <a:pPr lvl="3"/>
             <a:r>
-              <a:rPr lang="en-US" smtClean="0"/>
+              <a:rPr lang="en-US"/>
               <a:t>Fourth level</a:t>
             </a:r>
           </a:p>
           <a:p>
             <a:pPr lvl="4"/>
             <a:r>
-              <a:rPr lang="en-US" smtClean="0"/>
+              <a:rPr lang="en-US"/>
               <a:t>Fifth level</a:t>
             </a:r>
-            <a:endParaRPr lang="en-US"/>
           </a:p>
         </p:txBody>
       </p:sp>
@@ -3145,7 +2955,7 @@
           <a:p>
             <a:fld id="{5BCAD085-E8A6-8845-BD4E-CB4CCA059FC4}" type="datetimeFigureOut">
               <a:rPr lang="en-US" smtClean="0"/>
-              <a:t>1/27/13</a:t>
+              <a:t>7/28/2026</a:t>
             </a:fld>
             <a:endParaRPr lang="en-US"/>
           </a:p>
@@ -3504,7 +3314,7 @@
 </file>
 
 <file path=ppt/slides/slide1.xml><?xml version="1.0" encoding="utf-8"?>
-<p:sld xmlns:a="http://schemas.openxmlformats.org/drawingml/2006/main" xmlns:p="http://schemas.openxmlformats.org/presentationml/2006/main" xmlns:r="http://schemas.openxmlformats.org/officeDocument/2006/relationships">
+<p:sld xmlns:a="http://schemas.openxmlformats.org/drawingml/2006/main" xmlns:r="http://schemas.openxmlformats.org/officeDocument/2006/relationships" xmlns:p="http://schemas.openxmlformats.org/presentationml/2006/main">
   <p:cSld>
     <p:spTree>
       <p:nvGrpSpPr>
@@ -3512,7 +3322,14 @@
         <p:cNvGrpSpPr/>
         <p:nvPr/>
       </p:nvGrpSpPr>
-      <p:grpSpPr/>
+      <p:grpSpPr>
+        <a:xfrm>
+          <a:off x="0" y="0"/>
+          <a:ext cx="0" cy="0"/>
+          <a:chOff x="0" y="0"/>
+          <a:chExt cx="0" cy="0"/>
+        </a:xfrm>
+      </p:grpSpPr>
       <p:sp>
         <p:nvSpPr>
           <p:cNvPr id="2" name="TextBox 1"/>
@@ -3522,7 +3339,7 @@
         <p:spPr>
           <a:xfrm>
             <a:off x="685800" y="1371600"/>
-            <a:ext cx="10820095" cy="2011680"/>
+            <a:ext cx="10820095" cy="1123384"/>
           </a:xfrm>
           <a:prstGeom prst="rect">
             <a:avLst/>
@@ -3536,7 +3353,7 @@
           <a:lstStyle/>
           <a:p>
             <a:r>
-              <a:rPr sz="4000" b="1" i="0">
+              <a:rPr sz="4000" b="1" i="0" dirty="0">
                 <a:solidFill>
                   <a:srgbClr val="1A1A1A"/>
                 </a:solidFill>
@@ -3552,14 +3369,29 @@
               </a:spcBef>
             </a:pPr>
             <a:r>
-              <a:rPr sz="1700" b="0" i="0">
+              <a:rPr sz="1700" b="0" i="0" dirty="0">
                 <a:solidFill>
                   <a:srgbClr val="5A6270"/>
                 </a:solidFill>
                 <a:latin typeface="Calibri"/>
               </a:rPr>
-              <a:t>Executive summary. You asked three questions. Here are the three answers.</a:t>
-            </a:r>
+              <a:t>Executive summary</a:t>
+            </a:r>
+            <a:r>
+              <a:rPr lang="en-US" sz="1700" dirty="0">
+                <a:solidFill>
+                  <a:srgbClr val="5A6270"/>
+                </a:solidFill>
+                <a:latin typeface="Calibri"/>
+              </a:rPr>
+              <a:t>:</a:t>
+            </a:r>
+            <a:endParaRPr sz="1700" b="0" i="0" dirty="0">
+              <a:solidFill>
+                <a:srgbClr val="5A6270"/>
+              </a:solidFill>
+              <a:latin typeface="Calibri"/>
+            </a:endParaRPr>
           </a:p>
         </p:txBody>
       </p:sp>
@@ -3572,7 +3404,7 @@
         <p:spPr>
           <a:xfrm>
             <a:off x="685800" y="3200400"/>
-            <a:ext cx="10820095" cy="4572000"/>
+            <a:ext cx="10820095" cy="2141612"/>
           </a:xfrm>
           <a:prstGeom prst="rect">
             <a:avLst/>
@@ -3591,7 +3423,7 @@
               </a:spcAft>
             </a:pPr>
             <a:r>
-              <a:rPr sz="1600" b="1" i="0">
+              <a:rPr sz="1600" b="1" i="0" dirty="0">
                 <a:solidFill>
                   <a:srgbClr val="1A1A1A"/>
                 </a:solidFill>
@@ -3607,7 +3439,7 @@
               </a:spcAft>
             </a:pPr>
             <a:r>
-              <a:rPr sz="1400" b="0" i="0">
+              <a:rPr sz="1400" b="0" i="0" dirty="0">
                 <a:solidFill>
                   <a:srgbClr val="1A1A1A"/>
                 </a:solidFill>
@@ -3623,7 +3455,7 @@
               </a:spcAft>
             </a:pPr>
             <a:r>
-              <a:rPr sz="1600" b="1" i="0">
+              <a:rPr sz="1600" b="1" i="0" dirty="0">
                 <a:solidFill>
                   <a:srgbClr val="1A1A1A"/>
                 </a:solidFill>
@@ -3639,7 +3471,7 @@
               </a:spcAft>
             </a:pPr>
             <a:r>
-              <a:rPr sz="1400" b="0" i="0">
+              <a:rPr sz="1400" b="0" i="0" dirty="0">
                 <a:solidFill>
                   <a:srgbClr val="B02E2E"/>
                 </a:solidFill>
@@ -3655,7 +3487,7 @@
               </a:spcAft>
             </a:pPr>
             <a:r>
-              <a:rPr sz="1600" b="1" i="0">
+              <a:rPr sz="1600" b="1" i="0" dirty="0">
                 <a:solidFill>
                   <a:srgbClr val="1A1A1A"/>
                 </a:solidFill>
@@ -3671,13 +3503,40 @@
               </a:spcAft>
             </a:pPr>
             <a:r>
-              <a:rPr sz="1400" b="0" i="0">
+              <a:rPr lang="en-US" sz="1400" b="0" i="0" dirty="0">
                 <a:solidFill>
                   <a:srgbClr val="1E7A4B"/>
                 </a:solidFill>
                 <a:latin typeface="Calibri"/>
               </a:rPr>
-              <a:t>Calling every at-risk customer already pays for itself today. Beyond that we cannot yet prove what works, because we have never recorded taking an action.</a:t>
+              <a:t>Contacting</a:t>
+            </a:r>
+            <a:r>
+              <a:rPr sz="1400" b="0" i="0" dirty="0">
+                <a:solidFill>
+                  <a:srgbClr val="1E7A4B"/>
+                </a:solidFill>
+                <a:latin typeface="Calibri"/>
+              </a:rPr>
+              <a:t> every at-risk customer</a:t>
+            </a:r>
+            <a:r>
+              <a:rPr lang="en-US" sz="1400" b="0" i="0" dirty="0">
+                <a:solidFill>
+                  <a:srgbClr val="1E7A4B"/>
+                </a:solidFill>
+                <a:latin typeface="Calibri"/>
+              </a:rPr>
+              <a:t> as intervention</a:t>
+            </a:r>
+            <a:r>
+              <a:rPr sz="1400" b="0" i="0" dirty="0">
+                <a:solidFill>
+                  <a:srgbClr val="1E7A4B"/>
+                </a:solidFill>
+                <a:latin typeface="Calibri"/>
+              </a:rPr>
+              <a:t> already pays for itself today. Beyond that we cannot yet prove what works, because we have never recorded taking an action.</a:t>
             </a:r>
           </a:p>
         </p:txBody>
@@ -3691,7 +3550,7 @@
 </file>
 
 <file path=ppt/slides/slide2.xml><?xml version="1.0" encoding="utf-8"?>
-<p:sld xmlns:a="http://schemas.openxmlformats.org/drawingml/2006/main" xmlns:p="http://schemas.openxmlformats.org/presentationml/2006/main" xmlns:r="http://schemas.openxmlformats.org/officeDocument/2006/relationships">
+<p:sld xmlns:a="http://schemas.openxmlformats.org/drawingml/2006/main" xmlns:r="http://schemas.openxmlformats.org/officeDocument/2006/relationships" xmlns:p="http://schemas.openxmlformats.org/presentationml/2006/main">
   <p:cSld>
     <p:spTree>
       <p:nvGrpSpPr>
@@ -3699,7 +3558,14 @@
         <p:cNvGrpSpPr/>
         <p:nvPr/>
       </p:nvGrpSpPr>
-      <p:grpSpPr/>
+      <p:grpSpPr>
+        <a:xfrm>
+          <a:off x="0" y="0"/>
+          <a:ext cx="0" cy="0"/>
+          <a:chOff x="0" y="0"/>
+          <a:chExt cx="0" cy="0"/>
+        </a:xfrm>
+      </p:grpSpPr>
       <p:sp>
         <p:nvSpPr>
           <p:cNvPr id="2" name="TextBox 1"/>
@@ -3791,6 +3657,7 @@
           <a:lstStyle/>
           <a:p>
             <a:pPr algn="ctr"/>
+            <a:endParaRPr/>
           </a:p>
         </p:txBody>
       </p:sp>
@@ -3932,7 +3799,7 @@
 </file>
 
 <file path=ppt/slides/slide3.xml><?xml version="1.0" encoding="utf-8"?>
-<p:sld xmlns:a="http://schemas.openxmlformats.org/drawingml/2006/main" xmlns:p="http://schemas.openxmlformats.org/presentationml/2006/main" xmlns:r="http://schemas.openxmlformats.org/officeDocument/2006/relationships">
+<p:sld xmlns:a="http://schemas.openxmlformats.org/drawingml/2006/main" xmlns:r="http://schemas.openxmlformats.org/officeDocument/2006/relationships" xmlns:p="http://schemas.openxmlformats.org/presentationml/2006/main">
   <p:cSld>
     <p:spTree>
       <p:nvGrpSpPr>
@@ -3940,7 +3807,14 @@
         <p:cNvGrpSpPr/>
         <p:nvPr/>
       </p:nvGrpSpPr>
-      <p:grpSpPr/>
+      <p:grpSpPr>
+        <a:xfrm>
+          <a:off x="0" y="0"/>
+          <a:ext cx="0" cy="0"/>
+          <a:chOff x="0" y="0"/>
+          <a:chExt cx="0" cy="0"/>
+        </a:xfrm>
+      </p:grpSpPr>
       <p:sp>
         <p:nvSpPr>
           <p:cNvPr id="2" name="TextBox 1"/>
@@ -4032,6 +3906,7 @@
           <a:lstStyle/>
           <a:p>
             <a:pPr algn="ctr"/>
+            <a:endParaRPr/>
           </a:p>
         </p:txBody>
       </p:sp>
@@ -4277,7 +4152,7 @@
 </file>
 
 <file path=ppt/slides/slide4.xml><?xml version="1.0" encoding="utf-8"?>
-<p:sld xmlns:a="http://schemas.openxmlformats.org/drawingml/2006/main" xmlns:p="http://schemas.openxmlformats.org/presentationml/2006/main" xmlns:r="http://schemas.openxmlformats.org/officeDocument/2006/relationships">
+<p:sld xmlns:a="http://schemas.openxmlformats.org/drawingml/2006/main" xmlns:r="http://schemas.openxmlformats.org/officeDocument/2006/relationships" xmlns:p="http://schemas.openxmlformats.org/presentationml/2006/main">
   <p:cSld>
     <p:spTree>
       <p:nvGrpSpPr>
@@ -4285,7 +4160,14 @@
         <p:cNvGrpSpPr/>
         <p:nvPr/>
       </p:nvGrpSpPr>
-      <p:grpSpPr/>
+      <p:grpSpPr>
+        <a:xfrm>
+          <a:off x="0" y="0"/>
+          <a:ext cx="0" cy="0"/>
+          <a:chOff x="0" y="0"/>
+          <a:chExt cx="0" cy="0"/>
+        </a:xfrm>
+      </p:grpSpPr>
       <p:sp>
         <p:nvSpPr>
           <p:cNvPr id="2" name="TextBox 1"/>
@@ -4377,6 +4259,7 @@
           <a:lstStyle/>
           <a:p>
             <a:pPr algn="ctr"/>
+            <a:endParaRPr/>
           </a:p>
         </p:txBody>
       </p:sp>
@@ -4624,7 +4507,7 @@
 </file>
 
 <file path=ppt/slides/slide5.xml><?xml version="1.0" encoding="utf-8"?>
-<p:sld xmlns:a="http://schemas.openxmlformats.org/drawingml/2006/main" xmlns:p="http://schemas.openxmlformats.org/presentationml/2006/main" xmlns:r="http://schemas.openxmlformats.org/officeDocument/2006/relationships">
+<p:sld xmlns:a="http://schemas.openxmlformats.org/drawingml/2006/main" xmlns:r="http://schemas.openxmlformats.org/officeDocument/2006/relationships" xmlns:p="http://schemas.openxmlformats.org/presentationml/2006/main">
   <p:cSld>
     <p:spTree>
       <p:nvGrpSpPr>
@@ -4632,7 +4515,14 @@
         <p:cNvGrpSpPr/>
         <p:nvPr/>
       </p:nvGrpSpPr>
-      <p:grpSpPr/>
+      <p:grpSpPr>
+        <a:xfrm>
+          <a:off x="0" y="0"/>
+          <a:ext cx="0" cy="0"/>
+          <a:chOff x="0" y="0"/>
+          <a:chExt cx="0" cy="0"/>
+        </a:xfrm>
+      </p:grpSpPr>
       <p:sp>
         <p:nvSpPr>
           <p:cNvPr id="2" name="TextBox 1"/>
@@ -4724,6 +4614,7 @@
           <a:lstStyle/>
           <a:p>
             <a:pPr algn="ctr"/>
+            <a:endParaRPr/>
           </a:p>
         </p:txBody>
       </p:sp>
@@ -5109,7 +5000,7 @@
 </file>
 
 <file path=ppt/slides/slide6.xml><?xml version="1.0" encoding="utf-8"?>
-<p:sld xmlns:a="http://schemas.openxmlformats.org/drawingml/2006/main" xmlns:p="http://schemas.openxmlformats.org/presentationml/2006/main" xmlns:r="http://schemas.openxmlformats.org/officeDocument/2006/relationships">
+<p:sld xmlns:a="http://schemas.openxmlformats.org/drawingml/2006/main" xmlns:r="http://schemas.openxmlformats.org/officeDocument/2006/relationships" xmlns:p="http://schemas.openxmlformats.org/presentationml/2006/main">
   <p:cSld>
     <p:spTree>
       <p:nvGrpSpPr>
@@ -5117,7 +5008,14 @@
         <p:cNvGrpSpPr/>
         <p:nvPr/>
       </p:nvGrpSpPr>
-      <p:grpSpPr/>
+      <p:grpSpPr>
+        <a:xfrm>
+          <a:off x="0" y="0"/>
+          <a:ext cx="0" cy="0"/>
+          <a:chOff x="0" y="0"/>
+          <a:chExt cx="0" cy="0"/>
+        </a:xfrm>
+      </p:grpSpPr>
       <p:sp>
         <p:nvSpPr>
           <p:cNvPr id="2" name="TextBox 1"/>
@@ -5209,6 +5107,7 @@
           <a:lstStyle/>
           <a:p>
             <a:pPr algn="ctr"/>
+            <a:endParaRPr/>
           </a:p>
         </p:txBody>
       </p:sp>
@@ -5784,44 +5683,44 @@
         <a:sysClr val="window" lastClr="FFFFFF"/>
       </a:lt1>
       <a:dk2>
-        <a:srgbClr val="1F497D"/>
+        <a:srgbClr val="0E2841"/>
       </a:dk2>
       <a:lt2>
-        <a:srgbClr val="EEECE1"/>
+        <a:srgbClr val="E8E8E8"/>
       </a:lt2>
       <a:accent1>
-        <a:srgbClr val="4F81BD"/>
+        <a:srgbClr val="156082"/>
       </a:accent1>
       <a:accent2>
-        <a:srgbClr val="C0504D"/>
+        <a:srgbClr val="E97132"/>
       </a:accent2>
       <a:accent3>
-        <a:srgbClr val="9BBB59"/>
+        <a:srgbClr val="196B24"/>
       </a:accent3>
       <a:accent4>
-        <a:srgbClr val="8064A2"/>
+        <a:srgbClr val="0F9ED5"/>
       </a:accent4>
       <a:accent5>
-        <a:srgbClr val="4BACC6"/>
+        <a:srgbClr val="A02B93"/>
       </a:accent5>
       <a:accent6>
-        <a:srgbClr val="F79646"/>
+        <a:srgbClr val="4EA72E"/>
       </a:accent6>
       <a:hlink>
-        <a:srgbClr val="0000FF"/>
+        <a:srgbClr val="467886"/>
       </a:hlink>
       <a:folHlink>
-        <a:srgbClr val="800080"/>
+        <a:srgbClr val="96607D"/>
       </a:folHlink>
     </a:clrScheme>
     <a:fontScheme name="Office">
       <a:majorFont>
-        <a:latin typeface="Calibri"/>
+        <a:latin typeface="Aptos Display" panose="02110004020202020204"/>
         <a:ea typeface=""/>
         <a:cs typeface=""/>
-        <a:font script="Jpan" typeface="ＭＳ Ｐゴシック"/>
+        <a:font script="Jpan" typeface="游ゴシック Light"/>
         <a:font script="Hang" typeface="맑은 고딕"/>
-        <a:font script="Hans" typeface="宋体"/>
+        <a:font script="Hans" typeface="等线 Light"/>
         <a:font script="Hant" typeface="新細明體"/>
         <a:font script="Arab" typeface="Times New Roman"/>
         <a:font script="Hebr" typeface="Times New Roman"/>
@@ -5849,14 +5748,31 @@
         <a:font script="Viet" typeface="Times New Roman"/>
         <a:font script="Uigh" typeface="Microsoft Uighur"/>
         <a:font script="Geor" typeface="Sylfaen"/>
+        <a:font script="Armn" typeface="Arial"/>
+        <a:font script="Bugi" typeface="Leelawadee UI"/>
+        <a:font script="Bopo" typeface="Microsoft JhengHei"/>
+        <a:font script="Java" typeface="Javanese Text"/>
+        <a:font script="Lisu" typeface="Segoe UI"/>
+        <a:font script="Mymr" typeface="Myanmar Text"/>
+        <a:font script="Nkoo" typeface="Ebrima"/>
+        <a:font script="Olck" typeface="Nirmala UI"/>
+        <a:font script="Osma" typeface="Ebrima"/>
+        <a:font script="Phag" typeface="Phagspa"/>
+        <a:font script="Syrn" typeface="Estrangelo Edessa"/>
+        <a:font script="Syrj" typeface="Estrangelo Edessa"/>
+        <a:font script="Syre" typeface="Estrangelo Edessa"/>
+        <a:font script="Sora" typeface="Nirmala UI"/>
+        <a:font script="Tale" typeface="Microsoft Tai Le"/>
+        <a:font script="Talu" typeface="Microsoft New Tai Lue"/>
+        <a:font script="Tfng" typeface="Ebrima"/>
       </a:majorFont>
       <a:minorFont>
-        <a:latin typeface="Calibri"/>
+        <a:latin typeface="Aptos" panose="02110004020202020204"/>
         <a:ea typeface=""/>
         <a:cs typeface=""/>
-        <a:font script="Jpan" typeface="ＭＳ Ｐゴシック"/>
+        <a:font script="Jpan" typeface="游ゴシック"/>
         <a:font script="Hang" typeface="맑은 고딕"/>
-        <a:font script="Hans" typeface="宋体"/>
+        <a:font script="Hans" typeface="等线"/>
         <a:font script="Hant" typeface="新細明體"/>
         <a:font script="Arab" typeface="Arial"/>
         <a:font script="Hebr" typeface="Arial"/>
@@ -5884,6 +5800,23 @@
         <a:font script="Viet" typeface="Arial"/>
         <a:font script="Uigh" typeface="Microsoft Uighur"/>
         <a:font script="Geor" typeface="Sylfaen"/>
+        <a:font script="Armn" typeface="Arial"/>
+        <a:font script="Bugi" typeface="Leelawadee UI"/>
+        <a:font script="Bopo" typeface="Microsoft JhengHei"/>
+        <a:font script="Java" typeface="Javanese Text"/>
+        <a:font script="Lisu" typeface="Segoe UI"/>
+        <a:font script="Mymr" typeface="Myanmar Text"/>
+        <a:font script="Nkoo" typeface="Ebrima"/>
+        <a:font script="Olck" typeface="Nirmala UI"/>
+        <a:font script="Osma" typeface="Ebrima"/>
+        <a:font script="Phag" typeface="Phagspa"/>
+        <a:font script="Syrn" typeface="Estrangelo Edessa"/>
+        <a:font script="Syrj" typeface="Estrangelo Edessa"/>
+        <a:font script="Syre" typeface="Estrangelo Edessa"/>
+        <a:font script="Sora" typeface="Nirmala UI"/>
+        <a:font script="Tale" typeface="Microsoft Tai Le"/>
+        <a:font script="Talu" typeface="Microsoft New Tai Lue"/>
+        <a:font script="Tfng" typeface="Ebrima"/>
       </a:minorFont>
     </a:fontScheme>
     <a:fmtScheme name="Office">
@@ -5895,180 +5828,136 @@
           <a:gsLst>
             <a:gs pos="0">
               <a:schemeClr val="phClr">
-                <a:tint val="50000"/>
-                <a:satMod val="300000"/>
+                <a:lumMod val="110000"/>
+                <a:satMod val="105000"/>
+                <a:tint val="67000"/>
               </a:schemeClr>
             </a:gs>
-            <a:gs pos="35000">
+            <a:gs pos="50000">
               <a:schemeClr val="phClr">
-                <a:tint val="37000"/>
-                <a:satMod val="300000"/>
+                <a:lumMod val="105000"/>
+                <a:satMod val="103000"/>
+                <a:tint val="73000"/>
               </a:schemeClr>
             </a:gs>
             <a:gs pos="100000">
               <a:schemeClr val="phClr">
-                <a:tint val="15000"/>
-                <a:satMod val="350000"/>
+                <a:lumMod val="105000"/>
+                <a:satMod val="109000"/>
+                <a:tint val="81000"/>
               </a:schemeClr>
             </a:gs>
           </a:gsLst>
-          <a:lin ang="16200000" scaled="1"/>
+          <a:lin ang="5400000" scaled="0"/>
         </a:gradFill>
         <a:gradFill rotWithShape="1">
           <a:gsLst>
             <a:gs pos="0">
               <a:schemeClr val="phClr">
-                <a:tint val="100000"/>
+                <a:satMod val="103000"/>
+                <a:lumMod val="102000"/>
+                <a:tint val="94000"/>
+              </a:schemeClr>
+            </a:gs>
+            <a:gs pos="50000">
+              <a:schemeClr val="phClr">
+                <a:satMod val="110000"/>
+                <a:lumMod val="100000"/>
                 <a:shade val="100000"/>
-                <a:satMod val="130000"/>
               </a:schemeClr>
             </a:gs>
             <a:gs pos="100000">
               <a:schemeClr val="phClr">
-                <a:tint val="50000"/>
-                <a:shade val="100000"/>
-                <a:satMod val="350000"/>
+                <a:lumMod val="99000"/>
+                <a:satMod val="120000"/>
+                <a:shade val="78000"/>
               </a:schemeClr>
             </a:gs>
           </a:gsLst>
-          <a:lin ang="16200000" scaled="0"/>
+          <a:lin ang="5400000" scaled="0"/>
         </a:gradFill>
       </a:fillStyleLst>
       <a:lnStyleLst>
-        <a:ln w="9525" cap="flat" cmpd="sng" algn="ctr">
+        <a:ln w="12700" cap="flat" cmpd="sng" algn="ctr">
           <a:solidFill>
-            <a:schemeClr val="phClr">
-              <a:shade val="95000"/>
-              <a:satMod val="105000"/>
-            </a:schemeClr>
+            <a:schemeClr val="phClr"/>
           </a:solidFill>
           <a:prstDash val="solid"/>
+          <a:miter lim="800000"/>
+        </a:ln>
+        <a:ln w="19050" cap="flat" cmpd="sng" algn="ctr">
+          <a:solidFill>
+            <a:schemeClr val="phClr"/>
+          </a:solidFill>
+          <a:prstDash val="solid"/>
+          <a:miter lim="800000"/>
         </a:ln>
         <a:ln w="25400" cap="flat" cmpd="sng" algn="ctr">
           <a:solidFill>
             <a:schemeClr val="phClr"/>
           </a:solidFill>
           <a:prstDash val="solid"/>
-        </a:ln>
-        <a:ln w="38100" cap="flat" cmpd="sng" algn="ctr">
-          <a:solidFill>
-            <a:schemeClr val="phClr"/>
-          </a:solidFill>
-          <a:prstDash val="solid"/>
+          <a:miter lim="800000"/>
         </a:ln>
       </a:lnStyleLst>
       <a:effectStyleLst>
         <a:effectStyle>
+          <a:effectLst/>
+        </a:effectStyle>
+        <a:effectStyle>
+          <a:effectLst/>
+        </a:effectStyle>
+        <a:effectStyle>
           <a:effectLst>
-            <a:outerShdw blurRad="40000" dist="20000" dir="5400000" rotWithShape="0">
+            <a:outerShdw blurRad="57150" dist="19050" dir="5400000" algn="ctr" rotWithShape="0">
               <a:srgbClr val="000000">
-                <a:alpha val="38000"/>
+                <a:alpha val="63000"/>
               </a:srgbClr>
             </a:outerShdw>
           </a:effectLst>
-        </a:effectStyle>
-        <a:effectStyle>
-          <a:effectLst>
-            <a:outerShdw blurRad="40000" dist="23000" dir="5400000" rotWithShape="0">
-              <a:srgbClr val="000000">
-                <a:alpha val="35000"/>
-              </a:srgbClr>
-            </a:outerShdw>
-          </a:effectLst>
-        </a:effectStyle>
-        <a:effectStyle>
-          <a:effectLst>
-            <a:outerShdw blurRad="40000" dist="23000" dir="5400000" rotWithShape="0">
-              <a:srgbClr val="000000">
-                <a:alpha val="35000"/>
-              </a:srgbClr>
-            </a:outerShdw>
-          </a:effectLst>
-          <a:scene3d>
-            <a:camera prst="orthographicFront">
-              <a:rot lat="0" lon="0" rev="0"/>
-            </a:camera>
-            <a:lightRig rig="threePt" dir="t">
-              <a:rot lat="0" lon="0" rev="1200000"/>
-            </a:lightRig>
-          </a:scene3d>
-          <a:sp3d>
-            <a:bevelT w="63500" h="25400"/>
-          </a:sp3d>
         </a:effectStyle>
       </a:effectStyleLst>
       <a:bgFillStyleLst>
         <a:solidFill>
           <a:schemeClr val="phClr"/>
         </a:solidFill>
+        <a:solidFill>
+          <a:schemeClr val="phClr">
+            <a:tint val="95000"/>
+            <a:satMod val="170000"/>
+          </a:schemeClr>
+        </a:solidFill>
         <a:gradFill rotWithShape="1">
           <a:gsLst>
             <a:gs pos="0">
               <a:schemeClr val="phClr">
-                <a:tint val="40000"/>
-                <a:satMod val="350000"/>
+                <a:tint val="93000"/>
+                <a:satMod val="150000"/>
+                <a:shade val="98000"/>
+                <a:lumMod val="102000"/>
               </a:schemeClr>
             </a:gs>
-            <a:gs pos="40000">
+            <a:gs pos="50000">
               <a:schemeClr val="phClr">
-                <a:tint val="45000"/>
-                <a:shade val="99000"/>
-                <a:satMod val="350000"/>
+                <a:tint val="98000"/>
+                <a:satMod val="130000"/>
+                <a:shade val="90000"/>
+                <a:lumMod val="103000"/>
               </a:schemeClr>
             </a:gs>
             <a:gs pos="100000">
               <a:schemeClr val="phClr">
-                <a:shade val="20000"/>
-                <a:satMod val="255000"/>
+                <a:shade val="63000"/>
+                <a:satMod val="120000"/>
               </a:schemeClr>
             </a:gs>
           </a:gsLst>
-          <a:path path="circle">
-            <a:fillToRect l="50000" t="-80000" r="50000" b="180000"/>
-          </a:path>
-        </a:gradFill>
-        <a:gradFill rotWithShape="1">
-          <a:gsLst>
-            <a:gs pos="0">
-              <a:schemeClr val="phClr">
-                <a:tint val="80000"/>
-                <a:satMod val="300000"/>
-              </a:schemeClr>
-            </a:gs>
-            <a:gs pos="100000">
-              <a:schemeClr val="phClr">
-                <a:shade val="30000"/>
-                <a:satMod val="200000"/>
-              </a:schemeClr>
-            </a:gs>
-          </a:gsLst>
-          <a:path path="circle">
-            <a:fillToRect l="50000" t="50000" r="50000" b="50000"/>
-          </a:path>
+          <a:lin ang="5400000" scaled="0"/>
         </a:gradFill>
       </a:bgFillStyleLst>
     </a:fmtScheme>
   </a:themeElements>
   <a:objectDefaults>
-    <a:spDef>
-      <a:spPr/>
-      <a:bodyPr/>
-      <a:lstStyle/>
-      <a:style>
-        <a:lnRef idx="1">
-          <a:schemeClr val="accent1"/>
-        </a:lnRef>
-        <a:fillRef idx="3">
-          <a:schemeClr val="accent1"/>
-        </a:fillRef>
-        <a:effectRef idx="2">
-          <a:schemeClr val="accent1"/>
-        </a:effectRef>
-        <a:fontRef idx="minor">
-          <a:schemeClr val="lt1"/>
-        </a:fontRef>
-      </a:style>
-    </a:spDef>
     <a:lnDef>
       <a:spPr/>
       <a:bodyPr/>
@@ -6090,5 +5979,10 @@
     </a:lnDef>
   </a:objectDefaults>
   <a:extraClrSchemeLst/>
+  <a:extLst>
+    <a:ext uri="{05A4C25C-085E-4340-85A3-A5531E510DB2}">
+      <thm15:themeFamily xmlns:thm15="http://schemas.microsoft.com/office/thememl/2012/main" name="Office Theme" id="{2E142A2C-CD16-42D6-873A-C26D2A0506FA}" vid="{1BDDFF52-6CD6-40A5-AB3C-68EB2F1E4D0A}"/>
+    </a:ext>
+  </a:extLst>
 </a:theme>
 </file>
--- a/outputs/AvePoint_Executive_Summary.pptx
+++ b/outputs/AvePoint_Executive_Summary.pptx
@@ -4,18 +4,15 @@
   <p:sldMasterIdLst>
     <p:sldMasterId id="2147483648" r:id="rId1"/>
   </p:sldMasterIdLst>
-  <p:notesMasterIdLst>
-    <p:notesMasterId r:id="rId8"/>
-  </p:notesMasterIdLst>
   <p:sldIdLst>
-    <p:sldId id="256" r:id="rId2"/>
-    <p:sldId id="257" r:id="rId3"/>
-    <p:sldId id="258" r:id="rId4"/>
-    <p:sldId id="259" r:id="rId5"/>
-    <p:sldId id="260" r:id="rId6"/>
-    <p:sldId id="261" r:id="rId7"/>
+    <p:sldId id="256" r:id="rId7"/>
+    <p:sldId id="257" r:id="rId9"/>
+    <p:sldId id="258" r:id="rId10"/>
+    <p:sldId id="259" r:id="rId11"/>
+    <p:sldId id="260" r:id="rId12"/>
+    <p:sldId id="261" r:id="rId13"/>
   </p:sldIdLst>
-  <p:sldSz cx="12192000" cy="6858000"/>
+  <p:sldSz cx="12191695" cy="6858000" type="screen4x3"/>
   <p:notesSz cx="6858000" cy="9144000"/>
   <p:defaultTextStyle>
     <a:defPPr>
@@ -112,64 +109,11 @@
       </a:defRPr>
     </a:lvl9pPr>
   </p:defaultTextStyle>
-  <p:extLst>
-    <p:ext uri="{EFAFB233-063F-42B5-8137-9DF3F51BA10A}">
-      <p15:sldGuideLst xmlns:p15="http://schemas.microsoft.com/office/powerpoint/2012/main">
-        <p15:guide id="1" orient="horz" pos="2160">
-          <p15:clr>
-            <a:srgbClr val="A4A3A4"/>
-          </p15:clr>
-        </p15:guide>
-        <p15:guide id="2" pos="2880">
-          <p15:clr>
-            <a:srgbClr val="A4A3A4"/>
-          </p15:clr>
-        </p15:guide>
-      </p15:sldGuideLst>
-    </p:ext>
-  </p:extLst>
 </p:presentation>
 </file>
 
-<file path=ppt/changesInfos/changesInfo1.xml><?xml version="1.0" encoding="utf-8"?>
-<pc:chgInfo xmlns:a="http://schemas.openxmlformats.org/drawingml/2006/main" xmlns:r="http://schemas.openxmlformats.org/officeDocument/2006/relationships" xmlns:ac="http://schemas.microsoft.com/office/drawing/2013/main/command" xmlns:pc="http://schemas.microsoft.com/office/powerpoint/2013/main/command">
-  <pc:docChgLst>
-    <pc:chgData name="Dmitriy Ratushny" userId="08050032e8047aee" providerId="LiveId" clId="{78EB1A6D-D3A9-4525-A4D5-A50D4E20D487}"/>
-    <pc:docChg chg="modSld">
-      <pc:chgData name="Dmitriy Ratushny" userId="08050032e8047aee" providerId="LiveId" clId="{78EB1A6D-D3A9-4525-A4D5-A50D4E20D487}" dt="2026-07-28T17:18:55.324" v="31" actId="20577"/>
-      <pc:docMkLst>
-        <pc:docMk/>
-      </pc:docMkLst>
-      <pc:sldChg chg="modSp mod">
-        <pc:chgData name="Dmitriy Ratushny" userId="08050032e8047aee" providerId="LiveId" clId="{78EB1A6D-D3A9-4525-A4D5-A50D4E20D487}" dt="2026-07-28T17:18:55.324" v="31" actId="20577"/>
-        <pc:sldMkLst>
-          <pc:docMk/>
-          <pc:sldMk cId="0" sldId="256"/>
-        </pc:sldMkLst>
-        <pc:spChg chg="mod">
-          <ac:chgData name="Dmitriy Ratushny" userId="08050032e8047aee" providerId="LiveId" clId="{78EB1A6D-D3A9-4525-A4D5-A50D4E20D487}" dt="2026-07-28T17:18:15.705" v="3" actId="20577"/>
-          <ac:spMkLst>
-            <pc:docMk/>
-            <pc:sldMk cId="0" sldId="256"/>
-            <ac:spMk id="2" creationId="{00000000-0000-0000-0000-000000000000}"/>
-          </ac:spMkLst>
-        </pc:spChg>
-        <pc:spChg chg="mod">
-          <ac:chgData name="Dmitriy Ratushny" userId="08050032e8047aee" providerId="LiveId" clId="{78EB1A6D-D3A9-4525-A4D5-A50D4E20D487}" dt="2026-07-28T17:18:55.324" v="31" actId="20577"/>
-          <ac:spMkLst>
-            <pc:docMk/>
-            <pc:sldMk cId="0" sldId="256"/>
-            <ac:spMk id="3" creationId="{00000000-0000-0000-0000-000000000000}"/>
-          </ac:spMkLst>
-        </pc:spChg>
-      </pc:sldChg>
-    </pc:docChg>
-  </pc:docChgLst>
-</pc:chgInfo>
-</file>
-
 <file path=ppt/notesMasters/notesMaster1.xml><?xml version="1.0" encoding="utf-8"?>
-<p:notesMaster xmlns:a="http://schemas.openxmlformats.org/drawingml/2006/main" xmlns:r="http://schemas.openxmlformats.org/officeDocument/2006/relationships" xmlns:p="http://schemas.openxmlformats.org/presentationml/2006/main">
+<p:notesMaster xmlns:a="http://schemas.openxmlformats.org/drawingml/2006/main" xmlns:p="http://schemas.openxmlformats.org/presentationml/2006/main" xmlns:r="http://schemas.openxmlformats.org/officeDocument/2006/relationships">
   <p:cSld>
     <p:bg>
       <p:bgRef idx="1001">
@@ -190,16 +134,241 @@
           <a:chExt cx="0" cy="0"/>
         </a:xfrm>
       </p:grpSpPr>
+      <p:sp>
+        <p:nvSpPr>
+          <p:cNvPr id="2" name="Header Placeholder 1"/>
+          <p:cNvSpPr>
+            <a:spLocks noGrp="1"/>
+          </p:cNvSpPr>
+          <p:nvPr>
+            <p:ph type="hdr" sz="quarter"/>
+          </p:nvPr>
+        </p:nvSpPr>
+        <p:spPr>
+          <a:xfrm>
+            <a:off x="0" y="0"/>
+            <a:ext cx="2971800" cy="457200"/>
+          </a:xfrm>
+          <a:prstGeom prst="rect">
+            <a:avLst/>
+          </a:prstGeom>
+        </p:spPr>
+        <p:txBody>
+          <a:bodyPr vert="horz" lIns="91440" tIns="45720" rIns="91440" bIns="45720" rtlCol="0"/>
+          <a:lstStyle>
+            <a:lvl1pPr algn="l">
+              <a:defRPr sz="1200"/>
+            </a:lvl1pPr>
+          </a:lstStyle>
+          <a:p>
+            <a:endParaRPr lang="en-US"/>
+          </a:p>
+        </p:txBody>
+      </p:sp>
+      <p:sp>
+        <p:nvSpPr>
+          <p:cNvPr id="3" name="Date Placeholder 2"/>
+          <p:cNvSpPr>
+            <a:spLocks noGrp="1"/>
+          </p:cNvSpPr>
+          <p:nvPr>
+            <p:ph type="dt" idx="1"/>
+          </p:nvPr>
+        </p:nvSpPr>
+        <p:spPr>
+          <a:xfrm>
+            <a:off x="3884613" y="0"/>
+            <a:ext cx="2971800" cy="457200"/>
+          </a:xfrm>
+          <a:prstGeom prst="rect">
+            <a:avLst/>
+          </a:prstGeom>
+        </p:spPr>
+        <p:txBody>
+          <a:bodyPr vert="horz" lIns="91440" tIns="45720" rIns="91440" bIns="45720" rtlCol="0"/>
+          <a:lstStyle>
+            <a:lvl1pPr algn="r">
+              <a:defRPr sz="1200"/>
+            </a:lvl1pPr>
+          </a:lstStyle>
+          <a:p>
+            <a:fld id="{0F89C1C7-3DCD-1040-A9CF-14679D8B5DDD}" type="datetimeFigureOut">
+              <a:rPr lang="en-US" smtClean="0"/>
+              <a:t>10/17/16</a:t>
+            </a:fld>
+            <a:endParaRPr lang="en-US"/>
+          </a:p>
+        </p:txBody>
+      </p:sp>
+      <p:sp>
+        <p:nvSpPr>
+          <p:cNvPr id="4" name="Slide Image Placeholder 3"/>
+          <p:cNvSpPr>
+            <a:spLocks noGrp="1" noRot="1" noChangeAspect="1"/>
+          </p:cNvSpPr>
+          <p:nvPr>
+            <p:ph type="sldImg" idx="2"/>
+          </p:nvPr>
+        </p:nvSpPr>
+        <p:spPr>
+          <a:xfrm>
+            <a:off x="1143000" y="685800"/>
+            <a:ext cx="4572000" cy="3429000"/>
+          </a:xfrm>
+          <a:prstGeom prst="rect">
+            <a:avLst/>
+          </a:prstGeom>
+          <a:noFill/>
+          <a:ln w="12700">
+            <a:solidFill>
+              <a:prstClr val="black"/>
+            </a:solidFill>
+          </a:ln>
+        </p:spPr>
+        <p:txBody>
+          <a:bodyPr vert="horz" lIns="91440" tIns="45720" rIns="91440" bIns="45720" rtlCol="0" anchor="ctr"/>
+          <a:lstStyle/>
+          <a:p>
+            <a:endParaRPr lang="en-US"/>
+          </a:p>
+        </p:txBody>
+      </p:sp>
+      <p:sp>
+        <p:nvSpPr>
+          <p:cNvPr id="5" name="Notes Placeholder 4"/>
+          <p:cNvSpPr>
+            <a:spLocks noGrp="1"/>
+          </p:cNvSpPr>
+          <p:nvPr>
+            <p:ph type="body" sz="quarter" idx="3"/>
+          </p:nvPr>
+        </p:nvSpPr>
+        <p:spPr>
+          <a:xfrm>
+            <a:off x="685800" y="4343400"/>
+            <a:ext cx="5486400" cy="4114800"/>
+          </a:xfrm>
+          <a:prstGeom prst="rect">
+            <a:avLst/>
+          </a:prstGeom>
+        </p:spPr>
+        <p:txBody>
+          <a:bodyPr vert="horz" lIns="91440" tIns="45720" rIns="91440" bIns="45720" rtlCol="0"/>
+          <a:lstStyle/>
+          <a:p>
+            <a:pPr lvl="0"/>
+            <a:r>
+              <a:rPr lang="en-US" smtClean="0"/>
+              <a:t>Click to edit Master text styles</a:t>
+            </a:r>
+          </a:p>
+          <a:p>
+            <a:pPr lvl="1"/>
+            <a:r>
+              <a:rPr lang="en-US" smtClean="0"/>
+              <a:t>Second level</a:t>
+            </a:r>
+          </a:p>
+          <a:p>
+            <a:pPr lvl="2"/>
+            <a:r>
+              <a:rPr lang="en-US" smtClean="0"/>
+              <a:t>Third level</a:t>
+            </a:r>
+          </a:p>
+          <a:p>
+            <a:pPr lvl="3"/>
+            <a:r>
+              <a:rPr lang="en-US" smtClean="0"/>
+              <a:t>Fourth level</a:t>
+            </a:r>
+          </a:p>
+          <a:p>
+            <a:pPr lvl="4"/>
+            <a:r>
+              <a:rPr lang="en-US" smtClean="0"/>
+              <a:t>Fifth level</a:t>
+            </a:r>
+            <a:endParaRPr lang="en-US"/>
+          </a:p>
+        </p:txBody>
+      </p:sp>
+      <p:sp>
+        <p:nvSpPr>
+          <p:cNvPr id="6" name="Footer Placeholder 5"/>
+          <p:cNvSpPr>
+            <a:spLocks noGrp="1"/>
+          </p:cNvSpPr>
+          <p:nvPr>
+            <p:ph type="ftr" sz="quarter" idx="4"/>
+          </p:nvPr>
+        </p:nvSpPr>
+        <p:spPr>
+          <a:xfrm>
+            <a:off x="0" y="8685213"/>
+            <a:ext cx="2971800" cy="457200"/>
+          </a:xfrm>
+          <a:prstGeom prst="rect">
+            <a:avLst/>
+          </a:prstGeom>
+        </p:spPr>
+        <p:txBody>
+          <a:bodyPr vert="horz" lIns="91440" tIns="45720" rIns="91440" bIns="45720" rtlCol="0" anchor="b"/>
+          <a:lstStyle>
+            <a:lvl1pPr algn="l">
+              <a:defRPr sz="1200"/>
+            </a:lvl1pPr>
+          </a:lstStyle>
+          <a:p>
+            <a:endParaRPr lang="en-US"/>
+          </a:p>
+        </p:txBody>
+      </p:sp>
+      <p:sp>
+        <p:nvSpPr>
+          <p:cNvPr id="7" name="Slide Number Placeholder 6"/>
+          <p:cNvSpPr>
+            <a:spLocks noGrp="1"/>
+          </p:cNvSpPr>
+          <p:nvPr>
+            <p:ph type="sldNum" sz="quarter" idx="5"/>
+          </p:nvPr>
+        </p:nvSpPr>
+        <p:spPr>
+          <a:xfrm>
+            <a:off x="3884613" y="8685213"/>
+            <a:ext cx="2971800" cy="457200"/>
+          </a:xfrm>
+          <a:prstGeom prst="rect">
+            <a:avLst/>
+          </a:prstGeom>
+        </p:spPr>
+        <p:txBody>
+          <a:bodyPr vert="horz" lIns="91440" tIns="45720" rIns="91440" bIns="45720" rtlCol="0" anchor="b"/>
+          <a:lstStyle>
+            <a:lvl1pPr algn="r">
+              <a:defRPr sz="1200"/>
+            </a:lvl1pPr>
+          </a:lstStyle>
+          <a:p>
+            <a:fld id="{BB5E49A5-4136-284D-997B-48E1D791AD67}" type="slidenum">
+              <a:rPr lang="en-US" smtClean="0"/>
+              <a:t>‹#›</a:t>
+            </a:fld>
+            <a:endParaRPr lang="en-US"/>
+          </a:p>
+        </p:txBody>
+      </p:sp>
     </p:spTree>
     <p:extLst>
       <p:ext uri="{BB962C8B-B14F-4D97-AF65-F5344CB8AC3E}">
-        <p14:creationId xmlns:p14="http://schemas.microsoft.com/office/powerpoint/2010/main" val="1303840188"/>
+        <p14:creationId xmlns:p14="http://schemas.microsoft.com/office/powerpoint/2010/main" val="2623252185"/>
       </p:ext>
     </p:extLst>
   </p:cSld>
   <p:clrMap bg1="lt1" tx1="dk1" bg2="lt2" tx2="dk2" accent1="accent1" accent2="accent2" accent3="accent3" accent4="accent4" accent5="accent5" accent6="accent6" hlink="hlink" folHlink="folHlink"/>
   <p:notesStyle>
-    <a:lvl1pPr marL="0" algn="l" defTabSz="914400" rtl="0" eaLnBrk="1" latinLnBrk="0" hangingPunct="1">
+    <a:lvl1pPr marL="0" algn="l" defTabSz="457200" rtl="0" eaLnBrk="1" latinLnBrk="0" hangingPunct="1">
       <a:defRPr sz="1200" kern="1200">
         <a:solidFill>
           <a:schemeClr val="tx1"/>
@@ -209,7 +378,7 @@
         <a:cs typeface="+mn-cs"/>
       </a:defRPr>
     </a:lvl1pPr>
-    <a:lvl2pPr marL="457200" algn="l" defTabSz="914400" rtl="0" eaLnBrk="1" latinLnBrk="0" hangingPunct="1">
+    <a:lvl2pPr marL="457200" algn="l" defTabSz="457200" rtl="0" eaLnBrk="1" latinLnBrk="0" hangingPunct="1">
       <a:defRPr sz="1200" kern="1200">
         <a:solidFill>
           <a:schemeClr val="tx1"/>
@@ -219,7 +388,7 @@
         <a:cs typeface="+mn-cs"/>
       </a:defRPr>
     </a:lvl2pPr>
-    <a:lvl3pPr marL="914400" algn="l" defTabSz="914400" rtl="0" eaLnBrk="1" latinLnBrk="0" hangingPunct="1">
+    <a:lvl3pPr marL="914400" algn="l" defTabSz="457200" rtl="0" eaLnBrk="1" latinLnBrk="0" hangingPunct="1">
       <a:defRPr sz="1200" kern="1200">
         <a:solidFill>
           <a:schemeClr val="tx1"/>
@@ -229,7 +398,7 @@
         <a:cs typeface="+mn-cs"/>
       </a:defRPr>
     </a:lvl3pPr>
-    <a:lvl4pPr marL="1371600" algn="l" defTabSz="914400" rtl="0" eaLnBrk="1" latinLnBrk="0" hangingPunct="1">
+    <a:lvl4pPr marL="1371600" algn="l" defTabSz="457200" rtl="0" eaLnBrk="1" latinLnBrk="0" hangingPunct="1">
       <a:defRPr sz="1200" kern="1200">
         <a:solidFill>
           <a:schemeClr val="tx1"/>
@@ -239,7 +408,7 @@
         <a:cs typeface="+mn-cs"/>
       </a:defRPr>
     </a:lvl4pPr>
-    <a:lvl5pPr marL="1828800" algn="l" defTabSz="914400" rtl="0" eaLnBrk="1" latinLnBrk="0" hangingPunct="1">
+    <a:lvl5pPr marL="1828800" algn="l" defTabSz="457200" rtl="0" eaLnBrk="1" latinLnBrk="0" hangingPunct="1">
       <a:defRPr sz="1200" kern="1200">
         <a:solidFill>
           <a:schemeClr val="tx1"/>
@@ -249,7 +418,7 @@
         <a:cs typeface="+mn-cs"/>
       </a:defRPr>
     </a:lvl5pPr>
-    <a:lvl6pPr marL="2286000" algn="l" defTabSz="914400" rtl="0" eaLnBrk="1" latinLnBrk="0" hangingPunct="1">
+    <a:lvl6pPr marL="2286000" algn="l" defTabSz="457200" rtl="0" eaLnBrk="1" latinLnBrk="0" hangingPunct="1">
       <a:defRPr sz="1200" kern="1200">
         <a:solidFill>
           <a:schemeClr val="tx1"/>
@@ -259,7 +428,7 @@
         <a:cs typeface="+mn-cs"/>
       </a:defRPr>
     </a:lvl6pPr>
-    <a:lvl7pPr marL="2743200" algn="l" defTabSz="914400" rtl="0" eaLnBrk="1" latinLnBrk="0" hangingPunct="1">
+    <a:lvl7pPr marL="2743200" algn="l" defTabSz="457200" rtl="0" eaLnBrk="1" latinLnBrk="0" hangingPunct="1">
       <a:defRPr sz="1200" kern="1200">
         <a:solidFill>
           <a:schemeClr val="tx1"/>
@@ -269,7 +438,7 @@
         <a:cs typeface="+mn-cs"/>
       </a:defRPr>
     </a:lvl7pPr>
-    <a:lvl8pPr marL="3200400" algn="l" defTabSz="914400" rtl="0" eaLnBrk="1" latinLnBrk="0" hangingPunct="1">
+    <a:lvl8pPr marL="3200400" algn="l" defTabSz="457200" rtl="0" eaLnBrk="1" latinLnBrk="0" hangingPunct="1">
       <a:defRPr sz="1200" kern="1200">
         <a:solidFill>
           <a:schemeClr val="tx1"/>
@@ -279,7 +448,7 @@
         <a:cs typeface="+mn-cs"/>
       </a:defRPr>
     </a:lvl8pPr>
-    <a:lvl9pPr marL="3657600" algn="l" defTabSz="914400" rtl="0" eaLnBrk="1" latinLnBrk="0" hangingPunct="1">
+    <a:lvl9pPr marL="3657600" algn="l" defTabSz="457200" rtl="0" eaLnBrk="1" latinLnBrk="0" hangingPunct="1">
       <a:defRPr sz="1200" kern="1200">
         <a:solidFill>
           <a:schemeClr val="tx1"/>
@@ -294,7 +463,7 @@
 </file>
 
 <file path=ppt/notesSlides/notesSlide1.xml><?xml version="1.0" encoding="utf-8"?>
-<p:notes xmlns:a="http://schemas.openxmlformats.org/drawingml/2006/main" xmlns:r="http://schemas.openxmlformats.org/officeDocument/2006/relationships" xmlns:p="http://schemas.openxmlformats.org/presentationml/2006/main">
+<p:notes xmlns:a="http://schemas.openxmlformats.org/drawingml/2006/main" xmlns:p="http://schemas.openxmlformats.org/presentationml/2006/main" xmlns:r="http://schemas.openxmlformats.org/officeDocument/2006/relationships">
   <p:cSld>
     <p:spTree>
       <p:nvGrpSpPr>
@@ -314,7 +483,7 @@
         <p:nvSpPr>
           <p:cNvPr id="2" name="Slide Image Placeholder 1"/>
           <p:cNvSpPr>
-            <a:spLocks noGrp="1" noRot="1" noChangeAspect="1"/>
+            <a:spLocks noGrp="1"/>
           </p:cNvSpPr>
           <p:nvPr>
             <p:ph type="sldImg" idx="2"/>
@@ -329,7 +498,7 @@
             <a:spLocks noGrp="1"/>
           </p:cNvSpPr>
           <p:nvPr>
-            <p:ph type="body" sz="quarter" idx="3"/>
+            <p:ph type="body" idx="3" sz="quarter"/>
           </p:nvPr>
         </p:nvSpPr>
         <p:spPr/>
@@ -350,7 +519,7 @@
             <a:spLocks noGrp="1"/>
           </p:cNvSpPr>
           <p:nvPr>
-            <p:ph type="sldNum" sz="quarter" idx="5"/>
+            <p:ph type="sldNum" idx="5" sz="quarter"/>
           </p:nvPr>
         </p:nvSpPr>
         <p:spPr/>
@@ -401,9 +570,10 @@
           <a:lstStyle/>
           <a:p>
             <a:r>
-              <a:rPr lang="en-US"/>
+              <a:rPr lang="en-US" smtClean="0"/>
               <a:t>Click to edit Master title style</a:t>
             </a:r>
+            <a:endParaRPr lang="en-US"/>
           </a:p>
         </p:txBody>
       </p:sp>
@@ -519,9 +689,10 @@
           </a:lstStyle>
           <a:p>
             <a:r>
-              <a:rPr lang="en-US"/>
+              <a:rPr lang="en-US" smtClean="0"/>
               <a:t>Click to edit Master subtitle style</a:t>
             </a:r>
+            <a:endParaRPr lang="en-US"/>
           </a:p>
         </p:txBody>
       </p:sp>
@@ -542,7 +713,7 @@
           <a:p>
             <a:fld id="{5BCAD085-E8A6-8845-BD4E-CB4CCA059FC4}" type="datetimeFigureOut">
               <a:rPr lang="en-US" smtClean="0"/>
-              <a:t>7/28/2026</a:t>
+              <a:t>1/27/13</a:t>
             </a:fld>
             <a:endParaRPr lang="en-US"/>
           </a:p>
@@ -636,9 +807,10 @@
           <a:lstStyle/>
           <a:p>
             <a:r>
-              <a:rPr lang="en-US"/>
+              <a:rPr lang="en-US" smtClean="0"/>
               <a:t>Click to edit Master title style</a:t>
             </a:r>
+            <a:endParaRPr lang="en-US"/>
           </a:p>
         </p:txBody>
       </p:sp>
@@ -659,37 +831,38 @@
           <a:p>
             <a:pPr lvl="0"/>
             <a:r>
-              <a:rPr lang="en-US"/>
+              <a:rPr lang="en-US" smtClean="0"/>
               <a:t>Click to edit Master text styles</a:t>
             </a:r>
           </a:p>
           <a:p>
             <a:pPr lvl="1"/>
             <a:r>
-              <a:rPr lang="en-US"/>
+              <a:rPr lang="en-US" smtClean="0"/>
               <a:t>Second level</a:t>
             </a:r>
           </a:p>
           <a:p>
             <a:pPr lvl="2"/>
             <a:r>
-              <a:rPr lang="en-US"/>
+              <a:rPr lang="en-US" smtClean="0"/>
               <a:t>Third level</a:t>
             </a:r>
           </a:p>
           <a:p>
             <a:pPr lvl="3"/>
             <a:r>
-              <a:rPr lang="en-US"/>
+              <a:rPr lang="en-US" smtClean="0"/>
               <a:t>Fourth level</a:t>
             </a:r>
           </a:p>
           <a:p>
             <a:pPr lvl="4"/>
             <a:r>
-              <a:rPr lang="en-US"/>
+              <a:rPr lang="en-US" smtClean="0"/>
               <a:t>Fifth level</a:t>
             </a:r>
+            <a:endParaRPr lang="en-US"/>
           </a:p>
         </p:txBody>
       </p:sp>
@@ -710,7 +883,7 @@
           <a:p>
             <a:fld id="{5BCAD085-E8A6-8845-BD4E-CB4CCA059FC4}" type="datetimeFigureOut">
               <a:rPr lang="en-US" smtClean="0"/>
-              <a:t>7/28/2026</a:t>
+              <a:t>1/27/13</a:t>
             </a:fld>
             <a:endParaRPr lang="en-US"/>
           </a:p>
@@ -809,9 +982,10 @@
           <a:lstStyle/>
           <a:p>
             <a:r>
-              <a:rPr lang="en-US"/>
+              <a:rPr lang="en-US" smtClean="0"/>
               <a:t>Click to edit Master title style</a:t>
             </a:r>
+            <a:endParaRPr lang="en-US"/>
           </a:p>
         </p:txBody>
       </p:sp>
@@ -837,37 +1011,38 @@
           <a:p>
             <a:pPr lvl="0"/>
             <a:r>
-              <a:rPr lang="en-US"/>
+              <a:rPr lang="en-US" smtClean="0"/>
               <a:t>Click to edit Master text styles</a:t>
             </a:r>
           </a:p>
           <a:p>
             <a:pPr lvl="1"/>
             <a:r>
-              <a:rPr lang="en-US"/>
+              <a:rPr lang="en-US" smtClean="0"/>
               <a:t>Second level</a:t>
             </a:r>
           </a:p>
           <a:p>
             <a:pPr lvl="2"/>
             <a:r>
-              <a:rPr lang="en-US"/>
+              <a:rPr lang="en-US" smtClean="0"/>
               <a:t>Third level</a:t>
             </a:r>
           </a:p>
           <a:p>
             <a:pPr lvl="3"/>
             <a:r>
-              <a:rPr lang="en-US"/>
+              <a:rPr lang="en-US" smtClean="0"/>
               <a:t>Fourth level</a:t>
             </a:r>
           </a:p>
           <a:p>
             <a:pPr lvl="4"/>
             <a:r>
-              <a:rPr lang="en-US"/>
+              <a:rPr lang="en-US" smtClean="0"/>
               <a:t>Fifth level</a:t>
             </a:r>
+            <a:endParaRPr lang="en-US"/>
           </a:p>
         </p:txBody>
       </p:sp>
@@ -888,7 +1063,7 @@
           <a:p>
             <a:fld id="{5BCAD085-E8A6-8845-BD4E-CB4CCA059FC4}" type="datetimeFigureOut">
               <a:rPr lang="en-US" smtClean="0"/>
-              <a:t>7/28/2026</a:t>
+              <a:t>1/27/13</a:t>
             </a:fld>
             <a:endParaRPr lang="en-US"/>
           </a:p>
@@ -982,9 +1157,10 @@
           <a:lstStyle/>
           <a:p>
             <a:r>
-              <a:rPr lang="en-US"/>
+              <a:rPr lang="en-US" smtClean="0"/>
               <a:t>Click to edit Master title style</a:t>
             </a:r>
+            <a:endParaRPr lang="en-US"/>
           </a:p>
         </p:txBody>
       </p:sp>
@@ -1005,37 +1181,38 @@
           <a:p>
             <a:pPr lvl="0"/>
             <a:r>
-              <a:rPr lang="en-US"/>
+              <a:rPr lang="en-US" smtClean="0"/>
               <a:t>Click to edit Master text styles</a:t>
             </a:r>
           </a:p>
           <a:p>
             <a:pPr lvl="1"/>
             <a:r>
-              <a:rPr lang="en-US"/>
+              <a:rPr lang="en-US" smtClean="0"/>
               <a:t>Second level</a:t>
             </a:r>
           </a:p>
           <a:p>
             <a:pPr lvl="2"/>
             <a:r>
-              <a:rPr lang="en-US"/>
+              <a:rPr lang="en-US" smtClean="0"/>
               <a:t>Third level</a:t>
             </a:r>
           </a:p>
           <a:p>
             <a:pPr lvl="3"/>
             <a:r>
-              <a:rPr lang="en-US"/>
+              <a:rPr lang="en-US" smtClean="0"/>
               <a:t>Fourth level</a:t>
             </a:r>
           </a:p>
           <a:p>
             <a:pPr lvl="4"/>
             <a:r>
-              <a:rPr lang="en-US"/>
+              <a:rPr lang="en-US" smtClean="0"/>
               <a:t>Fifth level</a:t>
             </a:r>
+            <a:endParaRPr lang="en-US"/>
           </a:p>
         </p:txBody>
       </p:sp>
@@ -1056,7 +1233,7 @@
           <a:p>
             <a:fld id="{5BCAD085-E8A6-8845-BD4E-CB4CCA059FC4}" type="datetimeFigureOut">
               <a:rPr lang="en-US" smtClean="0"/>
-              <a:t>7/28/2026</a:t>
+              <a:t>1/27/13</a:t>
             </a:fld>
             <a:endParaRPr lang="en-US"/>
           </a:p>
@@ -1159,9 +1336,10 @@
           </a:lstStyle>
           <a:p>
             <a:r>
-              <a:rPr lang="en-US"/>
+              <a:rPr lang="en-US" smtClean="0"/>
               <a:t>Click to edit Master title style</a:t>
             </a:r>
+            <a:endParaRPr lang="en-US"/>
           </a:p>
         </p:txBody>
       </p:sp>
@@ -1278,7 +1456,7 @@
           <a:p>
             <a:pPr lvl="0"/>
             <a:r>
-              <a:rPr lang="en-US"/>
+              <a:rPr lang="en-US" smtClean="0"/>
               <a:t>Click to edit Master text styles</a:t>
             </a:r>
           </a:p>
@@ -1301,7 +1479,7 @@
           <a:p>
             <a:fld id="{5BCAD085-E8A6-8845-BD4E-CB4CCA059FC4}" type="datetimeFigureOut">
               <a:rPr lang="en-US" smtClean="0"/>
-              <a:t>7/28/2026</a:t>
+              <a:t>1/27/13</a:t>
             </a:fld>
             <a:endParaRPr lang="en-US"/>
           </a:p>
@@ -1395,9 +1573,10 @@
           <a:lstStyle/>
           <a:p>
             <a:r>
-              <a:rPr lang="en-US"/>
+              <a:rPr lang="en-US" smtClean="0"/>
               <a:t>Click to edit Master title style</a:t>
             </a:r>
+            <a:endParaRPr lang="en-US"/>
           </a:p>
         </p:txBody>
       </p:sp>
@@ -1451,37 +1630,38 @@
           <a:p>
             <a:pPr lvl="0"/>
             <a:r>
-              <a:rPr lang="en-US"/>
+              <a:rPr lang="en-US" smtClean="0"/>
               <a:t>Click to edit Master text styles</a:t>
             </a:r>
           </a:p>
           <a:p>
             <a:pPr lvl="1"/>
             <a:r>
-              <a:rPr lang="en-US"/>
+              <a:rPr lang="en-US" smtClean="0"/>
               <a:t>Second level</a:t>
             </a:r>
           </a:p>
           <a:p>
             <a:pPr lvl="2"/>
             <a:r>
-              <a:rPr lang="en-US"/>
+              <a:rPr lang="en-US" smtClean="0"/>
               <a:t>Third level</a:t>
             </a:r>
           </a:p>
           <a:p>
             <a:pPr lvl="3"/>
             <a:r>
-              <a:rPr lang="en-US"/>
+              <a:rPr lang="en-US" smtClean="0"/>
               <a:t>Fourth level</a:t>
             </a:r>
           </a:p>
           <a:p>
             <a:pPr lvl="4"/>
             <a:r>
-              <a:rPr lang="en-US"/>
+              <a:rPr lang="en-US" smtClean="0"/>
               <a:t>Fifth level</a:t>
             </a:r>
+            <a:endParaRPr lang="en-US"/>
           </a:p>
         </p:txBody>
       </p:sp>
@@ -1535,37 +1715,38 @@
           <a:p>
             <a:pPr lvl="0"/>
             <a:r>
-              <a:rPr lang="en-US"/>
+              <a:rPr lang="en-US" smtClean="0"/>
               <a:t>Click to edit Master text styles</a:t>
             </a:r>
           </a:p>
           <a:p>
             <a:pPr lvl="1"/>
             <a:r>
-              <a:rPr lang="en-US"/>
+              <a:rPr lang="en-US" smtClean="0"/>
               <a:t>Second level</a:t>
             </a:r>
           </a:p>
           <a:p>
             <a:pPr lvl="2"/>
             <a:r>
-              <a:rPr lang="en-US"/>
+              <a:rPr lang="en-US" smtClean="0"/>
               <a:t>Third level</a:t>
             </a:r>
           </a:p>
           <a:p>
             <a:pPr lvl="3"/>
             <a:r>
-              <a:rPr lang="en-US"/>
+              <a:rPr lang="en-US" smtClean="0"/>
               <a:t>Fourth level</a:t>
             </a:r>
           </a:p>
           <a:p>
             <a:pPr lvl="4"/>
             <a:r>
-              <a:rPr lang="en-US"/>
+              <a:rPr lang="en-US" smtClean="0"/>
               <a:t>Fifth level</a:t>
             </a:r>
+            <a:endParaRPr lang="en-US"/>
           </a:p>
         </p:txBody>
       </p:sp>
@@ -1586,7 +1767,7 @@
           <a:p>
             <a:fld id="{5BCAD085-E8A6-8845-BD4E-CB4CCA059FC4}" type="datetimeFigureOut">
               <a:rPr lang="en-US" smtClean="0"/>
-              <a:t>7/28/2026</a:t>
+              <a:t>1/27/13</a:t>
             </a:fld>
             <a:endParaRPr lang="en-US"/>
           </a:p>
@@ -1684,9 +1865,10 @@
           </a:lstStyle>
           <a:p>
             <a:r>
-              <a:rPr lang="en-US"/>
+              <a:rPr lang="en-US" smtClean="0"/>
               <a:t>Click to edit Master title style</a:t>
             </a:r>
+            <a:endParaRPr lang="en-US"/>
           </a:p>
         </p:txBody>
       </p:sp>
@@ -1749,7 +1931,7 @@
           <a:p>
             <a:pPr lvl="0"/>
             <a:r>
-              <a:rPr lang="en-US"/>
+              <a:rPr lang="en-US" smtClean="0"/>
               <a:t>Click to edit Master text styles</a:t>
             </a:r>
           </a:p>
@@ -1805,37 +1987,38 @@
           <a:p>
             <a:pPr lvl="0"/>
             <a:r>
-              <a:rPr lang="en-US"/>
+              <a:rPr lang="en-US" smtClean="0"/>
               <a:t>Click to edit Master text styles</a:t>
             </a:r>
           </a:p>
           <a:p>
             <a:pPr lvl="1"/>
             <a:r>
-              <a:rPr lang="en-US"/>
+              <a:rPr lang="en-US" smtClean="0"/>
               <a:t>Second level</a:t>
             </a:r>
           </a:p>
           <a:p>
             <a:pPr lvl="2"/>
             <a:r>
-              <a:rPr lang="en-US"/>
+              <a:rPr lang="en-US" smtClean="0"/>
               <a:t>Third level</a:t>
             </a:r>
           </a:p>
           <a:p>
             <a:pPr lvl="3"/>
             <a:r>
-              <a:rPr lang="en-US"/>
+              <a:rPr lang="en-US" smtClean="0"/>
               <a:t>Fourth level</a:t>
             </a:r>
           </a:p>
           <a:p>
             <a:pPr lvl="4"/>
             <a:r>
-              <a:rPr lang="en-US"/>
+              <a:rPr lang="en-US" smtClean="0"/>
               <a:t>Fifth level</a:t>
             </a:r>
+            <a:endParaRPr lang="en-US"/>
           </a:p>
         </p:txBody>
       </p:sp>
@@ -1898,7 +2081,7 @@
           <a:p>
             <a:pPr lvl="0"/>
             <a:r>
-              <a:rPr lang="en-US"/>
+              <a:rPr lang="en-US" smtClean="0"/>
               <a:t>Click to edit Master text styles</a:t>
             </a:r>
           </a:p>
@@ -1954,37 +2137,38 @@
           <a:p>
             <a:pPr lvl="0"/>
             <a:r>
-              <a:rPr lang="en-US"/>
+              <a:rPr lang="en-US" smtClean="0"/>
               <a:t>Click to edit Master text styles</a:t>
             </a:r>
           </a:p>
           <a:p>
             <a:pPr lvl="1"/>
             <a:r>
-              <a:rPr lang="en-US"/>
+              <a:rPr lang="en-US" smtClean="0"/>
               <a:t>Second level</a:t>
             </a:r>
           </a:p>
           <a:p>
             <a:pPr lvl="2"/>
             <a:r>
-              <a:rPr lang="en-US"/>
+              <a:rPr lang="en-US" smtClean="0"/>
               <a:t>Third level</a:t>
             </a:r>
           </a:p>
           <a:p>
             <a:pPr lvl="3"/>
             <a:r>
-              <a:rPr lang="en-US"/>
+              <a:rPr lang="en-US" smtClean="0"/>
               <a:t>Fourth level</a:t>
             </a:r>
           </a:p>
           <a:p>
             <a:pPr lvl="4"/>
             <a:r>
-              <a:rPr lang="en-US"/>
+              <a:rPr lang="en-US" smtClean="0"/>
               <a:t>Fifth level</a:t>
             </a:r>
+            <a:endParaRPr lang="en-US"/>
           </a:p>
         </p:txBody>
       </p:sp>
@@ -2005,7 +2189,7 @@
           <a:p>
             <a:fld id="{5BCAD085-E8A6-8845-BD4E-CB4CCA059FC4}" type="datetimeFigureOut">
               <a:rPr lang="en-US" smtClean="0"/>
-              <a:t>7/28/2026</a:t>
+              <a:t>1/27/13</a:t>
             </a:fld>
             <a:endParaRPr lang="en-US"/>
           </a:p>
@@ -2099,9 +2283,10 @@
           <a:lstStyle/>
           <a:p>
             <a:r>
-              <a:rPr lang="en-US"/>
+              <a:rPr lang="en-US" smtClean="0"/>
               <a:t>Click to edit Master title style</a:t>
             </a:r>
+            <a:endParaRPr lang="en-US"/>
           </a:p>
         </p:txBody>
       </p:sp>
@@ -2122,7 +2307,7 @@
           <a:p>
             <a:fld id="{5BCAD085-E8A6-8845-BD4E-CB4CCA059FC4}" type="datetimeFigureOut">
               <a:rPr lang="en-US" smtClean="0"/>
-              <a:t>7/28/2026</a:t>
+              <a:t>1/27/13</a:t>
             </a:fld>
             <a:endParaRPr lang="en-US"/>
           </a:p>
@@ -2217,7 +2402,7 @@
           <a:p>
             <a:fld id="{5BCAD085-E8A6-8845-BD4E-CB4CCA059FC4}" type="datetimeFigureOut">
               <a:rPr lang="en-US" smtClean="0"/>
-              <a:t>7/28/2026</a:t>
+              <a:t>1/27/13</a:t>
             </a:fld>
             <a:endParaRPr lang="en-US"/>
           </a:p>
@@ -2320,9 +2505,10 @@
           </a:lstStyle>
           <a:p>
             <a:r>
-              <a:rPr lang="en-US"/>
+              <a:rPr lang="en-US" smtClean="0"/>
               <a:t>Click to edit Master title style</a:t>
             </a:r>
+            <a:endParaRPr lang="en-US"/>
           </a:p>
         </p:txBody>
       </p:sp>
@@ -2376,37 +2562,38 @@
           <a:p>
             <a:pPr lvl="0"/>
             <a:r>
-              <a:rPr lang="en-US"/>
+              <a:rPr lang="en-US" smtClean="0"/>
               <a:t>Click to edit Master text styles</a:t>
             </a:r>
           </a:p>
           <a:p>
             <a:pPr lvl="1"/>
             <a:r>
-              <a:rPr lang="en-US"/>
+              <a:rPr lang="en-US" smtClean="0"/>
               <a:t>Second level</a:t>
             </a:r>
           </a:p>
           <a:p>
             <a:pPr lvl="2"/>
             <a:r>
-              <a:rPr lang="en-US"/>
+              <a:rPr lang="en-US" smtClean="0"/>
               <a:t>Third level</a:t>
             </a:r>
           </a:p>
           <a:p>
             <a:pPr lvl="3"/>
             <a:r>
-              <a:rPr lang="en-US"/>
+              <a:rPr lang="en-US" smtClean="0"/>
               <a:t>Fourth level</a:t>
             </a:r>
           </a:p>
           <a:p>
             <a:pPr lvl="4"/>
             <a:r>
-              <a:rPr lang="en-US"/>
+              <a:rPr lang="en-US" smtClean="0"/>
               <a:t>Fifth level</a:t>
             </a:r>
+            <a:endParaRPr lang="en-US"/>
           </a:p>
         </p:txBody>
       </p:sp>
@@ -2469,7 +2656,7 @@
           <a:p>
             <a:pPr lvl="0"/>
             <a:r>
-              <a:rPr lang="en-US"/>
+              <a:rPr lang="en-US" smtClean="0"/>
               <a:t>Click to edit Master text styles</a:t>
             </a:r>
           </a:p>
@@ -2492,7 +2679,7 @@
           <a:p>
             <a:fld id="{5BCAD085-E8A6-8845-BD4E-CB4CCA059FC4}" type="datetimeFigureOut">
               <a:rPr lang="en-US" smtClean="0"/>
-              <a:t>7/28/2026</a:t>
+              <a:t>1/27/13</a:t>
             </a:fld>
             <a:endParaRPr lang="en-US"/>
           </a:p>
@@ -2595,9 +2782,10 @@
           </a:lstStyle>
           <a:p>
             <a:r>
-              <a:rPr lang="en-US"/>
+              <a:rPr lang="en-US" smtClean="0"/>
               <a:t>Click to edit Master title style</a:t>
             </a:r>
+            <a:endParaRPr lang="en-US"/>
           </a:p>
         </p:txBody>
       </p:sp>
@@ -2721,7 +2909,7 @@
           <a:p>
             <a:pPr lvl="0"/>
             <a:r>
-              <a:rPr lang="en-US"/>
+              <a:rPr lang="en-US" smtClean="0"/>
               <a:t>Click to edit Master text styles</a:t>
             </a:r>
           </a:p>
@@ -2744,7 +2932,7 @@
           <a:p>
             <a:fld id="{5BCAD085-E8A6-8845-BD4E-CB4CCA059FC4}" type="datetimeFigureOut">
               <a:rPr lang="en-US" smtClean="0"/>
-              <a:t>7/28/2026</a:t>
+              <a:t>1/27/13</a:t>
             </a:fld>
             <a:endParaRPr lang="en-US"/>
           </a:p>
@@ -2853,9 +3041,10 @@
           <a:lstStyle/>
           <a:p>
             <a:r>
-              <a:rPr lang="en-US"/>
+              <a:rPr lang="en-US" smtClean="0"/>
               <a:t>Click to edit Master title style</a:t>
             </a:r>
+            <a:endParaRPr lang="en-US"/>
           </a:p>
         </p:txBody>
       </p:sp>
@@ -2886,37 +3075,38 @@
           <a:p>
             <a:pPr lvl="0"/>
             <a:r>
-              <a:rPr lang="en-US"/>
+              <a:rPr lang="en-US" smtClean="0"/>
               <a:t>Click to edit Master text styles</a:t>
             </a:r>
           </a:p>
           <a:p>
             <a:pPr lvl="1"/>
             <a:r>
-              <a:rPr lang="en-US"/>
+              <a:rPr lang="en-US" smtClean="0"/>
               <a:t>Second level</a:t>
             </a:r>
           </a:p>
           <a:p>
             <a:pPr lvl="2"/>
             <a:r>
-              <a:rPr lang="en-US"/>
+              <a:rPr lang="en-US" smtClean="0"/>
               <a:t>Third level</a:t>
             </a:r>
           </a:p>
           <a:p>
             <a:pPr lvl="3"/>
             <a:r>
-              <a:rPr lang="en-US"/>
+              <a:rPr lang="en-US" smtClean="0"/>
               <a:t>Fourth level</a:t>
             </a:r>
           </a:p>
           <a:p>
             <a:pPr lvl="4"/>
             <a:r>
-              <a:rPr lang="en-US"/>
+              <a:rPr lang="en-US" smtClean="0"/>
               <a:t>Fifth level</a:t>
             </a:r>
+            <a:endParaRPr lang="en-US"/>
           </a:p>
         </p:txBody>
       </p:sp>
@@ -2955,7 +3145,7 @@
           <a:p>
             <a:fld id="{5BCAD085-E8A6-8845-BD4E-CB4CCA059FC4}" type="datetimeFigureOut">
               <a:rPr lang="en-US" smtClean="0"/>
-              <a:t>7/28/2026</a:t>
+              <a:t>1/27/13</a:t>
             </a:fld>
             <a:endParaRPr lang="en-US"/>
           </a:p>
@@ -3314,7 +3504,7 @@
 </file>
 
 <file path=ppt/slides/slide1.xml><?xml version="1.0" encoding="utf-8"?>
-<p:sld xmlns:a="http://schemas.openxmlformats.org/drawingml/2006/main" xmlns:r="http://schemas.openxmlformats.org/officeDocument/2006/relationships" xmlns:p="http://schemas.openxmlformats.org/presentationml/2006/main">
+<p:sld xmlns:a="http://schemas.openxmlformats.org/drawingml/2006/main" xmlns:p="http://schemas.openxmlformats.org/presentationml/2006/main" xmlns:r="http://schemas.openxmlformats.org/officeDocument/2006/relationships">
   <p:cSld>
     <p:spTree>
       <p:nvGrpSpPr>
@@ -3322,14 +3512,7 @@
         <p:cNvGrpSpPr/>
         <p:nvPr/>
       </p:nvGrpSpPr>
-      <p:grpSpPr>
-        <a:xfrm>
-          <a:off x="0" y="0"/>
-          <a:ext cx="0" cy="0"/>
-          <a:chOff x="0" y="0"/>
-          <a:chExt cx="0" cy="0"/>
-        </a:xfrm>
-      </p:grpSpPr>
+      <p:grpSpPr/>
       <p:sp>
         <p:nvSpPr>
           <p:cNvPr id="2" name="TextBox 1"/>
@@ -3339,7 +3522,7 @@
         <p:spPr>
           <a:xfrm>
             <a:off x="685800" y="1371600"/>
-            <a:ext cx="10820095" cy="1123384"/>
+            <a:ext cx="10820095" cy="2011680"/>
           </a:xfrm>
           <a:prstGeom prst="rect">
             <a:avLst/>
@@ -3353,7 +3536,7 @@
           <a:lstStyle/>
           <a:p>
             <a:r>
-              <a:rPr sz="4000" b="1" i="0" dirty="0">
+              <a:rPr sz="4000" b="1" i="0">
                 <a:solidFill>
                   <a:srgbClr val="1A1A1A"/>
                 </a:solidFill>
@@ -3369,29 +3552,14 @@
               </a:spcBef>
             </a:pPr>
             <a:r>
-              <a:rPr sz="1700" b="0" i="0" dirty="0">
+              <a:rPr sz="1700" b="0" i="0">
                 <a:solidFill>
                   <a:srgbClr val="5A6270"/>
                 </a:solidFill>
                 <a:latin typeface="Calibri"/>
               </a:rPr>
-              <a:t>Executive summary</a:t>
-            </a:r>
-            <a:r>
-              <a:rPr lang="en-US" sz="1700" dirty="0">
-                <a:solidFill>
-                  <a:srgbClr val="5A6270"/>
-                </a:solidFill>
-                <a:latin typeface="Calibri"/>
-              </a:rPr>
-              <a:t>:</a:t>
-            </a:r>
-            <a:endParaRPr sz="1700" b="0" i="0" dirty="0">
-              <a:solidFill>
-                <a:srgbClr val="5A6270"/>
-              </a:solidFill>
-              <a:latin typeface="Calibri"/>
-            </a:endParaRPr>
+              <a:t>Executive summary. You asked three questions. Here are the three answers.</a:t>
+            </a:r>
           </a:p>
         </p:txBody>
       </p:sp>
@@ -3404,7 +3572,7 @@
         <p:spPr>
           <a:xfrm>
             <a:off x="685800" y="3200400"/>
-            <a:ext cx="10820095" cy="2141612"/>
+            <a:ext cx="10820095" cy="4572000"/>
           </a:xfrm>
           <a:prstGeom prst="rect">
             <a:avLst/>
@@ -3423,7 +3591,7 @@
               </a:spcAft>
             </a:pPr>
             <a:r>
-              <a:rPr sz="1600" b="1" i="0" dirty="0">
+              <a:rPr sz="1600" b="1" i="0">
                 <a:solidFill>
                   <a:srgbClr val="1A1A1A"/>
                 </a:solidFill>
@@ -3439,7 +3607,7 @@
               </a:spcAft>
             </a:pPr>
             <a:r>
-              <a:rPr sz="1400" b="0" i="0" dirty="0">
+              <a:rPr sz="1400" b="0" i="0">
                 <a:solidFill>
                   <a:srgbClr val="1A1A1A"/>
                 </a:solidFill>
@@ -3455,7 +3623,7 @@
               </a:spcAft>
             </a:pPr>
             <a:r>
-              <a:rPr sz="1600" b="1" i="0" dirty="0">
+              <a:rPr sz="1600" b="1" i="0">
                 <a:solidFill>
                   <a:srgbClr val="1A1A1A"/>
                 </a:solidFill>
@@ -3471,7 +3639,7 @@
               </a:spcAft>
             </a:pPr>
             <a:r>
-              <a:rPr sz="1400" b="0" i="0" dirty="0">
+              <a:rPr sz="1400" b="0" i="0">
                 <a:solidFill>
                   <a:srgbClr val="B02E2E"/>
                 </a:solidFill>
@@ -3487,7 +3655,7 @@
               </a:spcAft>
             </a:pPr>
             <a:r>
-              <a:rPr sz="1600" b="1" i="0" dirty="0">
+              <a:rPr sz="1600" b="1" i="0">
                 <a:solidFill>
                   <a:srgbClr val="1A1A1A"/>
                 </a:solidFill>
@@ -3503,40 +3671,13 @@
               </a:spcAft>
             </a:pPr>
             <a:r>
-              <a:rPr lang="en-US" sz="1400" b="0" i="0" dirty="0">
+              <a:rPr sz="1400" b="0" i="0">
                 <a:solidFill>
                   <a:srgbClr val="1E7A4B"/>
                 </a:solidFill>
                 <a:latin typeface="Calibri"/>
               </a:rPr>
-              <a:t>Contacting</a:t>
-            </a:r>
-            <a:r>
-              <a:rPr sz="1400" b="0" i="0" dirty="0">
-                <a:solidFill>
-                  <a:srgbClr val="1E7A4B"/>
-                </a:solidFill>
-                <a:latin typeface="Calibri"/>
-              </a:rPr>
-              <a:t> every at-risk customer</a:t>
-            </a:r>
-            <a:r>
-              <a:rPr lang="en-US" sz="1400" b="0" i="0" dirty="0">
-                <a:solidFill>
-                  <a:srgbClr val="1E7A4B"/>
-                </a:solidFill>
-                <a:latin typeface="Calibri"/>
-              </a:rPr>
-              <a:t> as intervention</a:t>
-            </a:r>
-            <a:r>
-              <a:rPr sz="1400" b="0" i="0" dirty="0">
-                <a:solidFill>
-                  <a:srgbClr val="1E7A4B"/>
-                </a:solidFill>
-                <a:latin typeface="Calibri"/>
-              </a:rPr>
-              <a:t> already pays for itself today. Beyond that we cannot yet prove what works, because we have never recorded taking an action.</a:t>
+              <a:t>Calling every at-risk customer already pays for itself today. Beyond that we cannot yet prove what works, because we have never recorded taking an action.</a:t>
             </a:r>
           </a:p>
         </p:txBody>
@@ -3550,7 +3691,7 @@
 </file>
 
 <file path=ppt/slides/slide2.xml><?xml version="1.0" encoding="utf-8"?>
-<p:sld xmlns:a="http://schemas.openxmlformats.org/drawingml/2006/main" xmlns:r="http://schemas.openxmlformats.org/officeDocument/2006/relationships" xmlns:p="http://schemas.openxmlformats.org/presentationml/2006/main">
+<p:sld xmlns:a="http://schemas.openxmlformats.org/drawingml/2006/main" xmlns:p="http://schemas.openxmlformats.org/presentationml/2006/main" xmlns:r="http://schemas.openxmlformats.org/officeDocument/2006/relationships">
   <p:cSld>
     <p:spTree>
       <p:nvGrpSpPr>
@@ -3558,14 +3699,7 @@
         <p:cNvGrpSpPr/>
         <p:nvPr/>
       </p:nvGrpSpPr>
-      <p:grpSpPr>
-        <a:xfrm>
-          <a:off x="0" y="0"/>
-          <a:ext cx="0" cy="0"/>
-          <a:chOff x="0" y="0"/>
-          <a:chExt cx="0" cy="0"/>
-        </a:xfrm>
-      </p:grpSpPr>
+      <p:grpSpPr/>
       <p:sp>
         <p:nvSpPr>
           <p:cNvPr id="2" name="TextBox 1"/>
@@ -3657,7 +3791,6 @@
           <a:lstStyle/>
           <a:p>
             <a:pPr algn="ctr"/>
-            <a:endParaRPr/>
           </a:p>
         </p:txBody>
       </p:sp>
@@ -3799,7 +3932,7 @@
 </file>
 
 <file path=ppt/slides/slide3.xml><?xml version="1.0" encoding="utf-8"?>
-<p:sld xmlns:a="http://schemas.openxmlformats.org/drawingml/2006/main" xmlns:r="http://schemas.openxmlformats.org/officeDocument/2006/relationships" xmlns:p="http://schemas.openxmlformats.org/presentationml/2006/main">
+<p:sld xmlns:a="http://schemas.openxmlformats.org/drawingml/2006/main" xmlns:p="http://schemas.openxmlformats.org/presentationml/2006/main" xmlns:r="http://schemas.openxmlformats.org/officeDocument/2006/relationships">
   <p:cSld>
     <p:spTree>
       <p:nvGrpSpPr>
@@ -3807,14 +3940,7 @@
         <p:cNvGrpSpPr/>
         <p:nvPr/>
       </p:nvGrpSpPr>
-      <p:grpSpPr>
-        <a:xfrm>
-          <a:off x="0" y="0"/>
-          <a:ext cx="0" cy="0"/>
-          <a:chOff x="0" y="0"/>
-          <a:chExt cx="0" cy="0"/>
-        </a:xfrm>
-      </p:grpSpPr>
+      <p:grpSpPr/>
       <p:sp>
         <p:nvSpPr>
           <p:cNvPr id="2" name="TextBox 1"/>
@@ -3906,7 +4032,6 @@
           <a:lstStyle/>
           <a:p>
             <a:pPr algn="ctr"/>
-            <a:endParaRPr/>
           </a:p>
         </p:txBody>
       </p:sp>
@@ -4152,7 +4277,7 @@
 </file>
 
 <file path=ppt/slides/slide4.xml><?xml version="1.0" encoding="utf-8"?>
-<p:sld xmlns:a="http://schemas.openxmlformats.org/drawingml/2006/main" xmlns:r="http://schemas.openxmlformats.org/officeDocument/2006/relationships" xmlns:p="http://schemas.openxmlformats.org/presentationml/2006/main">
+<p:sld xmlns:a="http://schemas.openxmlformats.org/drawingml/2006/main" xmlns:p="http://schemas.openxmlformats.org/presentationml/2006/main" xmlns:r="http://schemas.openxmlformats.org/officeDocument/2006/relationships">
   <p:cSld>
     <p:spTree>
       <p:nvGrpSpPr>
@@ -4160,14 +4285,7 @@
         <p:cNvGrpSpPr/>
         <p:nvPr/>
       </p:nvGrpSpPr>
-      <p:grpSpPr>
-        <a:xfrm>
-          <a:off x="0" y="0"/>
-          <a:ext cx="0" cy="0"/>
-          <a:chOff x="0" y="0"/>
-          <a:chExt cx="0" cy="0"/>
-        </a:xfrm>
-      </p:grpSpPr>
+      <p:grpSpPr/>
       <p:sp>
         <p:nvSpPr>
           <p:cNvPr id="2" name="TextBox 1"/>
@@ -4259,7 +4377,6 @@
           <a:lstStyle/>
           <a:p>
             <a:pPr algn="ctr"/>
-            <a:endParaRPr/>
           </a:p>
         </p:txBody>
       </p:sp>
@@ -4507,7 +4624,7 @@
 </file>
 
 <file path=ppt/slides/slide5.xml><?xml version="1.0" encoding="utf-8"?>
-<p:sld xmlns:a="http://schemas.openxmlformats.org/drawingml/2006/main" xmlns:r="http://schemas.openxmlformats.org/officeDocument/2006/relationships" xmlns:p="http://schemas.openxmlformats.org/presentationml/2006/main">
+<p:sld xmlns:a="http://schemas.openxmlformats.org/drawingml/2006/main" xmlns:p="http://schemas.openxmlformats.org/presentationml/2006/main" xmlns:r="http://schemas.openxmlformats.org/officeDocument/2006/relationships">
   <p:cSld>
     <p:spTree>
       <p:nvGrpSpPr>
@@ -4515,14 +4632,7 @@
         <p:cNvGrpSpPr/>
         <p:nvPr/>
       </p:nvGrpSpPr>
-      <p:grpSpPr>
-        <a:xfrm>
-          <a:off x="0" y="0"/>
-          <a:ext cx="0" cy="0"/>
-          <a:chOff x="0" y="0"/>
-          <a:chExt cx="0" cy="0"/>
-        </a:xfrm>
-      </p:grpSpPr>
+      <p:grpSpPr/>
       <p:sp>
         <p:nvSpPr>
           <p:cNvPr id="2" name="TextBox 1"/>
@@ -4614,7 +4724,6 @@
           <a:lstStyle/>
           <a:p>
             <a:pPr algn="ctr"/>
-            <a:endParaRPr/>
           </a:p>
         </p:txBody>
       </p:sp>
@@ -5000,7 +5109,7 @@
 </file>
 
 <file path=ppt/slides/slide6.xml><?xml version="1.0" encoding="utf-8"?>
-<p:sld xmlns:a="http://schemas.openxmlformats.org/drawingml/2006/main" xmlns:r="http://schemas.openxmlformats.org/officeDocument/2006/relationships" xmlns:p="http://schemas.openxmlformats.org/presentationml/2006/main">
+<p:sld xmlns:a="http://schemas.openxmlformats.org/drawingml/2006/main" xmlns:p="http://schemas.openxmlformats.org/presentationml/2006/main" xmlns:r="http://schemas.openxmlformats.org/officeDocument/2006/relationships">
   <p:cSld>
     <p:spTree>
       <p:nvGrpSpPr>
@@ -5008,14 +5117,7 @@
         <p:cNvGrpSpPr/>
         <p:nvPr/>
       </p:nvGrpSpPr>
-      <p:grpSpPr>
-        <a:xfrm>
-          <a:off x="0" y="0"/>
-          <a:ext cx="0" cy="0"/>
-          <a:chOff x="0" y="0"/>
-          <a:chExt cx="0" cy="0"/>
-        </a:xfrm>
-      </p:grpSpPr>
+      <p:grpSpPr/>
       <p:sp>
         <p:nvSpPr>
           <p:cNvPr id="2" name="TextBox 1"/>
@@ -5107,7 +5209,6 @@
           <a:lstStyle/>
           <a:p>
             <a:pPr algn="ctr"/>
-            <a:endParaRPr/>
           </a:p>
         </p:txBody>
       </p:sp>
@@ -5683,44 +5784,44 @@
         <a:sysClr val="window" lastClr="FFFFFF"/>
       </a:lt1>
       <a:dk2>
-        <a:srgbClr val="0E2841"/>
+        <a:srgbClr val="1F497D"/>
       </a:dk2>
       <a:lt2>
-        <a:srgbClr val="E8E8E8"/>
+        <a:srgbClr val="EEECE1"/>
       </a:lt2>
       <a:accent1>
-        <a:srgbClr val="156082"/>
+        <a:srgbClr val="4F81BD"/>
       </a:accent1>
       <a:accent2>
-        <a:srgbClr val="E97132"/>
+        <a:srgbClr val="C0504D"/>
       </a:accent2>
       <a:accent3>
-        <a:srgbClr val="196B24"/>
+        <a:srgbClr val="9BBB59"/>
       </a:accent3>
       <a:accent4>
-        <a:srgbClr val="0F9ED5"/>
+        <a:srgbClr val="8064A2"/>
       </a:accent4>
       <a:accent5>
-        <a:srgbClr val="A02B93"/>
+        <a:srgbClr val="4BACC6"/>
       </a:accent5>
       <a:accent6>
-        <a:srgbClr val="4EA72E"/>
+        <a:srgbClr val="F79646"/>
       </a:accent6>
       <a:hlink>
-        <a:srgbClr val="467886"/>
+        <a:srgbClr val="0000FF"/>
       </a:hlink>
       <a:folHlink>
-        <a:srgbClr val="96607D"/>
+        <a:srgbClr val="800080"/>
       </a:folHlink>
     </a:clrScheme>
     <a:fontScheme name="Office">
       <a:majorFont>
-        <a:latin typeface="Aptos Display" panose="02110004020202020204"/>
+        <a:latin typeface="Calibri"/>
         <a:ea typeface=""/>
         <a:cs typeface=""/>
-        <a:font script="Jpan" typeface="游ゴシック Light"/>
+        <a:font script="Jpan" typeface="ＭＳ Ｐゴシック"/>
         <a:font script="Hang" typeface="맑은 고딕"/>
-        <a:font script="Hans" typeface="等线 Light"/>
+        <a:font script="Hans" typeface="宋体"/>
         <a:font script="Hant" typeface="新細明體"/>
         <a:font script="Arab" typeface="Times New Roman"/>
         <a:font script="Hebr" typeface="Times New Roman"/>
@@ -5748,31 +5849,14 @@
         <a:font script="Viet" typeface="Times New Roman"/>
         <a:font script="Uigh" typeface="Microsoft Uighur"/>
         <a:font script="Geor" typeface="Sylfaen"/>
-        <a:font script="Armn" typeface="Arial"/>
-        <a:font script="Bugi" typeface="Leelawadee UI"/>
-        <a:font script="Bopo" typeface="Microsoft JhengHei"/>
-        <a:font script="Java" typeface="Javanese Text"/>
-        <a:font script="Lisu" typeface="Segoe UI"/>
-        <a:font script="Mymr" typeface="Myanmar Text"/>
-        <a:font script="Nkoo" typeface="Ebrima"/>
-        <a:font script="Olck" typeface="Nirmala UI"/>
-        <a:font script="Osma" typeface="Ebrima"/>
-        <a:font script="Phag" typeface="Phagspa"/>
-        <a:font script="Syrn" typeface="Estrangelo Edessa"/>
-        <a:font script="Syrj" typeface="Estrangelo Edessa"/>
-        <a:font script="Syre" typeface="Estrangelo Edessa"/>
-        <a:font script="Sora" typeface="Nirmala UI"/>
-        <a:font script="Tale" typeface="Microsoft Tai Le"/>
-        <a:font script="Talu" typeface="Microsoft New Tai Lue"/>
-        <a:font script="Tfng" typeface="Ebrima"/>
       </a:majorFont>
       <a:minorFont>
-        <a:latin typeface="Aptos" panose="02110004020202020204"/>
+        <a:latin typeface="Calibri"/>
         <a:ea typeface=""/>
         <a:cs typeface=""/>
-        <a:font script="Jpan" typeface="游ゴシック"/>
+        <a:font script="Jpan" typeface="ＭＳ Ｐゴシック"/>
         <a:font script="Hang" typeface="맑은 고딕"/>
-        <a:font script="Hans" typeface="等线"/>
+        <a:font script="Hans" typeface="宋体"/>
         <a:font script="Hant" typeface="新細明體"/>
         <a:font script="Arab" typeface="Arial"/>
         <a:font script="Hebr" typeface="Arial"/>
@@ -5800,23 +5884,6 @@
         <a:font script="Viet" typeface="Arial"/>
         <a:font script="Uigh" typeface="Microsoft Uighur"/>
         <a:font script="Geor" typeface="Sylfaen"/>
-        <a:font script="Armn" typeface="Arial"/>
-        <a:font script="Bugi" typeface="Leelawadee UI"/>
-        <a:font script="Bopo" typeface="Microsoft JhengHei"/>
-        <a:font script="Java" typeface="Javanese Text"/>
-        <a:font script="Lisu" typeface="Segoe UI"/>
-        <a:font script="Mymr" typeface="Myanmar Text"/>
-        <a:font script="Nkoo" typeface="Ebrima"/>
-        <a:font script="Olck" typeface="Nirmala UI"/>
-        <a:font script="Osma" typeface="Ebrima"/>
-        <a:font script="Phag" typeface="Phagspa"/>
-        <a:font script="Syrn" typeface="Estrangelo Edessa"/>
-        <a:font script="Syrj" typeface="Estrangelo Edessa"/>
-        <a:font script="Syre" typeface="Estrangelo Edessa"/>
-        <a:font script="Sora" typeface="Nirmala UI"/>
-        <a:font script="Tale" typeface="Microsoft Tai Le"/>
-        <a:font script="Talu" typeface="Microsoft New Tai Lue"/>
-        <a:font script="Tfng" typeface="Ebrima"/>
       </a:minorFont>
     </a:fontScheme>
     <a:fmtScheme name="Office">
@@ -5828,136 +5895,180 @@
           <a:gsLst>
             <a:gs pos="0">
               <a:schemeClr val="phClr">
-                <a:lumMod val="110000"/>
-                <a:satMod val="105000"/>
-                <a:tint val="67000"/>
+                <a:tint val="50000"/>
+                <a:satMod val="300000"/>
               </a:schemeClr>
             </a:gs>
-            <a:gs pos="50000">
+            <a:gs pos="35000">
               <a:schemeClr val="phClr">
-                <a:lumMod val="105000"/>
-                <a:satMod val="103000"/>
-                <a:tint val="73000"/>
+                <a:tint val="37000"/>
+                <a:satMod val="300000"/>
               </a:schemeClr>
             </a:gs>
             <a:gs pos="100000">
               <a:schemeClr val="phClr">
-                <a:lumMod val="105000"/>
-                <a:satMod val="109000"/>
-                <a:tint val="81000"/>
+                <a:tint val="15000"/>
+                <a:satMod val="350000"/>
               </a:schemeClr>
             </a:gs>
           </a:gsLst>
-          <a:lin ang="5400000" scaled="0"/>
+          <a:lin ang="16200000" scaled="1"/>
         </a:gradFill>
         <a:gradFill rotWithShape="1">
           <a:gsLst>
             <a:gs pos="0">
               <a:schemeClr val="phClr">
-                <a:satMod val="103000"/>
-                <a:lumMod val="102000"/>
-                <a:tint val="94000"/>
-              </a:schemeClr>
-            </a:gs>
-            <a:gs pos="50000">
-              <a:schemeClr val="phClr">
-                <a:satMod val="110000"/>
-                <a:lumMod val="100000"/>
+                <a:tint val="100000"/>
                 <a:shade val="100000"/>
+                <a:satMod val="130000"/>
               </a:schemeClr>
             </a:gs>
             <a:gs pos="100000">
               <a:schemeClr val="phClr">
-                <a:lumMod val="99000"/>
-                <a:satMod val="120000"/>
-                <a:shade val="78000"/>
+                <a:tint val="50000"/>
+                <a:shade val="100000"/>
+                <a:satMod val="350000"/>
               </a:schemeClr>
             </a:gs>
           </a:gsLst>
-          <a:lin ang="5400000" scaled="0"/>
+          <a:lin ang="16200000" scaled="0"/>
         </a:gradFill>
       </a:fillStyleLst>
       <a:lnStyleLst>
-        <a:ln w="12700" cap="flat" cmpd="sng" algn="ctr">
+        <a:ln w="9525" cap="flat" cmpd="sng" algn="ctr">
           <a:solidFill>
-            <a:schemeClr val="phClr"/>
+            <a:schemeClr val="phClr">
+              <a:shade val="95000"/>
+              <a:satMod val="105000"/>
+            </a:schemeClr>
           </a:solidFill>
           <a:prstDash val="solid"/>
-          <a:miter lim="800000"/>
-        </a:ln>
-        <a:ln w="19050" cap="flat" cmpd="sng" algn="ctr">
-          <a:solidFill>
-            <a:schemeClr val="phClr"/>
-          </a:solidFill>
-          <a:prstDash val="solid"/>
-          <a:miter lim="800000"/>
         </a:ln>
         <a:ln w="25400" cap="flat" cmpd="sng" algn="ctr">
           <a:solidFill>
             <a:schemeClr val="phClr"/>
           </a:solidFill>
           <a:prstDash val="solid"/>
-          <a:miter lim="800000"/>
+        </a:ln>
+        <a:ln w="38100" cap="flat" cmpd="sng" algn="ctr">
+          <a:solidFill>
+            <a:schemeClr val="phClr"/>
+          </a:solidFill>
+          <a:prstDash val="solid"/>
         </a:ln>
       </a:lnStyleLst>
       <a:effectStyleLst>
         <a:effectStyle>
-          <a:effectLst/>
-        </a:effectStyle>
-        <a:effectStyle>
-          <a:effectLst/>
+          <a:effectLst>
+            <a:outerShdw blurRad="40000" dist="20000" dir="5400000" rotWithShape="0">
+              <a:srgbClr val="000000">
+                <a:alpha val="38000"/>
+              </a:srgbClr>
+            </a:outerShdw>
+          </a:effectLst>
         </a:effectStyle>
         <a:effectStyle>
           <a:effectLst>
-            <a:outerShdw blurRad="57150" dist="19050" dir="5400000" algn="ctr" rotWithShape="0">
+            <a:outerShdw blurRad="40000" dist="23000" dir="5400000" rotWithShape="0">
               <a:srgbClr val="000000">
-                <a:alpha val="63000"/>
+                <a:alpha val="35000"/>
               </a:srgbClr>
             </a:outerShdw>
           </a:effectLst>
+        </a:effectStyle>
+        <a:effectStyle>
+          <a:effectLst>
+            <a:outerShdw blurRad="40000" dist="23000" dir="5400000" rotWithShape="0">
+              <a:srgbClr val="000000">
+                <a:alpha val="35000"/>
+              </a:srgbClr>
+            </a:outerShdw>
+          </a:effectLst>
+          <a:scene3d>
+            <a:camera prst="orthographicFront">
+              <a:rot lat="0" lon="0" rev="0"/>
+            </a:camera>
+            <a:lightRig rig="threePt" dir="t">
+              <a:rot lat="0" lon="0" rev="1200000"/>
+            </a:lightRig>
+          </a:scene3d>
+          <a:sp3d>
+            <a:bevelT w="63500" h="25400"/>
+          </a:sp3d>
         </a:effectStyle>
       </a:effectStyleLst>
       <a:bgFillStyleLst>
         <a:solidFill>
           <a:schemeClr val="phClr"/>
         </a:solidFill>
-        <a:solidFill>
-          <a:schemeClr val="phClr">
-            <a:tint val="95000"/>
-            <a:satMod val="170000"/>
-          </a:schemeClr>
-        </a:solidFill>
         <a:gradFill rotWithShape="1">
           <a:gsLst>
             <a:gs pos="0">
               <a:schemeClr val="phClr">
-                <a:tint val="93000"/>
-                <a:satMod val="150000"/>
-                <a:shade val="98000"/>
-                <a:lumMod val="102000"/>
+                <a:tint val="40000"/>
+                <a:satMod val="350000"/>
               </a:schemeClr>
             </a:gs>
-            <a:gs pos="50000">
+            <a:gs pos="40000">
               <a:schemeClr val="phClr">
-                <a:tint val="98000"/>
-                <a:satMod val="130000"/>
-                <a:shade val="90000"/>
-                <a:lumMod val="103000"/>
+                <a:tint val="45000"/>
+                <a:shade val="99000"/>
+                <a:satMod val="350000"/>
               </a:schemeClr>
             </a:gs>
             <a:gs pos="100000">
               <a:schemeClr val="phClr">
-                <a:shade val="63000"/>
-                <a:satMod val="120000"/>
+                <a:shade val="20000"/>
+                <a:satMod val="255000"/>
               </a:schemeClr>
             </a:gs>
           </a:gsLst>
-          <a:lin ang="5400000" scaled="0"/>
+          <a:path path="circle">
+            <a:fillToRect l="50000" t="-80000" r="50000" b="180000"/>
+          </a:path>
+        </a:gradFill>
+        <a:gradFill rotWithShape="1">
+          <a:gsLst>
+            <a:gs pos="0">
+              <a:schemeClr val="phClr">
+                <a:tint val="80000"/>
+                <a:satMod val="300000"/>
+              </a:schemeClr>
+            </a:gs>
+            <a:gs pos="100000">
+              <a:schemeClr val="phClr">
+                <a:shade val="30000"/>
+                <a:satMod val="200000"/>
+              </a:schemeClr>
+            </a:gs>
+          </a:gsLst>
+          <a:path path="circle">
+            <a:fillToRect l="50000" t="50000" r="50000" b="50000"/>
+          </a:path>
         </a:gradFill>
       </a:bgFillStyleLst>
     </a:fmtScheme>
   </a:themeElements>
   <a:objectDefaults>
+    <a:spDef>
+      <a:spPr/>
+      <a:bodyPr/>
+      <a:lstStyle/>
+      <a:style>
+        <a:lnRef idx="1">
+          <a:schemeClr val="accent1"/>
+        </a:lnRef>
+        <a:fillRef idx="3">
+          <a:schemeClr val="accent1"/>
+        </a:fillRef>
+        <a:effectRef idx="2">
+          <a:schemeClr val="accent1"/>
+        </a:effectRef>
+        <a:fontRef idx="minor">
+          <a:schemeClr val="lt1"/>
+        </a:fontRef>
+      </a:style>
+    </a:spDef>
     <a:lnDef>
       <a:spPr/>
       <a:bodyPr/>
@@ -5979,10 +6090,5 @@
     </a:lnDef>
   </a:objectDefaults>
   <a:extraClrSchemeLst/>
-  <a:extLst>
-    <a:ext uri="{05A4C25C-085E-4340-85A3-A5531E510DB2}">
-      <thm15:themeFamily xmlns:thm15="http://schemas.microsoft.com/office/thememl/2012/main" name="Office Theme" id="{2E142A2C-CD16-42D6-873A-C26D2A0506FA}" vid="{1BDDFF52-6CD6-40A5-AB3C-68EB2F1E4D0A}"/>
-    </a:ext>
-  </a:extLst>
 </a:theme>
 </file>
--- a/outputs/AvePoint_Executive_Summary.pptx
+++ b/outputs/AvePoint_Executive_Summary.pptx
@@ -507,7 +507,375 @@
           <a:lstStyle/>
           <a:p>
             <a:r>
-              <a:t>One minute. Give all three answers immediately, then spend one slide on each. Two of the three answers are negative and I say so on slide one rather than building up to it.</a:t>
+              <a:t>One minute. Give all three answers immediately, then spend one slide on each. Two of the three answers are negative and I say so on slide one rather than building up to it. If pressed on how firm they are: answer one is the strongest result in the study, answer two is a 'cannot tell' rather than a 'no', answer three rests on cost arithmetic we can check rather than on any model.</a:t>
+            </a:r>
+          </a:p>
+        </p:txBody>
+      </p:sp>
+      <p:sp>
+        <p:nvSpPr>
+          <p:cNvPr id="4" name="Slide Number Placeholder 3"/>
+          <p:cNvSpPr>
+            <a:spLocks noGrp="1"/>
+          </p:cNvSpPr>
+          <p:nvPr>
+            <p:ph type="sldNum" idx="5" sz="quarter"/>
+          </p:nvPr>
+        </p:nvSpPr>
+        <p:spPr/>
+      </p:sp>
+    </p:spTree>
+  </p:cSld>
+  <p:clrMapOvr>
+    <a:masterClrMapping/>
+  </p:clrMapOvr>
+</p:notes>
+</file>
+
+<file path=ppt/notesSlides/notesSlide2.xml><?xml version="1.0" encoding="utf-8"?>
+<p:notes xmlns:a="http://schemas.openxmlformats.org/drawingml/2006/main" xmlns:p="http://schemas.openxmlformats.org/presentationml/2006/main" xmlns:r="http://schemas.openxmlformats.org/officeDocument/2006/relationships">
+  <p:cSld>
+    <p:spTree>
+      <p:nvGrpSpPr>
+        <p:cNvPr id="1" name=""/>
+        <p:cNvGrpSpPr/>
+        <p:nvPr/>
+      </p:nvGrpSpPr>
+      <p:grpSpPr>
+        <a:xfrm>
+          <a:off x="0" y="0"/>
+          <a:ext cx="0" cy="0"/>
+          <a:chOff x="0" y="0"/>
+          <a:chExt cx="0" cy="0"/>
+        </a:xfrm>
+      </p:grpSpPr>
+      <p:sp>
+        <p:nvSpPr>
+          <p:cNvPr id="2" name="Slide Image Placeholder 1"/>
+          <p:cNvSpPr>
+            <a:spLocks noGrp="1"/>
+          </p:cNvSpPr>
+          <p:nvPr>
+            <p:ph type="sldImg" idx="2"/>
+          </p:nvPr>
+        </p:nvSpPr>
+        <p:spPr/>
+      </p:sp>
+      <p:sp>
+        <p:nvSpPr>
+          <p:cNvPr id="3" name="Notes Placeholder 2"/>
+          <p:cNvSpPr>
+            <a:spLocks noGrp="1"/>
+          </p:cNvSpPr>
+          <p:nvPr>
+            <p:ph type="body" idx="3" sz="quarter"/>
+          </p:nvPr>
+        </p:nvSpPr>
+        <p:spPr/>
+        <p:txBody>
+          <a:bodyPr/>
+          <a:lstStyle/>
+          <a:p>
+            <a:r>
+              <a:t>If asked how solid each half is. The rise: Poisson trend on calendar month with accounts-at-risk as offset, rate ratio 1.089 per month, p = 2e-16. The flat cross-section: Cox over 21 characteristics returns global p = 0.57 and concordance 0.571; log-rank across 7 segments has a smallest adjusted p of 0.39. The two facts are one fact. Something that moves every account at once leaves no differences between accounts for a model to find.</a:t>
+            </a:r>
+          </a:p>
+        </p:txBody>
+      </p:sp>
+      <p:sp>
+        <p:nvSpPr>
+          <p:cNvPr id="4" name="Slide Number Placeholder 3"/>
+          <p:cNvSpPr>
+            <a:spLocks noGrp="1"/>
+          </p:cNvSpPr>
+          <p:nvPr>
+            <p:ph type="sldNum" idx="5" sz="quarter"/>
+          </p:nvPr>
+        </p:nvSpPr>
+        <p:spPr/>
+      </p:sp>
+    </p:spTree>
+  </p:cSld>
+  <p:clrMapOvr>
+    <a:masterClrMapping/>
+  </p:clrMapOvr>
+</p:notes>
+</file>
+
+<file path=ppt/notesSlides/notesSlide3.xml><?xml version="1.0" encoding="utf-8"?>
+<p:notes xmlns:a="http://schemas.openxmlformats.org/drawingml/2006/main" xmlns:p="http://schemas.openxmlformats.org/presentationml/2006/main" xmlns:r="http://schemas.openxmlformats.org/officeDocument/2006/relationships">
+  <p:cSld>
+    <p:spTree>
+      <p:nvGrpSpPr>
+        <p:cNvPr id="1" name=""/>
+        <p:cNvGrpSpPr/>
+        <p:nvPr/>
+      </p:nvGrpSpPr>
+      <p:grpSpPr>
+        <a:xfrm>
+          <a:off x="0" y="0"/>
+          <a:ext cx="0" cy="0"/>
+          <a:chOff x="0" y="0"/>
+          <a:chExt cx="0" cy="0"/>
+        </a:xfrm>
+      </p:grpSpPr>
+      <p:sp>
+        <p:nvSpPr>
+          <p:cNvPr id="2" name="Slide Image Placeholder 1"/>
+          <p:cNvSpPr>
+            <a:spLocks noGrp="1"/>
+          </p:cNvSpPr>
+          <p:nvPr>
+            <p:ph type="sldImg" idx="2"/>
+          </p:nvPr>
+        </p:nvSpPr>
+        <p:spPr/>
+      </p:sp>
+      <p:sp>
+        <p:nvSpPr>
+          <p:cNvPr id="3" name="Notes Placeholder 2"/>
+          <p:cNvSpPr>
+            <a:spLocks noGrp="1"/>
+          </p:cNvSpPr>
+          <p:nvPr>
+            <p:ph type="body" idx="3" sz="quarter"/>
+          </p:nvPr>
+        </p:nvSpPr>
+        <p:spPr/>
+        <p:txBody>
+          <a:bodyPr/>
+          <a:lstStyle/>
+          <a:p>
+            <a:r>
+              <a:t>Two challenges to expect on this slide.</a:t>
+            </a:r>
+          </a:p>
+          <a:p/>
+          <a:p>
+            <a:r>
+              <a:t>1. 'But AUC 0.58 is above 0.50, so there is something there.' The answer is that 0.583 is the maximum of a 15-model search, not a measurement of one model. Nested cross-validation, which prices in that search, gives AUC 0.534 +/- 0.016. The same search on shuffled labels averages AUC 0.566 and clears 0.583 in 7 of 20 trials. Permutation p = 0.076.</a:t>
+            </a:r>
+          </a:p>
+          <a:p/>
+          <a:p>
+            <a:r>
+              <a:t>2. 'Is AUC the right metric at 31% positives, or should this be F1 or precision-recall?' AUC is right here because its null is 0.50 at any base rate, which is what makes the twelve horizon/buffer cells comparable when their positive rates run 11% to 45%. But it does not matter which we use: average precision is 0.378 against a base-rate null of 0.305, permutation p = 0.070, against p = 0.076 on AUC. And F1 is 0.497 against 0.467 for contacting everyone -- a lift of 0.029, which is smaller than the 0.049 optimism in its own tuned threshold. F1 is the weakest of the three for this claim precisely because it is threshold-dependent and has no natural null.</a:t>
+            </a:r>
+          </a:p>
+          <a:p/>
+          <a:p>
+            <a:r>
+              <a:t>The three approaches are the cross-sectional classifier, a Cox survival model (concordance 0.509) and the horizon sweep. Do not overclaim the negative: the planted weak-signal control scores AUC 0.584 against our 0.583, so 'underpowered' is the defensible claim and 'no signal exists' is not.</a:t>
+            </a:r>
+          </a:p>
+        </p:txBody>
+      </p:sp>
+      <p:sp>
+        <p:nvSpPr>
+          <p:cNvPr id="4" name="Slide Number Placeholder 3"/>
+          <p:cNvSpPr>
+            <a:spLocks noGrp="1"/>
+          </p:cNvSpPr>
+          <p:nvPr>
+            <p:ph type="sldNum" idx="5" sz="quarter"/>
+          </p:nvPr>
+        </p:nvSpPr>
+        <p:spPr/>
+      </p:sp>
+    </p:spTree>
+  </p:cSld>
+  <p:clrMapOvr>
+    <a:masterClrMapping/>
+  </p:clrMapOvr>
+</p:notes>
+</file>
+
+<file path=ppt/notesSlides/notesSlide4.xml><?xml version="1.0" encoding="utf-8"?>
+<p:notes xmlns:a="http://schemas.openxmlformats.org/drawingml/2006/main" xmlns:p="http://schemas.openxmlformats.org/presentationml/2006/main" xmlns:r="http://schemas.openxmlformats.org/officeDocument/2006/relationships">
+  <p:cSld>
+    <p:spTree>
+      <p:nvGrpSpPr>
+        <p:cNvPr id="1" name=""/>
+        <p:cNvGrpSpPr/>
+        <p:nvPr/>
+      </p:nvGrpSpPr>
+      <p:grpSpPr>
+        <a:xfrm>
+          <a:off x="0" y="0"/>
+          <a:ext cx="0" cy="0"/>
+          <a:chOff x="0" y="0"/>
+          <a:chExt cx="0" cy="0"/>
+        </a:xfrm>
+      </p:grpSpPr>
+      <p:sp>
+        <p:nvSpPr>
+          <p:cNvPr id="2" name="Slide Image Placeholder 1"/>
+          <p:cNvSpPr>
+            <a:spLocks noGrp="1"/>
+          </p:cNvSpPr>
+          <p:nvPr>
+            <p:ph type="sldImg" idx="2"/>
+          </p:nvPr>
+        </p:nvSpPr>
+        <p:spPr/>
+      </p:sp>
+      <p:sp>
+        <p:nvSpPr>
+          <p:cNvPr id="3" name="Notes Placeholder 2"/>
+          <p:cNvSpPr>
+            <a:spLocks noGrp="1"/>
+          </p:cNvSpPr>
+          <p:nvPr>
+            <p:ph type="body" idx="3" sz="quarter"/>
+          </p:nvPr>
+        </p:nvSpPr>
+        <p:spPr/>
+        <p:txBody>
+          <a:bodyPr/>
+          <a:lstStyle/>
+          <a:p>
+            <a:r>
+              <a:t>The first action is the one thing on this deck that does not depend on the modelling. Break-even is 10.3% against a base rate of 30.5%, a factor of three, so it survives large errors in the cost assumptions. On onboarding: the pooled hazard genuinely does fall, rho = 0.737 with p = 1.7e-13, which is why the obvious analysis recommends the programme. Within each signup cohort rho comes back to about 1 (range 0.87 to 1.25, none significant), so the pooled shape is which cohorts are present at each tenure, not tenure itself. This reverses a recommendation an earlier pass of this work made.</a:t>
+            </a:r>
+          </a:p>
+        </p:txBody>
+      </p:sp>
+      <p:sp>
+        <p:nvSpPr>
+          <p:cNvPr id="4" name="Slide Number Placeholder 3"/>
+          <p:cNvSpPr>
+            <a:spLocks noGrp="1"/>
+          </p:cNvSpPr>
+          <p:nvPr>
+            <p:ph type="sldNum" idx="5" sz="quarter"/>
+          </p:nvPr>
+        </p:nvSpPr>
+        <p:spPr/>
+      </p:sp>
+    </p:spTree>
+  </p:cSld>
+  <p:clrMapOvr>
+    <a:masterClrMapping/>
+  </p:clrMapOvr>
+</p:notes>
+</file>
+
+<file path=ppt/notesSlides/notesSlide5.xml><?xml version="1.0" encoding="utf-8"?>
+<p:notes xmlns:a="http://schemas.openxmlformats.org/drawingml/2006/main" xmlns:p="http://schemas.openxmlformats.org/presentationml/2006/main" xmlns:r="http://schemas.openxmlformats.org/officeDocument/2006/relationships">
+  <p:cSld>
+    <p:spTree>
+      <p:nvGrpSpPr>
+        <p:cNvPr id="1" name=""/>
+        <p:cNvGrpSpPr/>
+        <p:nvPr/>
+      </p:nvGrpSpPr>
+      <p:grpSpPr>
+        <a:xfrm>
+          <a:off x="0" y="0"/>
+          <a:ext cx="0" cy="0"/>
+          <a:chOff x="0" y="0"/>
+          <a:chExt cx="0" cy="0"/>
+        </a:xfrm>
+      </p:grpSpPr>
+      <p:sp>
+        <p:nvSpPr>
+          <p:cNvPr id="2" name="Slide Image Placeholder 1"/>
+          <p:cNvSpPr>
+            <a:spLocks noGrp="1"/>
+          </p:cNvSpPr>
+          <p:nvPr>
+            <p:ph type="sldImg" idx="2"/>
+          </p:nvPr>
+        </p:nvSpPr>
+        <p:spPr/>
+      </p:sp>
+      <p:sp>
+        <p:nvSpPr>
+          <p:cNvPr id="3" name="Notes Placeholder 2"/>
+          <p:cNvSpPr>
+            <a:spLocks noGrp="1"/>
+          </p:cNvSpPr>
+          <p:nvPr>
+            <p:ph type="body" idx="3" sz="quarter"/>
+          </p:nvPr>
+        </p:nvSpPr>
+        <p:spPr/>
+        <p:txBody>
+          <a:bodyPr/>
+          <a:lstStyle/>
+          <a:p>
+            <a:r>
+              <a:t>Every figure here is arithmetic on quantities we can check, not model output. Net value at the model's best threshold is $53,000 against $52,400 for treating everyone, hence the 1%, and that 1% is itself optimistic because the threshold was chosen on the same data. The 15 months comes from a minimum detectable effect of 17.2pp at 88 per arm; a 5pp improvement would need about ten years.</a:t>
+            </a:r>
+          </a:p>
+        </p:txBody>
+      </p:sp>
+      <p:sp>
+        <p:nvSpPr>
+          <p:cNvPr id="4" name="Slide Number Placeholder 3"/>
+          <p:cNvSpPr>
+            <a:spLocks noGrp="1"/>
+          </p:cNvSpPr>
+          <p:nvPr>
+            <p:ph type="sldNum" idx="5" sz="quarter"/>
+          </p:nvPr>
+        </p:nvSpPr>
+        <p:spPr/>
+      </p:sp>
+    </p:spTree>
+  </p:cSld>
+  <p:clrMapOvr>
+    <a:masterClrMapping/>
+  </p:clrMapOvr>
+</p:notes>
+</file>
+
+<file path=ppt/notesSlides/notesSlide6.xml><?xml version="1.0" encoding="utf-8"?>
+<p:notes xmlns:a="http://schemas.openxmlformats.org/drawingml/2006/main" xmlns:p="http://schemas.openxmlformats.org/presentationml/2006/main" xmlns:r="http://schemas.openxmlformats.org/officeDocument/2006/relationships">
+  <p:cSld>
+    <p:spTree>
+      <p:nvGrpSpPr>
+        <p:cNvPr id="1" name=""/>
+        <p:cNvGrpSpPr/>
+        <p:nvPr/>
+      </p:nvGrpSpPr>
+      <p:grpSpPr>
+        <a:xfrm>
+          <a:off x="0" y="0"/>
+          <a:ext cx="0" cy="0"/>
+          <a:chOff x="0" y="0"/>
+          <a:chExt cx="0" cy="0"/>
+        </a:xfrm>
+      </p:grpSpPr>
+      <p:sp>
+        <p:nvSpPr>
+          <p:cNvPr id="2" name="Slide Image Placeholder 1"/>
+          <p:cNvSpPr>
+            <a:spLocks noGrp="1"/>
+          </p:cNvSpPr>
+          <p:nvPr>
+            <p:ph type="sldImg" idx="2"/>
+          </p:nvPr>
+        </p:nvSpPr>
+        <p:spPr/>
+      </p:sp>
+      <p:sp>
+        <p:nvSpPr>
+          <p:cNvPr id="3" name="Notes Placeholder 2"/>
+          <p:cNvSpPr>
+            <a:spLocks noGrp="1"/>
+          </p:cNvSpPr>
+          <p:nvPr>
+            <p:ph type="body" idx="3" sz="quarter"/>
+          </p:nvPr>
+        </p:nvSpPr>
+        <p:spPr/>
+        <p:txBody>
+          <a:bodyPr/>
+          <a:lstStyle/>
+          <a:p>
+            <a:r>
+              <a:t>Close on the ask rather than on the negative results. The second request is the one to push, because the label and the timestamps block any re-measurement of question two and also limit what we can say about the other two.</a:t>
             </a:r>
           </a:p>
         </p:txBody>
@@ -3558,7 +3926,7 @@
                 </a:solidFill>
                 <a:latin typeface="Calibri"/>
               </a:rPr>
-              <a:t>Executive summary. You asked three questions. Here are the three answers.</a:t>
+              <a:t>Executive summary. You asked three questions. Here are the three answers, each with the evidence behind it.</a:t>
             </a:r>
           </a:p>
         </p:txBody>
@@ -3613,7 +3981,7 @@
                 </a:solidFill>
                 <a:latin typeface="Calibri"/>
               </a:rPr>
-              <a:t>Not because of who they are. Because of when. Churn has roughly quadrupled over two years, and it affects every kind of customer equally.</a:t>
+              <a:t>The pattern is about when, not who. Churn roughly quadrupled over two years, and no customer characteristic we hold separates those who left from those who stayed.</a:t>
             </a:r>
           </a:p>
           <a:p>
@@ -3645,7 +4013,7 @@
                 </a:solidFill>
                 <a:latin typeface="Calibri"/>
               </a:rPr>
-              <a:t>No, and not with more modelling either. Two data problems have to be fixed first.</a:t>
+              <a:t>Not from this data as it stands. Two data faults have to be fixed before the question can be answered properly. A better algorithm is not the missing piece.</a:t>
             </a:r>
           </a:p>
           <a:p>
@@ -3677,7 +4045,41 @@
                 </a:solidFill>
                 <a:latin typeface="Calibri"/>
               </a:rPr>
-              <a:t>Calling every at-risk customer already pays for itself today. Beyond that we cannot yet prove what works, because we have never recorded taking an action.</a:t>
+              <a:t>Contacting every at-risk customer already pays for itself on the cost arithmetic alone. Beyond that we cannot yet prove what works, because no retention action has ever been recorded.</a:t>
+            </a:r>
+          </a:p>
+        </p:txBody>
+      </p:sp>
+      <p:sp>
+        <p:nvSpPr>
+          <p:cNvPr id="4" name="TextBox 3"/>
+          <p:cNvSpPr txBox="1"/>
+          <p:nvPr/>
+        </p:nvSpPr>
+        <p:spPr>
+          <a:xfrm>
+            <a:off x="685800" y="6126480"/>
+            <a:ext cx="10820095" cy="502920"/>
+          </a:xfrm>
+          <a:prstGeom prst="rect">
+            <a:avLst/>
+          </a:prstGeom>
+          <a:noFill/>
+        </p:spPr>
+        <p:txBody>
+          <a:bodyPr wrap="square">
+            <a:spAutoFit/>
+          </a:bodyPr>
+          <a:lstStyle/>
+          <a:p>
+            <a:r>
+              <a:rPr sz="1150" b="0" i="1">
+                <a:solidFill>
+                  <a:srgbClr val="5A6270"/>
+                </a:solidFill>
+                <a:latin typeface="Calibri"/>
+              </a:rPr>
+              <a:t>Each answer carries its supporting numbers on its own slide, including where the evidence is thin. Two of the three are limited by the data we hold, not by the analysis.</a:t>
             </a:r>
           </a:p>
         </p:txBody>
@@ -3823,7 +4225,7 @@
                 </a:solidFill>
                 <a:latin typeface="Calibri"/>
               </a:rPr>
-              <a:t>Not because of who they are. Because of when they were with us.</a:t>
+              <a:t>The clearest signal is when they were with us, not who they are.</a:t>
             </a:r>
           </a:p>
         </p:txBody>
@@ -3844,8 +4246,8 @@
         </p:blipFill>
         <p:spPr>
           <a:xfrm>
-            <a:off x="3023917" y="2331720"/>
-            <a:ext cx="6143861" cy="2743200"/>
+            <a:off x="3535905" y="2240280"/>
+            <a:ext cx="5119884" cy="2286000"/>
           </a:xfrm>
           <a:prstGeom prst="rect">
             <a:avLst/>
@@ -3860,7 +4262,7 @@
         </p:nvSpPr>
         <p:spPr>
           <a:xfrm>
-            <a:off x="685800" y="5029200"/>
+            <a:off x="685800" y="4590288"/>
             <a:ext cx="10820095" cy="4572000"/>
           </a:xfrm>
           <a:prstGeom prst="rect">
@@ -3876,49 +4278,83 @@
           <a:p>
             <a:pPr>
               <a:spcAft>
-                <a:spcPts val="600"/>
+                <a:spcPts val="400"/>
               </a:spcAft>
             </a:pPr>
             <a:r>
-              <a:rPr sz="1350" b="1" i="0">
+              <a:rPr sz="1250" b="1" i="0">
                 <a:solidFill>
                   <a:srgbClr val="1A1A1A"/>
                 </a:solidFill>
                 <a:latin typeface="Calibri"/>
               </a:rPr>
-              <a:t>In 2023 about 5 in every 100 customers left each month. By December 2024 it was 22 in every 100. The customer base stayed the same size, so this is not a side effect of growth.</a:t>
+              <a:t>Churn rose from about 5 in every 100 customers a month in 2023 to 22 in 100 by December 2024, on a customer base that did not grow. A 2.8x increase per year, and the most tightly estimated effect in the data.</a:t>
             </a:r>
           </a:p>
           <a:p>
             <a:pPr>
               <a:spcAft>
-                <a:spcPts val="600"/>
+                <a:spcPts val="400"/>
               </a:spcAft>
             </a:pPr>
             <a:r>
-              <a:rPr sz="1350" b="0" i="0">
+              <a:rPr sz="1250" b="0" i="0">
                 <a:solidFill>
                   <a:srgbClr val="1A1A1A"/>
                 </a:solidFill>
                 <a:latin typeface="Calibri"/>
               </a:rPr>
-              <a:t>We tested every customer characteristic we hold: industry, country, plan, company size, how they found us, product usage and support history. None of them separates the customers who leave from the ones who stay.</a:t>
+              <a:t>We tested every characteristic we hold: industry, country, plan, size, how they found us, usage, support history. None separated leavers from stayers by more than chance produces. The best reaches AUC 0.62, against AUC 0.61 from deliberately scrambled labels.</a:t>
             </a:r>
           </a:p>
           <a:p>
             <a:pPr>
               <a:spcAft>
-                <a:spcPts val="600"/>
+                <a:spcPts val="400"/>
               </a:spcAft>
             </a:pPr>
             <a:r>
-              <a:rPr sz="1350" b="0" i="0">
+              <a:rPr sz="1250" b="0" i="0">
                 <a:solidFill>
                   <a:srgbClr val="B02E2E"/>
                 </a:solidFill>
                 <a:latin typeface="Calibri"/>
               </a:rPr>
-              <a:t>What we cannot yet say is why the rate rose. The data holds nothing that changes over time, so we can prove the increase is real but not name the cause. Slide 6 says what would fix that.</a:t>
+              <a:t>What we cannot yet say is why the rate rose. The data holds nothing that varies over time, so we can establish the increase but not attribute it. Slide 6 says what would fix that.</a:t>
+            </a:r>
+          </a:p>
+        </p:txBody>
+      </p:sp>
+      <p:sp>
+        <p:nvSpPr>
+          <p:cNvPr id="7" name="TextBox 6"/>
+          <p:cNvSpPr txBox="1"/>
+          <p:nvPr/>
+        </p:nvSpPr>
+        <p:spPr>
+          <a:xfrm>
+            <a:off x="685800" y="6126480"/>
+            <a:ext cx="10820095" cy="502920"/>
+          </a:xfrm>
+          <a:prstGeom prst="rect">
+            <a:avLst/>
+          </a:prstGeom>
+          <a:noFill/>
+        </p:spPr>
+        <p:txBody>
+          <a:bodyPr wrap="square">
+            <a:spAutoFit/>
+          </a:bodyPr>
+          <a:lstStyle/>
+          <a:p>
+            <a:r>
+              <a:rPr sz="1150" b="0" i="1">
+                <a:solidFill>
+                  <a:srgbClr val="5A6270"/>
+                </a:solidFill>
+                <a:latin typeface="Calibri"/>
+              </a:rPr>
+              <a:t>AUC is ranking accuracy: 0.50 is a coin flip, 1.00 is perfect. With 54 churners we could only have detected a large difference between customer types, so "none found" is not proof that none exists. The rise over calendar time is the opposite case: large, and precisely estimated.</a:t>
             </a:r>
           </a:p>
         </p:txBody>
@@ -4064,7 +4500,7 @@
                 </a:solidFill>
                 <a:latin typeface="Calibri"/>
               </a:rPr>
-              <a:t>No. Not from this data, and not with a better algorithm.</a:t>
+              <a:t>Not from this data as it stands, and a better algorithm is not the missing piece.</a:t>
             </a:r>
           </a:p>
         </p:txBody>
@@ -4077,7 +4513,7 @@
         </p:nvSpPr>
         <p:spPr>
           <a:xfrm>
-            <a:off x="685800" y="1719072"/>
+            <a:off x="685800" y="2139696"/>
             <a:ext cx="10820095" cy="4572000"/>
           </a:xfrm>
           <a:prstGeom prst="rect">
@@ -4093,23 +4529,39 @@
           <a:p>
             <a:pPr>
               <a:spcAft>
-                <a:spcPts val="900"/>
+                <a:spcPts val="300"/>
               </a:spcAft>
             </a:pPr>
             <a:r>
-              <a:rPr sz="1600" b="1" i="0">
+              <a:rPr sz="1400" b="1" i="0">
                 <a:solidFill>
                   <a:srgbClr val="1A1A1A"/>
                 </a:solidFill>
                 <a:latin typeface="Calibri"/>
               </a:rPr>
-              <a:t>We tried three genuinely different approaches. All three performed about as well as flipping a coin.</a:t>
+              <a:t>We tried three genuinely different approaches. None beat chance once we account for having tried many.</a:t>
+            </a:r>
+          </a:p>
+          <a:p>
+            <a:pPr lvl="1">
+              <a:spcAft>
+                <a:spcPts val="300"/>
+              </a:spcAft>
+            </a:pPr>
+            <a:r>
+              <a:rPr sz="1200" b="0" i="0">
+                <a:solidFill>
+                  <a:srgbClr val="5A6270"/>
+                </a:solidFill>
+                <a:latin typeface="Calibri"/>
+              </a:rPr>
+              <a:t>Best model: AUC 0.58, on a scale where 0.50 is a coin flip and 1.00 is perfect. Its uncertainty spans AUC 0.37 to 0.75, the same search on deliberately scrambled data reached AUC 0.58 or better in 7 of 20 attempts, and priced for the fact that we picked the winner it is AUC 0.53.</a:t>
             </a:r>
           </a:p>
           <a:p>
             <a:pPr>
               <a:spcAft>
-                <a:spcPts val="900"/>
+                <a:spcPts val="300"/>
               </a:spcAft>
             </a:pPr>
             <a:r>
@@ -4125,39 +4577,39 @@
           <a:p>
             <a:pPr>
               <a:spcAft>
-                <a:spcPts val="900"/>
+                <a:spcPts val="300"/>
               </a:spcAft>
             </a:pPr>
             <a:r>
-              <a:rPr sz="1600" b="1" i="0">
+              <a:rPr sz="1400" b="1" i="0">
                 <a:solidFill>
                   <a:srgbClr val="1A1A1A"/>
                 </a:solidFill>
                 <a:latin typeface="Calibri"/>
               </a:rPr>
-              <a:t>There is a second, harder problem underneath that.</a:t>
+              <a:t>The careful version: we cannot tell, rather than there is nothing there.</a:t>
             </a:r>
           </a:p>
           <a:p>
             <a:pPr lvl="1">
               <a:spcAft>
-                <a:spcPts val="900"/>
+                <a:spcPts val="300"/>
               </a:spcAft>
             </a:pPr>
             <a:r>
-              <a:rPr sz="1400" b="0" i="0">
+              <a:rPr sz="1200" b="0" i="0">
                 <a:solidFill>
                   <a:srgbClr val="5A6270"/>
                 </a:solidFill>
                 <a:latin typeface="Calibri"/>
               </a:rPr>
-              <a:t>Even the faint signal that does exist only appears in the days just before a customer leaves. If we ask the model for 30 days of warning, so somebody could actually act on it, performance drops to no better than guessing. A prediction that arrives too late to use is not useful.</a:t>
+              <a:t>A planted relationship that is real but weak also reaches AUC 0.58 here. At 54 churners the two are indistinguishable. Hence re-measure, rather than close the question.</a:t>
             </a:r>
           </a:p>
           <a:p>
             <a:pPr>
               <a:spcAft>
-                <a:spcPts val="900"/>
+                <a:spcPts val="300"/>
               </a:spcAft>
             </a:pPr>
             <a:r>
@@ -4173,71 +4625,103 @@
           <a:p>
             <a:pPr>
               <a:spcAft>
-                <a:spcPts val="900"/>
+                <a:spcPts val="300"/>
               </a:spcAft>
             </a:pPr>
             <a:r>
-              <a:rPr sz="1600" b="1" i="0">
+              <a:rPr sz="1400" b="1" i="0">
                 <a:solidFill>
                   <a:srgbClr val="1A1A1A"/>
                 </a:solidFill>
                 <a:latin typeface="Calibri"/>
               </a:rPr>
-              <a:t>The reasons are about data, not method.</a:t>
+              <a:t>The warning time we would need makes it harder, not easier.</a:t>
             </a:r>
           </a:p>
           <a:p>
             <a:pPr lvl="1">
               <a:spcAft>
-                <a:spcPts val="900"/>
+                <a:spcPts val="300"/>
               </a:spcAft>
             </a:pPr>
             <a:r>
-              <a:rPr sz="1400" b="0" i="0">
+              <a:rPr sz="1200" b="0" i="0">
                 <a:solidFill>
                   <a:srgbClr val="5A6270"/>
                 </a:solidFill>
                 <a:latin typeface="Calibri"/>
               </a:rPr>
-              <a:t>Our records disagree about who has even churned. Three separate sources agree for only one customer in five.</a:t>
+              <a:t>Asking for 30 days of notice, so somebody could act, moves every horizon into the AUC 0.42 to 0.52 band. A prediction that arrives too late to use is not useful.</a:t>
+            </a:r>
+          </a:p>
+          <a:p>
+            <a:pPr>
+              <a:spcAft>
+                <a:spcPts val="300"/>
+              </a:spcAft>
+            </a:pPr>
+            <a:r>
+              <a:rPr sz="600" b="0" i="0">
+                <a:solidFill>
+                  <a:srgbClr val="1A1A1A"/>
+                </a:solidFill>
+                <a:latin typeface="Calibri"/>
+              </a:rPr>
+              <a:t> </a:t>
+            </a:r>
+          </a:p>
+          <a:p>
+            <a:pPr>
+              <a:spcAft>
+                <a:spcPts val="300"/>
+              </a:spcAft>
+            </a:pPr>
+            <a:r>
+              <a:rPr sz="1400" b="1" i="0">
+                <a:solidFill>
+                  <a:srgbClr val="1A1A1A"/>
+                </a:solidFill>
+                <a:latin typeface="Calibri"/>
+              </a:rPr>
+              <a:t>Two data faults are doing most of the damage.</a:t>
             </a:r>
           </a:p>
           <a:p>
             <a:pPr lvl="1">
               <a:spcAft>
-                <a:spcPts val="900"/>
+                <a:spcPts val="300"/>
               </a:spcAft>
             </a:pPr>
             <a:r>
-              <a:rPr sz="1400" b="0" i="0">
+              <a:rPr sz="1200" b="0" i="0">
                 <a:solidFill>
                   <a:srgbClr val="5A6270"/>
                 </a:solidFill>
                 <a:latin typeface="Calibri"/>
               </a:rPr>
-              <a:t>Most product usage records are dated before the subscription they belong to, so anything built on recent activity is built on nonsense.</a:t>
+              <a:t>Three sources disagree on who churned: they agree on about one account in five, which is what two unrelated columns would do.</a:t>
             </a:r>
           </a:p>
           <a:p>
             <a:pPr lvl="1">
               <a:spcAft>
-                <a:spcPts val="900"/>
+                <a:spcPts val="300"/>
               </a:spcAft>
             </a:pPr>
             <a:r>
-              <a:rPr sz="1400" b="0" i="0">
+              <a:rPr sz="1200" b="0" i="0">
                 <a:solidFill>
                   <a:srgbClr val="5A6270"/>
                 </a:solidFill>
                 <a:latin typeface="Calibri"/>
               </a:rPr>
-              <a:t>We only have 54 customers who left. That is far too few to learn from.</a:t>
+              <a:t>Roughly three-quarters of usage rows are dated before the subscription they belong to.</a:t>
             </a:r>
           </a:p>
           <a:p>
             <a:pPr>
               <a:spcAft>
-                <a:spcPts val="900"/>
+                <a:spcPts val="300"/>
               </a:spcAft>
             </a:pPr>
             <a:r>
@@ -4253,17 +4737,51 @@
           <a:p>
             <a:pPr>
               <a:spcAft>
-                <a:spcPts val="900"/>
+                <a:spcPts val="300"/>
               </a:spcAft>
             </a:pPr>
             <a:r>
-              <a:rPr sz="1600" b="1" i="0">
+              <a:rPr sz="1400" b="1" i="0">
                 <a:solidFill>
                   <a:srgbClr val="2E5F8A"/>
                 </a:solidFill>
                 <a:latin typeface="Calibri"/>
               </a:rPr>
-              <a:t>What this means practically: do not buy or build a churn scoring product yet. Fix the two data problems, then measure again. That is one command once the data is clean.</a:t>
+              <a:t>Practically: do not buy or build churn scoring yet. Fix those two faults and re-measure, which is one command once the data is clean.</a:t>
+            </a:r>
+          </a:p>
+        </p:txBody>
+      </p:sp>
+      <p:sp>
+        <p:nvSpPr>
+          <p:cNvPr id="6" name="TextBox 5"/>
+          <p:cNvSpPr txBox="1"/>
+          <p:nvPr/>
+        </p:nvSpPr>
+        <p:spPr>
+          <a:xfrm>
+            <a:off x="685800" y="6126480"/>
+            <a:ext cx="10820095" cy="502920"/>
+          </a:xfrm>
+          <a:prstGeom prst="rect">
+            <a:avLst/>
+          </a:prstGeom>
+          <a:noFill/>
+        </p:spPr>
+        <p:txBody>
+          <a:bodyPr wrap="square">
+            <a:spAutoFit/>
+          </a:bodyPr>
+          <a:lstStyle/>
+          <a:p>
+            <a:r>
+              <a:rPr sz="1150" b="0" i="1">
+                <a:solidFill>
+                  <a:srgbClr val="5A6270"/>
+                </a:solidFill>
+                <a:latin typeface="Calibri"/>
+              </a:rPr>
+              <a:t>AUC is ranking accuracy: 0.50 is a coin flip, 1.00 is perfect. The metric is not doing the work — precision-recall and F1 agree, and on F1 the model beats a no-model policy by less than the optimism in its own tuned threshold. Ladder and null tests in the technical deck.</a:t>
             </a:r>
           </a:p>
         </p:txBody>
@@ -4409,7 +4927,7 @@
                 </a:solidFill>
                 <a:latin typeface="Calibri"/>
               </a:rPr>
-              <a:t>One action already pays for itself. Beyond that, we cannot yet prove what works.</a:t>
+              <a:t>One action pays for itself today. Beyond that, we cannot yet prove what works.</a:t>
             </a:r>
           </a:p>
         </p:txBody>
@@ -4422,7 +4940,7 @@
         </p:nvSpPr>
         <p:spPr>
           <a:xfrm>
-            <a:off x="685800" y="1719072"/>
+            <a:off x="685800" y="2240280"/>
             <a:ext cx="10820095" cy="4572000"/>
           </a:xfrm>
           <a:prstGeom prst="rect">
@@ -4438,55 +4956,55 @@
           <a:p>
             <a:pPr>
               <a:spcAft>
-                <a:spcPts val="900"/>
+                <a:spcPts val="500"/>
               </a:spcAft>
             </a:pPr>
             <a:r>
-              <a:rPr sz="1600" b="1" i="0">
+              <a:rPr sz="1500" b="1" i="0">
                 <a:solidFill>
                   <a:srgbClr val="1E7A4B"/>
                 </a:solidFill>
                 <a:latin typeface="Calibri"/>
               </a:rPr>
-              <a:t>Do this now: call every at-risk customer, and do not rank them.</a:t>
+              <a:t>Do this now: contact every at-risk customer, and do not rank them.</a:t>
             </a:r>
           </a:p>
           <a:p>
             <a:pPr lvl="1">
               <a:spcAft>
-                <a:spcPts val="900"/>
+                <a:spcPts val="500"/>
               </a:spcAft>
             </a:pPr>
             <a:r>
-              <a:rPr sz="1400" b="0" i="0">
+              <a:rPr sz="1300" b="0" i="0">
                 <a:solidFill>
                   <a:srgbClr val="5A6270"/>
                 </a:solidFill>
                 <a:latin typeface="Calibri"/>
               </a:rPr>
-              <a:t>A call costs around $150. A customer is worth around $7,300. If one call in five succeeds, it pays for itself on any customer with more than a 10% chance of leaving. In this group 31% leave, so the maths is comfortable.</a:t>
+              <a:t>A call costs around $150 and an average customer is worth around $7,300. If one call in five succeeds, it pays for itself on anyone with more than a 10% chance of leaving. In this group 31% left within 90 days, so the margin is wide.</a:t>
             </a:r>
           </a:p>
           <a:p>
             <a:pPr lvl="1">
               <a:spcAft>
-                <a:spcPts val="900"/>
+                <a:spcPts val="500"/>
               </a:spcAft>
             </a:pPr>
             <a:r>
-              <a:rPr sz="1400" b="0" i="0">
+              <a:rPr sz="1300" b="0" i="0">
                 <a:solidFill>
                   <a:srgbClr val="5A6270"/>
                 </a:solidFill>
                 <a:latin typeface="Calibri"/>
               </a:rPr>
-              <a:t>Calling everyone is profitable today, with no model needed. That is why the failed prediction work does not hold up the decision.</a:t>
+              <a:t>This rests on the cost arithmetic rather than on the model, which is why the prediction result does not hold up the decision.</a:t>
             </a:r>
           </a:p>
           <a:p>
             <a:pPr>
               <a:spcAft>
-                <a:spcPts val="900"/>
+                <a:spcPts val="500"/>
               </a:spcAft>
             </a:pPr>
             <a:r>
@@ -4502,39 +5020,39 @@
           <a:p>
             <a:pPr>
               <a:spcAft>
-                <a:spcPts val="900"/>
+                <a:spcPts val="500"/>
               </a:spcAft>
             </a:pPr>
             <a:r>
-              <a:rPr sz="1600" b="1" i="0">
+              <a:rPr sz="1500" b="1" i="0">
                 <a:solidFill>
                   <a:srgbClr val="B02E2E"/>
                 </a:solidFill>
                 <a:latin typeface="Calibri"/>
               </a:rPr>
-              <a:t>Do not do this: the onboarding programme.</a:t>
+              <a:t>Hold off on this: the structured onboarding programme.</a:t>
             </a:r>
           </a:p>
           <a:p>
             <a:pPr lvl="1">
               <a:spcAft>
-                <a:spcPts val="900"/>
+                <a:spcPts val="500"/>
               </a:spcAft>
             </a:pPr>
             <a:r>
-              <a:rPr sz="1400" b="0" i="0">
+              <a:rPr sz="1300" b="0" i="0">
                 <a:solidFill>
                   <a:srgbClr val="5A6270"/>
                 </a:solidFill>
                 <a:latin typeface="Calibri"/>
               </a:rPr>
-              <a:t>It looks like new customers are more fragile, which is the usual reason to invest here. The pattern is a trick of the numbers. Corrected, a customer of ten months is just as likely to leave as one of ten days.</a:t>
+              <a:t>New customers look more fragile, which is the usual reason to invest here. The pattern appears to be composition rather than tenure: pooled together the risk looks front-loaded, but within each signup cohort it is flat. On that reading a ten-month customer is about as likely to leave as a ten-day one.</a:t>
             </a:r>
           </a:p>
           <a:p>
             <a:pPr>
               <a:spcAft>
-                <a:spcPts val="900"/>
+                <a:spcPts val="500"/>
               </a:spcAft>
             </a:pPr>
             <a:r>
@@ -4550,33 +5068,33 @@
           <a:p>
             <a:pPr>
               <a:spcAft>
-                <a:spcPts val="900"/>
+                <a:spcPts val="500"/>
               </a:spcAft>
             </a:pPr>
             <a:r>
-              <a:rPr sz="1600" b="1" i="0">
+              <a:rPr sz="1500" b="1" i="0">
                 <a:solidFill>
                   <a:srgbClr val="1A1A1A"/>
                 </a:solidFill>
                 <a:latin typeface="Calibri"/>
               </a:rPr>
-              <a:t>The limit on everything else we might try.</a:t>
+              <a:t>Everything else we might try is currently untestable, not disproven.</a:t>
             </a:r>
           </a:p>
           <a:p>
             <a:pPr lvl="1">
               <a:spcAft>
-                <a:spcPts val="900"/>
+                <a:spcPts val="500"/>
               </a:spcAft>
             </a:pPr>
             <a:r>
-              <a:rPr sz="1400" b="0" i="0">
+              <a:rPr sz="1300" b="0" i="0">
                 <a:solidFill>
                   <a:srgbClr val="5A6270"/>
                 </a:solidFill>
                 <a:latin typeface="Calibri"/>
               </a:rPr>
-              <a:t>Nowhere in our data is there a record of a customer being called, offered a discount, or put into a campaign. With no record of what we did, there is no way to measure what worked. Every other retention idea is currently an opinion, including good ones.</a:t>
+              <a:t>No call, discount or campaign is recorded anywhere in the data. Without a record of what we did there is no way to measure what worked, so the other retention ideas are opinions for now, including the good ones.</a:t>
             </a:r>
           </a:p>
         </p:txBody>
@@ -4610,7 +5128,7 @@
                 </a:solidFill>
                 <a:latin typeface="Calibri"/>
               </a:rPr>
-              <a:t>The first action rests on cost and value, which we know well. It does not rest on the model. To go further we need to log what we do and run one deliberate trial. Slide 6 covers both.</a:t>
+              <a:t>Costs and save rates are our estimates and should be replaced with finance's figures. The onboarding finding is a within-cohort result on 54 churners and would be worth revisiting if richer cohort data arrives.</a:t>
             </a:r>
           </a:p>
         </p:txBody>
@@ -4772,7 +5290,7 @@
                 </a:solidFill>
                 <a:latin typeface="Calibri"/>
               </a:rPr>
-              <a:t>What an average customer is worth to us</a:t>
+              <a:t>Average customer value, 3 years, discounted</a:t>
             </a:r>
           </a:p>
         </p:txBody>
@@ -4822,7 +5340,7 @@
                 </a:solidFill>
                 <a:latin typeface="Calibri"/>
               </a:rPr>
-              <a:t>Of at-risk customers leave within 90 days</a:t>
+              <a:t>Of this at-risk group left within 90 days (54 of 177)</a:t>
             </a:r>
           </a:p>
         </p:txBody>
@@ -4872,7 +5390,7 @@
                 </a:solidFill>
                 <a:latin typeface="Calibri"/>
               </a:rPr>
-              <a:t>The break-even point for making a call</a:t>
+              <a:t>Break-even chance of leaving for one call</a:t>
             </a:r>
           </a:p>
         </p:txBody>
@@ -4922,7 +5440,7 @@
                 </a:solidFill>
                 <a:latin typeface="Calibri"/>
               </a:rPr>
-              <a:t>Value of calling this group of 177 customers</a:t>
+              <a:t>Value of calling all 177, at a 1-in-5 save rate</a:t>
             </a:r>
           </a:p>
         </p:txBody>
@@ -4972,7 +5490,7 @@
                 </a:solidFill>
                 <a:latin typeface="Calibri"/>
               </a:rPr>
-              <a:t>Extra value a perfect ranking would add</a:t>
+              <a:t>What a perfect ranking would add on top</a:t>
             </a:r>
           </a:p>
         </p:txBody>
@@ -5022,7 +5540,7 @@
                 </a:solidFill>
                 <a:latin typeface="Calibri"/>
               </a:rPr>
-              <a:t>To prove a retention programme works</a:t>
+              <a:t>To prove a halving of churn; smaller gains take years</a:t>
             </a:r>
           </a:p>
         </p:txBody>
@@ -5035,7 +5553,7 @@
         </p:nvSpPr>
         <p:spPr>
           <a:xfrm>
-            <a:off x="685800" y="5486400"/>
+            <a:off x="685800" y="5120640"/>
             <a:ext cx="10820095" cy="4572000"/>
           </a:xfrm>
           <a:prstGeom prst="rect">
@@ -5055,13 +5573,13 @@
               </a:spcAft>
             </a:pPr>
             <a:r>
-              <a:rPr sz="1500" b="1" i="0">
+              <a:rPr sz="1400" b="1" i="0">
                 <a:solidFill>
                   <a:srgbClr val="1A1A1A"/>
                 </a:solidFill>
                 <a:latin typeface="Calibri"/>
               </a:rPr>
-              <a:t>Customers leave three times more often than the break-even point, so contacting all of them makes money without any model involved. A perfect ranking would add about 1% on top. That is why the failed model does not block the decision.</a:t>
+              <a:t>Customers here leave about three times as often as the break-even point, so contacting all of them makes money without any model involved. A perfect ranking would add roughly 1% on top. That is why the prediction result does not block this decision.</a:t>
             </a:r>
           </a:p>
         </p:txBody>
@@ -5095,7 +5613,7 @@
                 </a:solidFill>
                 <a:latin typeface="Calibri"/>
               </a:rPr>
-              <a:t>Cost and success rates are estimates and should be replaced with finance's figures. The conclusion holds across a wide range of them.</a:t>
+              <a:t>The call cost and the 1-in-5 save rate are our assumptions rather than finance's, and should be replaced. We varied both widely and the treat-everyone conclusion held: break-even would have to rise past 31% to reverse it.</a:t>
             </a:r>
           </a:p>
         </p:txBody>
@@ -5262,7 +5780,7 @@
                 </a:solidFill>
                 <a:latin typeface="Calibri"/>
               </a:rPr>
-              <a:t>Give us anything that changes over time and could affect customers: price changes, release dates, outages, competitor moves. We can already prove the rise is real. This would let us name the cause.</a:t>
+              <a:t>Give us anything that varies over time and could plausibly affect customers: price changes, release dates, outages, competitor moves. We can already establish the rise. This is what would let us attribute it.</a:t>
             </a:r>
           </a:p>
           <a:p>
@@ -5294,7 +5812,7 @@
                 </a:solidFill>
                 <a:latin typeface="Calibri"/>
               </a:rPr>
-              <a:t>To make prediction possible  (Question 2)</a:t>
+              <a:t>To make prediction answerable  (Question 2)</a:t>
             </a:r>
           </a:p>
           <a:p>
@@ -5310,7 +5828,7 @@
                 </a:solidFill>
                 <a:latin typeface="Calibri"/>
               </a:rPr>
-              <a:t>Agree one definition of churn and apply it everywhere. Our three current sources agree for one customer in five.</a:t>
+              <a:t>Agree one definition of churn and apply it everywhere. The three definitions we currently have agree on about one account in five.</a:t>
             </a:r>
           </a:p>
           <a:p>
@@ -5326,7 +5844,7 @@
                 </a:solidFill>
                 <a:latin typeface="Calibri"/>
               </a:rPr>
-              <a:t>Fix the product usage timestamps. Most records are dated before the subscription they belong to.</a:t>
+              <a:t>Fix the product usage timestamps. Roughly three-quarters of rows are dated before the subscription they belong to.</a:t>
             </a:r>
           </a:p>
           <a:p>
@@ -5342,7 +5860,7 @@
                 </a:solidFill>
                 <a:latin typeface="Calibri"/>
               </a:rPr>
-              <a:t>This is the highest-leverage item on the page, because it also unblocks the other two.</a:t>
+              <a:t>We would put this first, because it also unblocks the other two.</a:t>
             </a:r>
           </a:p>
           <a:p>
@@ -5390,7 +5908,7 @@
                 </a:solidFill>
                 <a:latin typeface="Calibri"/>
               </a:rPr>
-              <a:t>Start logging every call, discount and campaign with a date and a customer attached. Then run one deliberate trial where half the at-risk customers are contacted and half are not.</a:t>
+              <a:t>Start logging every call, discount and campaign with a date and an account attached. Then run one deliberate trial where half the at-risk customers are contacted and half are not.</a:t>
             </a:r>
           </a:p>
           <a:p>
@@ -5406,7 +5924,7 @@
                 </a:solidFill>
                 <a:latin typeface="Calibri"/>
               </a:rPr>
-              <a:t>Be aware we can only detect a large effect at our size. Roughly halving churn would show up in about 15 months. A smaller improvement would take years to prove.</a:t>
+              <a:t>Worth setting expectations on what a trial of our size can settle: roughly halving churn would show up in about 15 months, while a 5-point improvement would take years.</a:t>
             </a:r>
           </a:p>
         </p:txBody>
@@ -5440,7 +5958,7 @@
                 </a:solidFill>
                 <a:latin typeface="Calibri"/>
               </a:rPr>
-              <a:t>None of these is a modelling problem. All three are data collection, and none of them is expensive.</a:t>
+              <a:t>None of these is a modelling problem. All three are data collection, none of them is expensive, and none asks for a decision on tooling yet.</a:t>
             </a:r>
           </a:p>
         </p:txBody>

--- a/outputs/AvePoint_Executive_Summary.pptx
+++ b/outputs/AvePoint_Executive_Summary.pptx
@@ -507,7 +507,19 @@
           <a:lstStyle/>
           <a:p>
             <a:r>
-              <a:t>One minute. Give all three answers immediately, then spend one slide on each. Two of the three answers are negative and I say so on slide one rather than building up to it. If pressed on how firm they are: answer one is the strongest result in the study, answer two is a 'cannot tell' rather than a 'no', answer three rests on cost arithmetic we can check rather than on any model.</a:t>
+              <a:t>One minute. Give all three answers immediately, then one slide each. Two of the three are negative and I say so here rather than building up to it.</a:t>
+            </a:r>
+          </a:p>
+          <a:p/>
+          <a:p>
+            <a:r>
+              <a:t>The first answer changed late in the work, and that is the part worth being open about if asked. We had a strong result — churn accelerating 2.8x a year, p = 2e-16 — and it is reproduced exactly by a simulation that contains nothing but a random number generator. Slide 2 shows the overlay. Catching it is worth more than the finding was, because acting on it would have cost a quarter of somebody's time.</a:t>
+            </a:r>
+          </a:p>
+          <a:p/>
+          <a:p>
+            <a:r>
+              <a:t>The third answer is untouched by any of this. It rests on cost arithmetic we can check, not on the model.</a:t>
             </a:r>
           </a:p>
         </p:txBody>
@@ -577,7 +589,31 @@
           <a:lstStyle/>
           <a:p>
             <a:r>
-              <a:t>If asked how solid each half is. The rise: Poisson trend on calendar month with accounts-at-risk as offset, rate ratio 1.089 per month, p = 2e-16. The flat cross-section: Cox over 21 characteristics returns global p = 0.57 and concordance 0.571; log-rank across 7 segments has a smallest adjusted p of 0.39. The two facts are one fact. Something that moves every account at once leaves no differences between accounts for a model to find.</a:t>
+              <a:t>Expect: 'you showed us a rising chart last time — what changed?'</a:t>
+            </a:r>
+          </a:p>
+          <a:p/>
+          <a:p>
+            <a:r>
+              <a:t>What changed is the test. The original one asked whether the rise was bigger than random noise. It was, comfortably: rate ratio 1.089 a month, p = 2e-16. The right question on a data extract is different — would the file produce this on its own. Nothing can be recorded after the last day of the file, so if churn dates are assigned at random they pile up at the end and the rate appears to climb.</a:t>
+            </a:r>
+          </a:p>
+          <a:p/>
+          <a:p>
+            <a:r>
+              <a:t>We tested that by rebuilding the data: same customers, same joining dates, same number of departures each, only the dates redrawn at random. That gives a 2.78x annual rise against the 2.79x we observe, with all 24 months inside the band. Our result sits at the 52nd percentile of pure chance.</a:t>
+            </a:r>
+          </a:p>
+          <a:p/>
+          <a:p>
+            <a:r>
+              <a:t>If pressed on the flat cross-section: Cox over 21 characteristics returns global p = 0.57 and concordance 0.571; log-rank across 7 segments has a smallest adjusted p of 0.39.</a:t>
+            </a:r>
+          </a:p>
+          <a:p/>
+          <a:p>
+            <a:r>
+              <a:t>The honest summary is that we now have a proven negative rather than an unproven positive, and the proven negative saves money.</a:t>
             </a:r>
           </a:p>
         </p:txBody>
@@ -665,7 +701,13 @@
           <a:p/>
           <a:p>
             <a:r>
-              <a:t>The three approaches are the cross-sectional classifier, a Cox survival model (concordance 0.509) and the horizon sweep. Do not overclaim the negative: the planted weak-signal control scores AUC 0.584 against our 0.583, so 'underpowered' is the defensible claim and 'no signal exists' is not.</a:t>
+              <a:t>The three approaches are the cross-sectional classifier, a Cox survival model (concordance 0.509) and the horizon sweep.</a:t>
+            </a:r>
+          </a:p>
+          <a:p/>
+          <a:p>
+            <a:r>
+              <a:t>Be precise about how strong the negative is, because it differs by source. For usage and support it is flat: those timestamps correlate with their own account's signup date at r = 0.002 and r = 0.014, so there was never anything to find. For customer characteristics it is an underpowered null rather than an absence — the planted weak-signal control scores AUC 0.584 against our 0.583, so at 54 churners the two are indistinguishable. The slide separates them deliberately.</a:t>
             </a:r>
           </a:p>
         </p:txBody>
@@ -735,7 +777,13 @@
           <a:lstStyle/>
           <a:p>
             <a:r>
-              <a:t>The first action is the one thing on this deck that does not depend on the modelling. Break-even is 10.3% against a base rate of 30.5%, a factor of three, so it survives large errors in the cost assumptions. On onboarding: the pooled hazard genuinely does fall, rho = 0.737 with p = 1.7e-13, which is why the obvious analysis recommends the programme. Within each signup cohort rho comes back to about 1 (range 0.87 to 1.25, none significant), so the pooled shape is which cohorts are present at each tenure, not tenure itself. This reverses a recommendation an earlier pass of this work made.</a:t>
+              <a:t>The first action is the one thing on this deck that does not depend on the modelling, or on slide 2. Break-even is 10.3% against a base rate of 30.5%, a factor of three, so it survives large errors in the cost assumptions.</a:t>
+            </a:r>
+          </a:p>
+          <a:p/>
+          <a:p>
+            <a:r>
+              <a:t>On onboarding: the pooled hazard genuinely does fall, rho = 0.737 with p = 1.7e-13, which is why the obvious analysis funds the programme. Simulated data with no tenure effect in it at all clears the significance bar in 93% of runs, and more strongly than the real data does — p = 0.002 against 0.006. Within each signup cohort rho comes back to about 1 (range 0.87 to 1.25, none significant). This reverses a recommendation an earlier pass of this work made.</a:t>
             </a:r>
           </a:p>
         </p:txBody>
@@ -875,7 +923,19 @@
           <a:lstStyle/>
           <a:p>
             <a:r>
-              <a:t>Close on the ask rather than on the negative results. The second request is the one to push, because the label and the timestamps block any re-measurement of question two and also limit what we can say about the other two.</a:t>
+              <a:t>Close on the ask rather than on the negative results.</a:t>
+            </a:r>
+          </a:p>
+          <a:p/>
+          <a:p>
+            <a:r>
+              <a:t>The ordering is the message. The obvious request after slide 2 is 'give us the 2024 event timeline', and it is the wrong one to lead with: joining real business events onto timestamps that were assigned at random produces confident nonsense. Fix the export first.</a:t>
+            </a:r>
+          </a:p>
+          <a:p/>
+          <a:p>
+            <a:r>
+              <a:t>Request three is independent of the other two and can start on Monday. It costs a field in the CRM.</a:t>
             </a:r>
           </a:p>
         </p:txBody>
@@ -3977,11 +4037,11 @@
             <a:r>
               <a:rPr sz="1400" b="0" i="0">
                 <a:solidFill>
-                  <a:srgbClr val="1A1A1A"/>
-                </a:solidFill>
-                <a:latin typeface="Calibri"/>
-              </a:rPr>
-              <a:t>The pattern is about when, not who. Churn roughly quadrupled over two years, and no customer characteristic we hold separates those who left from those who stayed.</a:t>
+                  <a:srgbClr val="B02E2E"/>
+                </a:solidFill>
+                <a:latin typeface="Calibri"/>
+              </a:rPr>
+              <a:t>This data cannot tell us. The one pattern that looked like an answer — churn climbing through 2024 — is produced by the way the file was built, and we can show that directly.</a:t>
             </a:r>
           </a:p>
           <a:p>
@@ -4013,7 +4073,7 @@
                 </a:solidFill>
                 <a:latin typeface="Calibri"/>
               </a:rPr>
-              <a:t>Not from this data as it stands. Two data faults have to be fixed before the question can be answered properly. A better algorithm is not the missing piece.</a:t>
+              <a:t>No, and a better algorithm is not the missing piece. Most of what we hold about customer behaviour is not connected to the customers it is supposed to describe.</a:t>
             </a:r>
           </a:p>
           <a:p>
@@ -4079,7 +4139,7 @@
                 </a:solidFill>
                 <a:latin typeface="Calibri"/>
               </a:rPr>
-              <a:t>Each answer carries its supporting numbers on its own slide, including where the evidence is thin. Two of the three are limited by the data we hold, not by the analysis.</a:t>
+              <a:t>Each answer carries its numbers on its own slide. The first two are limited by the data we hold, not by the analysis — and knowing that is what stops us spending money on either of them.</a:t>
             </a:r>
           </a:p>
         </p:txBody>
@@ -4143,7 +4203,7 @@
             <a:r>
               <a:rPr sz="2800" b="1" i="0">
                 <a:solidFill>
-                  <a:srgbClr val="1A1A1A"/>
+                  <a:srgbClr val="B02E2E"/>
                 </a:solidFill>
                 <a:latin typeface="Calibri"/>
               </a:rPr>
@@ -4221,18 +4281,18 @@
             <a:r>
               <a:rPr sz="2100" b="1" i="0">
                 <a:solidFill>
-                  <a:srgbClr val="2E5F8A"/>
-                </a:solidFill>
-                <a:latin typeface="Calibri"/>
-              </a:rPr>
-              <a:t>The clearest signal is when they were with us, not who they are.</a:t>
+                  <a:srgbClr val="B02E2E"/>
+                </a:solidFill>
+                <a:latin typeface="Calibri"/>
+              </a:rPr>
+              <a:t>This data cannot tell us — and the pattern that looked like an answer is not one.</a:t>
             </a:r>
           </a:p>
         </p:txBody>
       </p:sp>
       <p:pic>
         <p:nvPicPr>
-          <p:cNvPr id="5" name="Picture 4" descr="12_calendar_hazard.png"/>
+          <p:cNvPr id="5" name="Picture 4" descr="16_artefact_exec.png"/>
           <p:cNvPicPr>
             <a:picLocks noChangeAspect="1"/>
           </p:cNvPicPr>
@@ -4246,8 +4306,8 @@
         </p:blipFill>
         <p:spPr>
           <a:xfrm>
-            <a:off x="3535905" y="2240280"/>
-            <a:ext cx="5119884" cy="2286000"/>
+            <a:off x="3239214" y="2212848"/>
+            <a:ext cx="5713267" cy="2331720"/>
           </a:xfrm>
           <a:prstGeom prst="rect">
             <a:avLst/>
@@ -4262,7 +4322,7 @@
         </p:nvSpPr>
         <p:spPr>
           <a:xfrm>
-            <a:off x="685800" y="4590288"/>
+            <a:off x="685800" y="4663440"/>
             <a:ext cx="10820095" cy="4572000"/>
           </a:xfrm>
           <a:prstGeom prst="rect">
@@ -4282,13 +4342,13 @@
               </a:spcAft>
             </a:pPr>
             <a:r>
-              <a:rPr sz="1250" b="1" i="0">
+              <a:rPr sz="1200" b="1" i="0">
                 <a:solidFill>
                   <a:srgbClr val="1A1A1A"/>
                 </a:solidFill>
                 <a:latin typeface="Calibri"/>
               </a:rPr>
-              <a:t>Churn rose from about 5 in every 100 customers a month in 2023 to 22 in 100 by December 2024, on a customer base that did not grow. A 2.8x increase per year, and the most tightly estimated effect in the data.</a:t>
+              <a:t>Churn looks like it climbed from 5 in every 100 customers a month to 22 in 100 by December 2024. That was our strongest number by a distance.</a:t>
             </a:r>
           </a:p>
           <a:p>
@@ -4298,13 +4358,13 @@
               </a:spcAft>
             </a:pPr>
             <a:r>
-              <a:rPr sz="1250" b="0" i="0">
-                <a:solidFill>
-                  <a:srgbClr val="1A1A1A"/>
-                </a:solidFill>
-                <a:latin typeface="Calibri"/>
-              </a:rPr>
-              <a:t>We tested every characteristic we hold: industry, country, plan, size, how they found us, usage, support history. None separated leavers from stayers by more than chance produces. The best reaches AUC 0.62, against AUC 0.61 from deliberately scrambled labels.</a:t>
+              <a:rPr sz="1200" b="1" i="0">
+                <a:solidFill>
+                  <a:srgbClr val="B02E2E"/>
+                </a:solidFill>
+                <a:latin typeface="Calibri"/>
+              </a:rPr>
+              <a:t>It is manufactured. Every churn date in the file is a random date between the day the customer joined and the last day of the file. Random dates crowd towards the end of a file, which makes churn look like it is speeding up when nothing has happened. Rebuilding the data from that one rule reproduces the black line exactly — that is the red band.</a:t>
             </a:r>
           </a:p>
           <a:p>
@@ -4314,13 +4374,13 @@
               </a:spcAft>
             </a:pPr>
             <a:r>
-              <a:rPr sz="1250" b="0" i="0">
-                <a:solidFill>
-                  <a:srgbClr val="B02E2E"/>
-                </a:solidFill>
-                <a:latin typeface="Calibri"/>
-              </a:rPr>
-              <a:t>What we cannot yet say is why the rate rose. The data holds nothing that varies over time, so we can establish the increase but not attribute it. Slide 6 says what would fix that.</a:t>
+              <a:rPr sz="1200" b="0" i="0">
+                <a:solidFill>
+                  <a:srgbClr val="1A1A1A"/>
+                </a:solidFill>
+                <a:latin typeface="Calibri"/>
+              </a:rPr>
+              <a:t>We also tested every customer characteristic we hold: industry, country, plan, size, how they found us, usage and support history. None separates the customers who left from those who stayed.</a:t>
             </a:r>
           </a:p>
         </p:txBody>
@@ -4350,11 +4410,11 @@
             <a:r>
               <a:rPr sz="1150" b="0" i="1">
                 <a:solidFill>
-                  <a:srgbClr val="5A6270"/>
-                </a:solidFill>
-                <a:latin typeface="Calibri"/>
-              </a:rPr>
-              <a:t>AUC is ranking accuracy: 0.50 is a coin flip, 1.00 is perfect. With 54 churners we could only have detected a large difference between customer types, so "none found" is not proof that none exists. The rise over calendar time is the opposite case: large, and precisely estimated.</a:t>
+                  <a:srgbClr val="1A1A1A"/>
+                </a:solidFill>
+                <a:latin typeface="Calibri"/>
+              </a:rPr>
+              <a:t>What this is worth: it stops us spending a quarter hunting for a 2024 price change, outage or competitor move that did not happen. Slide 6 says what would actually let us answer the question.</a:t>
             </a:r>
           </a:p>
         </p:txBody>
@@ -4533,7 +4593,7 @@
               </a:spcAft>
             </a:pPr>
             <a:r>
-              <a:rPr sz="1400" b="1" i="0">
+              <a:rPr sz="1350" b="1" i="0">
                 <a:solidFill>
                   <a:srgbClr val="1A1A1A"/>
                 </a:solidFill>
@@ -4549,7 +4609,7 @@
               </a:spcAft>
             </a:pPr>
             <a:r>
-              <a:rPr sz="1200" b="0" i="0">
+              <a:rPr sz="1150" b="0" i="0">
                 <a:solidFill>
                   <a:srgbClr val="5A6270"/>
                 </a:solidFill>
@@ -4581,13 +4641,13 @@
               </a:spcAft>
             </a:pPr>
             <a:r>
-              <a:rPr sz="1400" b="1" i="0">
+              <a:rPr sz="1350" b="1" i="0">
                 <a:solidFill>
                   <a:srgbClr val="1A1A1A"/>
                 </a:solidFill>
                 <a:latin typeface="Calibri"/>
               </a:rPr>
-              <a:t>The careful version: we cannot tell, rather than there is nothing there.</a:t>
+              <a:t>The reason is the data, and it is now specific.</a:t>
             </a:r>
           </a:p>
           <a:p>
@@ -4597,13 +4657,45 @@
               </a:spcAft>
             </a:pPr>
             <a:r>
-              <a:rPr sz="1200" b="0" i="0">
+              <a:rPr sz="1150" b="0" i="0">
                 <a:solidFill>
                   <a:srgbClr val="5A6270"/>
                 </a:solidFill>
                 <a:latin typeface="Calibri"/>
               </a:rPr>
-              <a:t>A planted relationship that is real but weak also reaches AUC 0.58 here. At 54 churners the two are indistinguishable. Hence re-measure, rather than close the question.</a:t>
+              <a:t>Product usage and support tickets are not tied to the customers they describe. Their dates are scattered at random across the whole two years, which is why three-quarters of usage rows are dated before the subscription they belong to and half the tickets before the customer existed.</a:t>
+            </a:r>
+          </a:p>
+          <a:p>
+            <a:pPr lvl="1">
+              <a:spcAft>
+                <a:spcPts val="300"/>
+              </a:spcAft>
+            </a:pPr>
+            <a:r>
+              <a:rPr sz="1150" b="0" i="0">
+                <a:solidFill>
+                  <a:srgbClr val="5A6270"/>
+                </a:solidFill>
+                <a:latin typeface="Calibri"/>
+              </a:rPr>
+              <a:t>The thing we are predicting is a random date too, as slide 2 shows.</a:t>
+            </a:r>
+          </a:p>
+          <a:p>
+            <a:pPr lvl="1">
+              <a:spcAft>
+                <a:spcPts val="300"/>
+              </a:spcAft>
+            </a:pPr>
+            <a:r>
+              <a:rPr sz="1150" b="0" i="0">
+                <a:solidFill>
+                  <a:srgbClr val="5A6270"/>
+                </a:solidFill>
+                <a:latin typeface="Calibri"/>
+              </a:rPr>
+              <a:t>Three sources disagree on who churned: they agree on about one account in five, which is what two unrelated columns would do.</a:t>
             </a:r>
           </a:p>
           <a:p>
@@ -4629,13 +4721,13 @@
               </a:spcAft>
             </a:pPr>
             <a:r>
-              <a:rPr sz="1400" b="1" i="0">
+              <a:rPr sz="1350" b="1" i="0">
                 <a:solidFill>
                   <a:srgbClr val="1A1A1A"/>
                 </a:solidFill>
                 <a:latin typeface="Calibri"/>
               </a:rPr>
-              <a:t>The warning time we would need makes it harder, not easier.</a:t>
+              <a:t>How firm is this? Firmer for some parts than others.</a:t>
             </a:r>
           </a:p>
           <a:p>
@@ -4645,13 +4737,29 @@
               </a:spcAft>
             </a:pPr>
             <a:r>
-              <a:rPr sz="1200" b="0" i="0">
+              <a:rPr sz="1150" b="0" i="0">
                 <a:solidFill>
                   <a:srgbClr val="5A6270"/>
                 </a:solidFill>
                 <a:latin typeface="Calibri"/>
               </a:rPr>
-              <a:t>Asking for 30 days of notice, so somebody could act, moves every horizon into the AUC 0.42 to 0.52 band. A prediction that arrives too late to use is not useful.</a:t>
+              <a:t>For usage and support we can say there is nothing there, because those records were never linked to the customer in the first place.</a:t>
+            </a:r>
+          </a:p>
+          <a:p>
+            <a:pPr lvl="1">
+              <a:spcAft>
+                <a:spcPts val="300"/>
+              </a:spcAft>
+            </a:pPr>
+            <a:r>
+              <a:rPr sz="1150" b="0" i="0">
+                <a:solidFill>
+                  <a:srgbClr val="5A6270"/>
+                </a:solidFill>
+                <a:latin typeface="Calibri"/>
+              </a:rPr>
+              <a:t>For customer characteristics — industry, plan, size — the honest claim is that we could not detect anything with 54 churners, not that nothing exists.</a:t>
             </a:r>
           </a:p>
           <a:p>
@@ -4677,13 +4785,13 @@
               </a:spcAft>
             </a:pPr>
             <a:r>
-              <a:rPr sz="1400" b="1" i="0">
+              <a:rPr sz="1350" b="1" i="0">
                 <a:solidFill>
                   <a:srgbClr val="1A1A1A"/>
                 </a:solidFill>
                 <a:latin typeface="Calibri"/>
               </a:rPr>
-              <a:t>Two data faults are doing most of the damage.</a:t>
+              <a:t>The warning time we would need makes it harder, not easier.</a:t>
             </a:r>
           </a:p>
           <a:p>
@@ -4693,29 +4801,13 @@
               </a:spcAft>
             </a:pPr>
             <a:r>
-              <a:rPr sz="1200" b="0" i="0">
+              <a:rPr sz="1150" b="0" i="0">
                 <a:solidFill>
                   <a:srgbClr val="5A6270"/>
                 </a:solidFill>
                 <a:latin typeface="Calibri"/>
               </a:rPr>
-              <a:t>Three sources disagree on who churned: they agree on about one account in five, which is what two unrelated columns would do.</a:t>
-            </a:r>
-          </a:p>
-          <a:p>
-            <a:pPr lvl="1">
-              <a:spcAft>
-                <a:spcPts val="300"/>
-              </a:spcAft>
-            </a:pPr>
-            <a:r>
-              <a:rPr sz="1200" b="0" i="0">
-                <a:solidFill>
-                  <a:srgbClr val="5A6270"/>
-                </a:solidFill>
-                <a:latin typeface="Calibri"/>
-              </a:rPr>
-              <a:t>Roughly three-quarters of usage rows are dated before the subscription they belong to.</a:t>
+              <a:t>Asking for 30 days of notice, so somebody could act, moves every horizon into the AUC 0.42 to 0.52 band. A prediction that arrives too late to use is not useful.</a:t>
             </a:r>
           </a:p>
           <a:p>
@@ -4741,13 +4833,13 @@
               </a:spcAft>
             </a:pPr>
             <a:r>
-              <a:rPr sz="1400" b="1" i="0">
+              <a:rPr sz="1350" b="1" i="0">
                 <a:solidFill>
                   <a:srgbClr val="2E5F8A"/>
                 </a:solidFill>
                 <a:latin typeface="Calibri"/>
               </a:rPr>
-              <a:t>Practically: do not buy or build churn scoring yet. Fix those two faults and re-measure, which is one command once the data is clean.</a:t>
+              <a:t>Practically: do not buy or build churn scoring on this. It needs a different export, not a better model — see slide 6.</a:t>
             </a:r>
           </a:p>
         </p:txBody>
@@ -5046,7 +5138,7 @@
                 </a:solidFill>
                 <a:latin typeface="Calibri"/>
               </a:rPr>
-              <a:t>New customers look more fragile, which is the usual reason to invest here. The pattern appears to be composition rather than tenure: pooled together the risk looks front-loaded, but within each signup cohort it is flat. On that reading a ten-month customer is about as likely to leave as a ten-day one.</a:t>
+              <a:t>New customers look more fragile, which is the usual reason to invest here. It is the same random date as slide 2: a customer who joined recently has a shorter window for that date to land in, so they look worse at every age without anything about them being worse. Within a single joining month, a ten-month customer is as likely to leave as a ten-day one.</a:t>
             </a:r>
           </a:p>
           <a:p>
@@ -5128,7 +5220,7 @@
                 </a:solidFill>
                 <a:latin typeface="Calibri"/>
               </a:rPr>
-              <a:t>Costs and save rates are our estimates and should be replaced with finance's figures. The onboarding finding is a within-cohort result on 54 churners and would be worth revisiting if richer cohort data arrives.</a:t>
+              <a:t>Costs and save rates are our estimates and should be replaced with finance's figures. The conclusion holds across a wide range of them: break-even would have to rise past 31% to reverse it.</a:t>
             </a:r>
           </a:p>
         </p:txBody>
@@ -5754,39 +5846,71 @@
           <a:p>
             <a:pPr>
               <a:spcAft>
-                <a:spcPts val="700"/>
+                <a:spcPts val="600"/>
               </a:spcAft>
             </a:pPr>
             <a:r>
-              <a:rPr sz="1500" b="1" i="0">
+              <a:rPr sz="1400" b="1" i="0">
                 <a:solidFill>
                   <a:srgbClr val="2E5F8A"/>
                 </a:solidFill>
                 <a:latin typeface="Calibri"/>
               </a:rPr>
-              <a:t>To explain why churn is rising  (Question 1)</a:t>
+              <a:t>An export we can trust  (unlocks Questions 1 and 2 together)</a:t>
             </a:r>
           </a:p>
           <a:p>
             <a:pPr lvl="1">
               <a:spcAft>
-                <a:spcPts val="700"/>
+                <a:spcPts val="600"/>
               </a:spcAft>
             </a:pPr>
             <a:r>
-              <a:rPr sz="1300" b="0" i="0">
+              <a:rPr sz="1200" b="0" i="0">
                 <a:solidFill>
                   <a:srgbClr val="5A6270"/>
                 </a:solidFill>
                 <a:latin typeface="Calibri"/>
               </a:rPr>
-              <a:t>Give us anything that varies over time and could plausibly affect customers: price changes, release dates, outages, competitor moves. We can already establish the rise. This is what would let us attribute it.</a:t>
+              <a:t>Every usage record and support ticket carried with the customer and the date it actually happened. Today those dates are unrelated to the customer they are filed against, which is the single reason both questions are unanswerable.</a:t>
+            </a:r>
+          </a:p>
+          <a:p>
+            <a:pPr lvl="1">
+              <a:spcAft>
+                <a:spcPts val="600"/>
+              </a:spcAft>
+            </a:pPr>
+            <a:r>
+              <a:rPr sz="1200" b="0" i="0">
+                <a:solidFill>
+                  <a:srgbClr val="5A6270"/>
+                </a:solidFill>
+                <a:latin typeface="Calibri"/>
+              </a:rPr>
+              <a:t>One definition of churn, applied everywhere, with a date on it. The three we currently have agree on about one account in five.</a:t>
+            </a:r>
+          </a:p>
+          <a:p>
+            <a:pPr lvl="1">
+              <a:spcAft>
+                <a:spcPts val="600"/>
+              </a:spcAft>
+            </a:pPr>
+            <a:r>
+              <a:rPr sz="1200" b="0" i="0">
+                <a:solidFill>
+                  <a:srgbClr val="5A6270"/>
+                </a:solidFill>
+                <a:latin typeface="Calibri"/>
+              </a:rPr>
+              <a:t>This is the request to push. Nothing else on this page matters without it, and re-running our analysis afterwards is one command.</a:t>
             </a:r>
           </a:p>
           <a:p>
             <a:pPr>
               <a:spcAft>
-                <a:spcPts val="700"/>
+                <a:spcPts val="600"/>
               </a:spcAft>
             </a:pPr>
             <a:r>
@@ -5802,123 +5926,91 @@
           <a:p>
             <a:pPr>
               <a:spcAft>
-                <a:spcPts val="700"/>
+                <a:spcPts val="600"/>
               </a:spcAft>
             </a:pPr>
             <a:r>
-              <a:rPr sz="1500" b="1" i="0">
+              <a:rPr sz="1400" b="1" i="0">
                 <a:solidFill>
                   <a:srgbClr val="1A1A1A"/>
                 </a:solidFill>
                 <a:latin typeface="Calibri"/>
               </a:rPr>
-              <a:t>To make prediction answerable  (Question 2)</a:t>
+              <a:t>Then, and only then, the business timeline  (Question 1)</a:t>
             </a:r>
           </a:p>
           <a:p>
             <a:pPr lvl="1">
               <a:spcAft>
-                <a:spcPts val="700"/>
+                <a:spcPts val="600"/>
               </a:spcAft>
             </a:pPr>
             <a:r>
-              <a:rPr sz="1300" b="0" i="0">
+              <a:rPr sz="1200" b="0" i="0">
                 <a:solidFill>
                   <a:srgbClr val="5A6270"/>
                 </a:solidFill>
                 <a:latin typeface="Calibri"/>
               </a:rPr>
-              <a:t>Agree one definition of churn and apply it everywhere. The three definitions we currently have agree on about one account in five.</a:t>
+              <a:t>Price changes, release dates, outages, competitor moves. This is the right request, but it is worth nothing against the current export — we would be matching real events to random dates.</a:t>
+            </a:r>
+          </a:p>
+          <a:p>
+            <a:pPr>
+              <a:spcAft>
+                <a:spcPts val="600"/>
+              </a:spcAft>
+            </a:pPr>
+            <a:r>
+              <a:rPr sz="600" b="0" i="0">
+                <a:solidFill>
+                  <a:srgbClr val="1A1A1A"/>
+                </a:solidFill>
+                <a:latin typeface="Calibri"/>
+              </a:rPr>
+              <a:t> </a:t>
+            </a:r>
+          </a:p>
+          <a:p>
+            <a:pPr>
+              <a:spcAft>
+                <a:spcPts val="600"/>
+              </a:spcAft>
+            </a:pPr>
+            <a:r>
+              <a:rPr sz="1400" b="1" i="0">
+                <a:solidFill>
+                  <a:srgbClr val="1E7A4B"/>
+                </a:solidFill>
+                <a:latin typeface="Calibri"/>
+              </a:rPr>
+              <a:t>To learn which actions work  (Question 3)</a:t>
             </a:r>
           </a:p>
           <a:p>
             <a:pPr lvl="1">
               <a:spcAft>
-                <a:spcPts val="700"/>
+                <a:spcPts val="600"/>
               </a:spcAft>
             </a:pPr>
             <a:r>
-              <a:rPr sz="1300" b="0" i="0">
+              <a:rPr sz="1200" b="0" i="0">
                 <a:solidFill>
                   <a:srgbClr val="5A6270"/>
                 </a:solidFill>
                 <a:latin typeface="Calibri"/>
               </a:rPr>
-              <a:t>Fix the product usage timestamps. Roughly three-quarters of rows are dated before the subscription they belong to.</a:t>
+              <a:t>Start logging every call, discount and campaign with a date and an account attached. Then run one deliberate trial where half the at-risk customers are contacted and half are not.</a:t>
             </a:r>
           </a:p>
           <a:p>
             <a:pPr lvl="1">
               <a:spcAft>
-                <a:spcPts val="700"/>
+                <a:spcPts val="600"/>
               </a:spcAft>
             </a:pPr>
             <a:r>
-              <a:rPr sz="1300" b="0" i="0">
-                <a:solidFill>
-                  <a:srgbClr val="5A6270"/>
-                </a:solidFill>
-                <a:latin typeface="Calibri"/>
-              </a:rPr>
-              <a:t>We would put this first, because it also unblocks the other two.</a:t>
-            </a:r>
-          </a:p>
-          <a:p>
-            <a:pPr>
-              <a:spcAft>
-                <a:spcPts val="700"/>
-              </a:spcAft>
-            </a:pPr>
-            <a:r>
-              <a:rPr sz="600" b="0" i="0">
-                <a:solidFill>
-                  <a:srgbClr val="1A1A1A"/>
-                </a:solidFill>
-                <a:latin typeface="Calibri"/>
-              </a:rPr>
-              <a:t> </a:t>
-            </a:r>
-          </a:p>
-          <a:p>
-            <a:pPr>
-              <a:spcAft>
-                <a:spcPts val="700"/>
-              </a:spcAft>
-            </a:pPr>
-            <a:r>
-              <a:rPr sz="1500" b="1" i="0">
-                <a:solidFill>
-                  <a:srgbClr val="1E7A4B"/>
-                </a:solidFill>
-                <a:latin typeface="Calibri"/>
-              </a:rPr>
-              <a:t>To learn which actions work  (Question 3)</a:t>
-            </a:r>
-          </a:p>
-          <a:p>
-            <a:pPr lvl="1">
-              <a:spcAft>
-                <a:spcPts val="700"/>
-              </a:spcAft>
-            </a:pPr>
-            <a:r>
-              <a:rPr sz="1300" b="0" i="0">
-                <a:solidFill>
-                  <a:srgbClr val="5A6270"/>
-                </a:solidFill>
-                <a:latin typeface="Calibri"/>
-              </a:rPr>
-              <a:t>Start logging every call, discount and campaign with a date and an account attached. Then run one deliberate trial where half the at-risk customers are contacted and half are not.</a:t>
-            </a:r>
-          </a:p>
-          <a:p>
-            <a:pPr lvl="1">
-              <a:spcAft>
-                <a:spcPts val="700"/>
-              </a:spcAft>
-            </a:pPr>
-            <a:r>
-              <a:rPr sz="1300" b="0" i="0">
+              <a:rPr sz="1200" b="0" i="0">
                 <a:solidFill>
                   <a:srgbClr val="5A6270"/>
                 </a:solidFill>
